--- a/2026-05-23_AI_Image_and_Multimodal_Models/2026-05-23_AI_Image_and_Multimodal_Models.pptx
+++ b/2026-05-23_AI_Image_and_Multimodal_Models/2026-05-23_AI_Image_and_Multimodal_Models.pptx
@@ -19,6 +19,7 @@
     <p:sldId id="267" r:id="rId18"/>
     <p:sldId id="268" r:id="rId19"/>
     <p:sldId id="269" r:id="rId20"/>
+    <p:sldId id="270" r:id="rId21"/>
   </p:sldIdLst>
   <p:sldSz cx="12188952" cy="6858000" type="screen4x3"/>
   <p:notesSz cx="6858000" cy="9144000"/>
@@ -3470,7 +3471,7 @@
               </a:defRPr>
             </a:pPr>
             <a:r>
-              <a:t>The Dark Side: Deepfakes &amp; Misuse</a:t>
+              <a:t>Live Demo Time!</a:t>
             </a:r>
           </a:p>
         </p:txBody>
@@ -3526,8 +3527,8 @@
         </p:nvSpPr>
         <p:spPr>
           <a:xfrm>
-            <a:off x="457200" y="868680"/>
-            <a:ext cx="11274552" cy="365760"/>
+            <a:off x="457200" y="1645920"/>
+            <a:ext cx="11274552" cy="548640"/>
           </a:xfrm>
           <a:prstGeom prst="rect">
             <a:avLst/>
@@ -3540,16 +3541,16 @@
           </a:bodyPr>
           <a:lstStyle/>
           <a:p>
-            <a:pPr algn="l">
-              <a:defRPr sz="1600" b="0">
-                <a:solidFill>
-                  <a:srgbClr val="ADD8E6"/>
-                </a:solidFill>
-                <a:latin typeface="Segoe UI"/>
-              </a:defRPr>
-            </a:pPr>
-            <a:r>
-              <a:t>With great power comes great responsibility</a:t>
+            <a:pPr algn="ctr">
+              <a:defRPr sz="2200" b="1">
+                <a:solidFill>
+                  <a:srgbClr val="424242"/>
+                </a:solidFill>
+                <a:latin typeface="Segoe UI"/>
+              </a:defRPr>
+            </a:pPr>
+            <a:r>
+              <a:t>Let's generate images together and see what happens!</a:t>
             </a:r>
           </a:p>
         </p:txBody>
@@ -3562,14 +3563,14 @@
         </p:nvSpPr>
         <p:spPr>
           <a:xfrm>
-            <a:off x="457200" y="1554480"/>
-            <a:ext cx="2286000" cy="777240"/>
+            <a:off x="914400" y="2377440"/>
+            <a:ext cx="2011680" cy="777240"/>
           </a:xfrm>
           <a:prstGeom prst="roundRect">
             <a:avLst/>
           </a:prstGeom>
           <a:solidFill>
-            <a:srgbClr val="E53935"/>
+            <a:srgbClr val="2196F3"/>
           </a:solidFill>
           <a:ln>
             <a:noFill/>
@@ -3597,7 +3598,7 @@
               <a:spcBef>
                 <a:spcPts val="800"/>
               </a:spcBef>
-              <a:defRPr sz="1400" b="1">
+              <a:defRPr sz="1600" b="1">
                 <a:solidFill>
                   <a:srgbClr val="FFFFFF"/>
                 </a:solidFill>
@@ -3605,7 +3606,7 @@
               </a:defRPr>
             </a:pPr>
             <a:r>
-              <a:t>Deepfakes</a:t>
+              <a:t>Demo 1</a:t>
             </a:r>
           </a:p>
         </p:txBody>
@@ -3618,8 +3619,8 @@
         </p:nvSpPr>
         <p:spPr>
           <a:xfrm>
-            <a:off x="3017520" y="1691639"/>
-            <a:ext cx="8686800" cy="640080"/>
+            <a:off x="3200400" y="2468880"/>
+            <a:ext cx="8229600" cy="685800"/>
           </a:xfrm>
           <a:prstGeom prst="rect">
             <a:avLst/>
@@ -3633,7 +3634,7 @@
           <a:lstStyle/>
           <a:p>
             <a:pPr algn="l">
-              <a:defRPr sz="1400" b="0">
+              <a:defRPr sz="1500" b="0">
                 <a:solidFill>
                   <a:srgbClr val="424242"/>
                 </a:solidFill>
@@ -3641,7 +3642,11 @@
               </a:defRPr>
             </a:pPr>
             <a:r>
-              <a:t>Fake photos/videos of real people — used for bullying or scams</a:t>
+              <a:t>Same prompt, different tools</a:t>
+            </a:r>
+            <a:br/>
+            <a:r>
+              <a:t>(ChatGPT vs. Gemini)</a:t>
             </a:r>
           </a:p>
         </p:txBody>
@@ -3654,8 +3659,200 @@
         </p:nvSpPr>
         <p:spPr>
           <a:xfrm>
-            <a:off x="457200" y="2606039"/>
-            <a:ext cx="2286000" cy="777240"/>
+            <a:off x="914400" y="3383280"/>
+            <a:ext cx="2011680" cy="777240"/>
+          </a:xfrm>
+          <a:prstGeom prst="roundRect">
+            <a:avLst/>
+          </a:prstGeom>
+          <a:solidFill>
+            <a:srgbClr val="FFB300"/>
+          </a:solidFill>
+          <a:ln>
+            <a:noFill/>
+          </a:ln>
+        </p:spPr>
+        <p:style>
+          <a:lnRef idx="1">
+            <a:schemeClr val="accent1"/>
+          </a:lnRef>
+          <a:fillRef idx="3">
+            <a:schemeClr val="accent1"/>
+          </a:fillRef>
+          <a:effectRef idx="2">
+            <a:schemeClr val="accent1"/>
+          </a:effectRef>
+          <a:fontRef idx="minor">
+            <a:schemeClr val="lt1"/>
+          </a:fontRef>
+        </p:style>
+        <p:txBody>
+          <a:bodyPr rtlCol="0" anchor="ctr" wrap="square"/>
+          <a:lstStyle/>
+          <a:p>
+            <a:pPr algn="ctr">
+              <a:spcBef>
+                <a:spcPts val="800"/>
+              </a:spcBef>
+              <a:defRPr sz="1600" b="1">
+                <a:solidFill>
+                  <a:srgbClr val="FFFFFF"/>
+                </a:solidFill>
+                <a:latin typeface="Segoe UI"/>
+              </a:defRPr>
+            </a:pPr>
+            <a:r>
+              <a:t>Demo 2</a:t>
+            </a:r>
+          </a:p>
+        </p:txBody>
+      </p:sp>
+      <p:sp>
+        <p:nvSpPr>
+          <p:cNvPr id="9" name="TextBox 8"/>
+          <p:cNvSpPr txBox="1"/>
+          <p:nvPr/>
+        </p:nvSpPr>
+        <p:spPr>
+          <a:xfrm>
+            <a:off x="3200400" y="3474720"/>
+            <a:ext cx="8229600" cy="685800"/>
+          </a:xfrm>
+          <a:prstGeom prst="rect">
+            <a:avLst/>
+          </a:prstGeom>
+          <a:noFill/>
+        </p:spPr>
+        <p:txBody>
+          <a:bodyPr wrap="square">
+            <a:spAutoFit/>
+          </a:bodyPr>
+          <a:lstStyle/>
+          <a:p>
+            <a:pPr algn="l">
+              <a:defRPr sz="1500" b="0">
+                <a:solidFill>
+                  <a:srgbClr val="424242"/>
+                </a:solidFill>
+                <a:latin typeface="Segoe UI"/>
+              </a:defRPr>
+            </a:pPr>
+            <a:r>
+              <a:t>Vague prompt vs. detailed prompt</a:t>
+            </a:r>
+            <a:br/>
+            <a:r>
+              <a:t>(see the quality difference!)</a:t>
+            </a:r>
+          </a:p>
+        </p:txBody>
+      </p:sp>
+      <p:sp>
+        <p:nvSpPr>
+          <p:cNvPr id="10" name="Rounded Rectangle 9"/>
+          <p:cNvSpPr/>
+          <p:nvPr/>
+        </p:nvSpPr>
+        <p:spPr>
+          <a:xfrm>
+            <a:off x="914400" y="4389120"/>
+            <a:ext cx="2011680" cy="777240"/>
+          </a:xfrm>
+          <a:prstGeom prst="roundRect">
+            <a:avLst/>
+          </a:prstGeom>
+          <a:solidFill>
+            <a:srgbClr val="009688"/>
+          </a:solidFill>
+          <a:ln>
+            <a:noFill/>
+          </a:ln>
+        </p:spPr>
+        <p:style>
+          <a:lnRef idx="1">
+            <a:schemeClr val="accent1"/>
+          </a:lnRef>
+          <a:fillRef idx="3">
+            <a:schemeClr val="accent1"/>
+          </a:fillRef>
+          <a:effectRef idx="2">
+            <a:schemeClr val="accent1"/>
+          </a:effectRef>
+          <a:fontRef idx="minor">
+            <a:schemeClr val="lt1"/>
+          </a:fontRef>
+        </p:style>
+        <p:txBody>
+          <a:bodyPr rtlCol="0" anchor="ctr" wrap="square"/>
+          <a:lstStyle/>
+          <a:p>
+            <a:pPr algn="ctr">
+              <a:spcBef>
+                <a:spcPts val="800"/>
+              </a:spcBef>
+              <a:defRPr sz="1600" b="1">
+                <a:solidFill>
+                  <a:srgbClr val="FFFFFF"/>
+                </a:solidFill>
+                <a:latin typeface="Segoe UI"/>
+              </a:defRPr>
+            </a:pPr>
+            <a:r>
+              <a:t>Demo 3</a:t>
+            </a:r>
+          </a:p>
+        </p:txBody>
+      </p:sp>
+      <p:sp>
+        <p:nvSpPr>
+          <p:cNvPr id="11" name="TextBox 10"/>
+          <p:cNvSpPr txBox="1"/>
+          <p:nvPr/>
+        </p:nvSpPr>
+        <p:spPr>
+          <a:xfrm>
+            <a:off x="3200400" y="4480560"/>
+            <a:ext cx="8229600" cy="685800"/>
+          </a:xfrm>
+          <a:prstGeom prst="rect">
+            <a:avLst/>
+          </a:prstGeom>
+          <a:noFill/>
+        </p:spPr>
+        <p:txBody>
+          <a:bodyPr wrap="square">
+            <a:spAutoFit/>
+          </a:bodyPr>
+          <a:lstStyle/>
+          <a:p>
+            <a:pPr algn="l">
+              <a:defRPr sz="1500" b="0">
+                <a:solidFill>
+                  <a:srgbClr val="424242"/>
+                </a:solidFill>
+                <a:latin typeface="Segoe UI"/>
+              </a:defRPr>
+            </a:pPr>
+            <a:r>
+              <a:t>Upload a photo and ask AI about it</a:t>
+            </a:r>
+            <a:br/>
+            <a:r>
+              <a:t>(multimodal in action)</a:t>
+            </a:r>
+          </a:p>
+        </p:txBody>
+      </p:sp>
+      <p:sp>
+        <p:nvSpPr>
+          <p:cNvPr id="12" name="Rounded Rectangle 11"/>
+          <p:cNvSpPr/>
+          <p:nvPr/>
+        </p:nvSpPr>
+        <p:spPr>
+          <a:xfrm>
+            <a:off x="914400" y="5394960"/>
+            <a:ext cx="2011680" cy="777240"/>
           </a:xfrm>
           <a:prstGeom prst="roundRect">
             <a:avLst/>
@@ -3689,7 +3886,7 @@
               <a:spcBef>
                 <a:spcPts val="800"/>
               </a:spcBef>
-              <a:defRPr sz="1400" b="1">
+              <a:defRPr sz="1600" b="1">
                 <a:solidFill>
                   <a:srgbClr val="FFFFFF"/>
                 </a:solidFill>
@@ -3697,21 +3894,21 @@
               </a:defRPr>
             </a:pPr>
             <a:r>
-              <a:t>Misinformation</a:t>
-            </a:r>
-          </a:p>
-        </p:txBody>
-      </p:sp>
-      <p:sp>
-        <p:nvSpPr>
-          <p:cNvPr id="9" name="TextBox 8"/>
+              <a:t>Demo 4</a:t>
+            </a:r>
+          </a:p>
+        </p:txBody>
+      </p:sp>
+      <p:sp>
+        <p:nvSpPr>
+          <p:cNvPr id="13" name="TextBox 12"/>
           <p:cNvSpPr txBox="1"/>
           <p:nvPr/>
         </p:nvSpPr>
         <p:spPr>
           <a:xfrm>
-            <a:off x="3017520" y="2743199"/>
-            <a:ext cx="8686800" cy="640080"/>
+            <a:off x="3200400" y="5486400"/>
+            <a:ext cx="8229600" cy="685800"/>
           </a:xfrm>
           <a:prstGeom prst="rect">
             <a:avLst/>
@@ -3725,7 +3922,7 @@
           <a:lstStyle/>
           <a:p>
             <a:pPr algn="l">
-              <a:defRPr sz="1400" b="0">
+              <a:defRPr sz="1500" b="0">
                 <a:solidFill>
                   <a:srgbClr val="424242"/>
                 </a:solidFill>
@@ -3733,247 +3930,11 @@
               </a:defRPr>
             </a:pPr>
             <a:r>
-              <a:t>AI-generated images can spread false news and fool people</a:t>
-            </a:r>
-          </a:p>
-        </p:txBody>
-      </p:sp>
-      <p:sp>
-        <p:nvSpPr>
-          <p:cNvPr id="10" name="Rounded Rectangle 9"/>
-          <p:cNvSpPr/>
-          <p:nvPr/>
-        </p:nvSpPr>
-        <p:spPr>
-          <a:xfrm>
-            <a:off x="457200" y="3657600"/>
-            <a:ext cx="2286000" cy="777240"/>
-          </a:xfrm>
-          <a:prstGeom prst="roundRect">
-            <a:avLst/>
-          </a:prstGeom>
-          <a:solidFill>
-            <a:srgbClr val="7E57C2"/>
-          </a:solidFill>
-          <a:ln>
-            <a:noFill/>
-          </a:ln>
-        </p:spPr>
-        <p:style>
-          <a:lnRef idx="1">
-            <a:schemeClr val="accent1"/>
-          </a:lnRef>
-          <a:fillRef idx="3">
-            <a:schemeClr val="accent1"/>
-          </a:fillRef>
-          <a:effectRef idx="2">
-            <a:schemeClr val="accent1"/>
-          </a:effectRef>
-          <a:fontRef idx="minor">
-            <a:schemeClr val="lt1"/>
-          </a:fontRef>
-        </p:style>
-        <p:txBody>
-          <a:bodyPr rtlCol="0" anchor="ctr" wrap="square"/>
-          <a:lstStyle/>
-          <a:p>
-            <a:pPr algn="ctr">
-              <a:spcBef>
-                <a:spcPts val="800"/>
-              </a:spcBef>
-              <a:defRPr sz="1400" b="1">
-                <a:solidFill>
-                  <a:srgbClr val="FFFFFF"/>
-                </a:solidFill>
-                <a:latin typeface="Segoe UI"/>
-              </a:defRPr>
-            </a:pPr>
-            <a:r>
-              <a:t>Artist Concerns</a:t>
-            </a:r>
-          </a:p>
-        </p:txBody>
-      </p:sp>
-      <p:sp>
-        <p:nvSpPr>
-          <p:cNvPr id="11" name="TextBox 10"/>
-          <p:cNvSpPr txBox="1"/>
-          <p:nvPr/>
-        </p:nvSpPr>
-        <p:spPr>
-          <a:xfrm>
-            <a:off x="3017520" y="3794760"/>
-            <a:ext cx="8686800" cy="640080"/>
-          </a:xfrm>
-          <a:prstGeom prst="rect">
-            <a:avLst/>
-          </a:prstGeom>
-          <a:noFill/>
-        </p:spPr>
-        <p:txBody>
-          <a:bodyPr wrap="square">
-            <a:spAutoFit/>
-          </a:bodyPr>
-          <a:lstStyle/>
-          <a:p>
-            <a:pPr algn="l">
-              <a:defRPr sz="1400" b="0">
-                <a:solidFill>
-                  <a:srgbClr val="424242"/>
-                </a:solidFill>
-                <a:latin typeface="Segoe UI"/>
-              </a:defRPr>
-            </a:pPr>
-            <a:r>
-              <a:t>AI trained on artists' work without permission — is that fair?</a:t>
-            </a:r>
-          </a:p>
-        </p:txBody>
-      </p:sp>
-      <p:sp>
-        <p:nvSpPr>
-          <p:cNvPr id="12" name="Rounded Rectangle 11"/>
-          <p:cNvSpPr/>
-          <p:nvPr/>
-        </p:nvSpPr>
-        <p:spPr>
-          <a:xfrm>
-            <a:off x="457200" y="4709159"/>
-            <a:ext cx="2286000" cy="777240"/>
-          </a:xfrm>
-          <a:prstGeom prst="roundRect">
-            <a:avLst/>
-          </a:prstGeom>
-          <a:solidFill>
-            <a:srgbClr val="424242"/>
-          </a:solidFill>
-          <a:ln>
-            <a:noFill/>
-          </a:ln>
-        </p:spPr>
-        <p:style>
-          <a:lnRef idx="1">
-            <a:schemeClr val="accent1"/>
-          </a:lnRef>
-          <a:fillRef idx="3">
-            <a:schemeClr val="accent1"/>
-          </a:fillRef>
-          <a:effectRef idx="2">
-            <a:schemeClr val="accent1"/>
-          </a:effectRef>
-          <a:fontRef idx="minor">
-            <a:schemeClr val="lt1"/>
-          </a:fontRef>
-        </p:style>
-        <p:txBody>
-          <a:bodyPr rtlCol="0" anchor="ctr" wrap="square"/>
-          <a:lstStyle/>
-          <a:p>
-            <a:pPr algn="ctr">
-              <a:spcBef>
-                <a:spcPts val="800"/>
-              </a:spcBef>
-              <a:defRPr sz="1400" b="1">
-                <a:solidFill>
-                  <a:srgbClr val="FFFFFF"/>
-                </a:solidFill>
-                <a:latin typeface="Segoe UI"/>
-              </a:defRPr>
-            </a:pPr>
-            <a:r>
-              <a:t>Identity Theft</a:t>
-            </a:r>
-          </a:p>
-        </p:txBody>
-      </p:sp>
-      <p:sp>
-        <p:nvSpPr>
-          <p:cNvPr id="13" name="TextBox 12"/>
-          <p:cNvSpPr txBox="1"/>
-          <p:nvPr/>
-        </p:nvSpPr>
-        <p:spPr>
-          <a:xfrm>
-            <a:off x="3017520" y="4846320"/>
-            <a:ext cx="8686800" cy="640080"/>
-          </a:xfrm>
-          <a:prstGeom prst="rect">
-            <a:avLst/>
-          </a:prstGeom>
-          <a:noFill/>
-        </p:spPr>
-        <p:txBody>
-          <a:bodyPr wrap="square">
-            <a:spAutoFit/>
-          </a:bodyPr>
-          <a:lstStyle/>
-          <a:p>
-            <a:pPr algn="l">
-              <a:defRPr sz="1400" b="0">
-                <a:solidFill>
-                  <a:srgbClr val="424242"/>
-                </a:solidFill>
-                <a:latin typeface="Segoe UI"/>
-              </a:defRPr>
-            </a:pPr>
-            <a:r>
-              <a:t>Fake profile pictures, impersonation, fraud</a:t>
-            </a:r>
-          </a:p>
-        </p:txBody>
-      </p:sp>
-      <p:sp>
-        <p:nvSpPr>
-          <p:cNvPr id="14" name="Rounded Rectangle 13"/>
-          <p:cNvSpPr/>
-          <p:nvPr/>
-        </p:nvSpPr>
-        <p:spPr>
-          <a:xfrm>
-            <a:off x="914400" y="5760720"/>
-            <a:ext cx="10360152" cy="640080"/>
-          </a:xfrm>
-          <a:prstGeom prst="roundRect">
-            <a:avLst/>
-          </a:prstGeom>
-          <a:solidFill>
-            <a:srgbClr val="1E3A5F"/>
-          </a:solidFill>
-          <a:ln>
-            <a:noFill/>
-          </a:ln>
-        </p:spPr>
-        <p:style>
-          <a:lnRef idx="1">
-            <a:schemeClr val="accent1"/>
-          </a:lnRef>
-          <a:fillRef idx="3">
-            <a:schemeClr val="accent1"/>
-          </a:fillRef>
-          <a:effectRef idx="2">
-            <a:schemeClr val="accent1"/>
-          </a:effectRef>
-          <a:fontRef idx="minor">
-            <a:schemeClr val="lt1"/>
-          </a:fontRef>
-        </p:style>
-        <p:txBody>
-          <a:bodyPr rtlCol="0" anchor="ctr" wrap="square"/>
-          <a:lstStyle/>
-          <a:p>
-            <a:pPr algn="ctr">
-              <a:spcBef>
-                <a:spcPts val="800"/>
-              </a:spcBef>
-              <a:defRPr sz="1800" b="1">
-                <a:solidFill>
-                  <a:srgbClr val="FFFFFF"/>
-                </a:solidFill>
-                <a:latin typeface="Segoe UI"/>
-              </a:defRPr>
-            </a:pPr>
-            <a:r>
-              <a:t>RULE: Never create fake images of real people. Always think before you share.</a:t>
+              <a:t>Try to make AI generate something</a:t>
+            </a:r>
+            <a:br/>
+            <a:r>
+              <a:t>impossible or weird</a:t>
             </a:r>
           </a:p>
         </p:txBody>
@@ -4070,7 +4031,7 @@
               </a:defRPr>
             </a:pPr>
             <a:r>
-              <a:t>How to Spot AI-Generated Images</a:t>
+              <a:t>The Dark Side: Deepfakes &amp; Misuse</a:t>
             </a:r>
           </a:p>
         </p:txBody>
@@ -4120,20 +4081,56 @@
       </p:sp>
       <p:sp>
         <p:nvSpPr>
-          <p:cNvPr id="5" name="Oval 4"/>
+          <p:cNvPr id="5" name="TextBox 4"/>
+          <p:cNvSpPr txBox="1"/>
+          <p:nvPr/>
+        </p:nvSpPr>
+        <p:spPr>
+          <a:xfrm>
+            <a:off x="457200" y="868680"/>
+            <a:ext cx="11274552" cy="365760"/>
+          </a:xfrm>
+          <a:prstGeom prst="rect">
+            <a:avLst/>
+          </a:prstGeom>
+          <a:noFill/>
+        </p:spPr>
+        <p:txBody>
+          <a:bodyPr wrap="square">
+            <a:spAutoFit/>
+          </a:bodyPr>
+          <a:lstStyle/>
+          <a:p>
+            <a:pPr algn="l">
+              <a:defRPr sz="1600" b="0">
+                <a:solidFill>
+                  <a:srgbClr val="ADD8E6"/>
+                </a:solidFill>
+                <a:latin typeface="Segoe UI"/>
+              </a:defRPr>
+            </a:pPr>
+            <a:r>
+              <a:t>With great power comes great responsibility</a:t>
+            </a:r>
+          </a:p>
+        </p:txBody>
+      </p:sp>
+      <p:sp>
+        <p:nvSpPr>
+          <p:cNvPr id="6" name="Rounded Rectangle 5"/>
           <p:cNvSpPr/>
           <p:nvPr/>
         </p:nvSpPr>
         <p:spPr>
           <a:xfrm>
-            <a:off x="640080" y="1554480"/>
-            <a:ext cx="640080" cy="640080"/>
-          </a:xfrm>
-          <a:prstGeom prst="ellipse">
+            <a:off x="457200" y="1554480"/>
+            <a:ext cx="2286000" cy="777240"/>
+          </a:xfrm>
+          <a:prstGeom prst="roundRect">
             <a:avLst/>
           </a:prstGeom>
           <a:solidFill>
-            <a:srgbClr val="2196F3"/>
+            <a:srgbClr val="E53935"/>
           </a:solidFill>
           <a:ln>
             <a:noFill/>
@@ -4158,7 +4155,10 @@
           <a:lstStyle/>
           <a:p>
             <a:pPr algn="ctr">
-              <a:defRPr sz="1800" b="1">
+              <a:spcBef>
+                <a:spcPts val="800"/>
+              </a:spcBef>
+              <a:defRPr sz="1400" b="1">
                 <a:solidFill>
                   <a:srgbClr val="FFFFFF"/>
                 </a:solidFill>
@@ -4166,21 +4166,21 @@
               </a:defRPr>
             </a:pPr>
             <a:r>
-              <a:t>1</a:t>
-            </a:r>
-          </a:p>
-        </p:txBody>
-      </p:sp>
-      <p:sp>
-        <p:nvSpPr>
-          <p:cNvPr id="6" name="TextBox 5"/>
+              <a:t>Deepfakes</a:t>
+            </a:r>
+          </a:p>
+        </p:txBody>
+      </p:sp>
+      <p:sp>
+        <p:nvSpPr>
+          <p:cNvPr id="7" name="TextBox 6"/>
           <p:cNvSpPr txBox="1"/>
           <p:nvPr/>
         </p:nvSpPr>
         <p:spPr>
           <a:xfrm>
-            <a:off x="1554480" y="1600200"/>
-            <a:ext cx="2286000" cy="457200"/>
+            <a:off x="3017520" y="1691639"/>
+            <a:ext cx="8686800" cy="640080"/>
           </a:xfrm>
           <a:prstGeom prst="rect">
             <a:avLst/>
@@ -4194,29 +4194,85 @@
           <a:lstStyle/>
           <a:p>
             <a:pPr algn="l">
-              <a:defRPr sz="1500" b="1">
-                <a:solidFill>
-                  <a:srgbClr val="1E3A5F"/>
-                </a:solidFill>
-                <a:latin typeface="Segoe UI"/>
-              </a:defRPr>
-            </a:pPr>
-            <a:r>
-              <a:t>Hands &amp; Fingers</a:t>
-            </a:r>
-          </a:p>
-        </p:txBody>
-      </p:sp>
-      <p:sp>
-        <p:nvSpPr>
-          <p:cNvPr id="7" name="TextBox 6"/>
+              <a:defRPr sz="1400" b="0">
+                <a:solidFill>
+                  <a:srgbClr val="424242"/>
+                </a:solidFill>
+                <a:latin typeface="Segoe UI"/>
+              </a:defRPr>
+            </a:pPr>
+            <a:r>
+              <a:t>Fake photos/videos of real people — used for bullying or scams</a:t>
+            </a:r>
+          </a:p>
+        </p:txBody>
+      </p:sp>
+      <p:sp>
+        <p:nvSpPr>
+          <p:cNvPr id="8" name="Rounded Rectangle 7"/>
+          <p:cNvSpPr/>
+          <p:nvPr/>
+        </p:nvSpPr>
+        <p:spPr>
+          <a:xfrm>
+            <a:off x="457200" y="2606039"/>
+            <a:ext cx="2286000" cy="777240"/>
+          </a:xfrm>
+          <a:prstGeom prst="roundRect">
+            <a:avLst/>
+          </a:prstGeom>
+          <a:solidFill>
+            <a:srgbClr val="EC407A"/>
+          </a:solidFill>
+          <a:ln>
+            <a:noFill/>
+          </a:ln>
+        </p:spPr>
+        <p:style>
+          <a:lnRef idx="1">
+            <a:schemeClr val="accent1"/>
+          </a:lnRef>
+          <a:fillRef idx="3">
+            <a:schemeClr val="accent1"/>
+          </a:fillRef>
+          <a:effectRef idx="2">
+            <a:schemeClr val="accent1"/>
+          </a:effectRef>
+          <a:fontRef idx="minor">
+            <a:schemeClr val="lt1"/>
+          </a:fontRef>
+        </p:style>
+        <p:txBody>
+          <a:bodyPr rtlCol="0" anchor="ctr" wrap="square"/>
+          <a:lstStyle/>
+          <a:p>
+            <a:pPr algn="ctr">
+              <a:spcBef>
+                <a:spcPts val="800"/>
+              </a:spcBef>
+              <a:defRPr sz="1400" b="1">
+                <a:solidFill>
+                  <a:srgbClr val="FFFFFF"/>
+                </a:solidFill>
+                <a:latin typeface="Segoe UI"/>
+              </a:defRPr>
+            </a:pPr>
+            <a:r>
+              <a:t>Misinformation</a:t>
+            </a:r>
+          </a:p>
+        </p:txBody>
+      </p:sp>
+      <p:sp>
+        <p:nvSpPr>
+          <p:cNvPr id="9" name="TextBox 8"/>
           <p:cNvSpPr txBox="1"/>
           <p:nvPr/>
         </p:nvSpPr>
         <p:spPr>
           <a:xfrm>
-            <a:off x="3931920" y="1600200"/>
-            <a:ext cx="7772400" cy="457200"/>
+            <a:off x="3017520" y="2743199"/>
+            <a:ext cx="8686800" cy="640080"/>
           </a:xfrm>
           <a:prstGeom prst="rect">
             <a:avLst/>
@@ -4238,23 +4294,23 @@
               </a:defRPr>
             </a:pPr>
             <a:r>
-              <a:t>Often too many or too few fingers, weird poses</a:t>
-            </a:r>
-          </a:p>
-        </p:txBody>
-      </p:sp>
-      <p:sp>
-        <p:nvSpPr>
-          <p:cNvPr id="8" name="Oval 7"/>
+              <a:t>AI-generated images can spread false news and fool people</a:t>
+            </a:r>
+          </a:p>
+        </p:txBody>
+      </p:sp>
+      <p:sp>
+        <p:nvSpPr>
+          <p:cNvPr id="10" name="Rounded Rectangle 9"/>
           <p:cNvSpPr/>
           <p:nvPr/>
         </p:nvSpPr>
         <p:spPr>
           <a:xfrm>
-            <a:off x="640080" y="2468880"/>
-            <a:ext cx="640080" cy="640080"/>
-          </a:xfrm>
-          <a:prstGeom prst="ellipse">
+            <a:off x="457200" y="3657600"/>
+            <a:ext cx="2286000" cy="777240"/>
+          </a:xfrm>
+          <a:prstGeom prst="roundRect">
             <a:avLst/>
           </a:prstGeom>
           <a:solidFill>
@@ -4283,7 +4339,10 @@
           <a:lstStyle/>
           <a:p>
             <a:pPr algn="ctr">
-              <a:defRPr sz="1800" b="1">
+              <a:spcBef>
+                <a:spcPts val="800"/>
+              </a:spcBef>
+              <a:defRPr sz="1400" b="1">
                 <a:solidFill>
                   <a:srgbClr val="FFFFFF"/>
                 </a:solidFill>
@@ -4291,21 +4350,21 @@
               </a:defRPr>
             </a:pPr>
             <a:r>
-              <a:t>2</a:t>
-            </a:r>
-          </a:p>
-        </p:txBody>
-      </p:sp>
-      <p:sp>
-        <p:nvSpPr>
-          <p:cNvPr id="9" name="TextBox 8"/>
+              <a:t>Artist Concerns</a:t>
+            </a:r>
+          </a:p>
+        </p:txBody>
+      </p:sp>
+      <p:sp>
+        <p:nvSpPr>
+          <p:cNvPr id="11" name="TextBox 10"/>
           <p:cNvSpPr txBox="1"/>
           <p:nvPr/>
         </p:nvSpPr>
         <p:spPr>
           <a:xfrm>
-            <a:off x="1554480" y="2514600"/>
-            <a:ext cx="2286000" cy="457200"/>
+            <a:off x="3017520" y="3794760"/>
+            <a:ext cx="8686800" cy="640080"/>
           </a:xfrm>
           <a:prstGeom prst="rect">
             <a:avLst/>
@@ -4319,42 +4378,6 @@
           <a:lstStyle/>
           <a:p>
             <a:pPr algn="l">
-              <a:defRPr sz="1500" b="1">
-                <a:solidFill>
-                  <a:srgbClr val="1E3A5F"/>
-                </a:solidFill>
-                <a:latin typeface="Segoe UI"/>
-              </a:defRPr>
-            </a:pPr>
-            <a:r>
-              <a:t>Text in Images</a:t>
-            </a:r>
-          </a:p>
-        </p:txBody>
-      </p:sp>
-      <p:sp>
-        <p:nvSpPr>
-          <p:cNvPr id="10" name="TextBox 9"/>
-          <p:cNvSpPr txBox="1"/>
-          <p:nvPr/>
-        </p:nvSpPr>
-        <p:spPr>
-          <a:xfrm>
-            <a:off x="3931920" y="2514600"/>
-            <a:ext cx="7772400" cy="457200"/>
-          </a:xfrm>
-          <a:prstGeom prst="rect">
-            <a:avLst/>
-          </a:prstGeom>
-          <a:noFill/>
-        </p:spPr>
-        <p:txBody>
-          <a:bodyPr wrap="square">
-            <a:spAutoFit/>
-          </a:bodyPr>
-          <a:lstStyle/>
-          <a:p>
-            <a:pPr algn="l">
               <a:defRPr sz="1400" b="0">
                 <a:solidFill>
                   <a:srgbClr val="424242"/>
@@ -4363,27 +4386,27 @@
               </a:defRPr>
             </a:pPr>
             <a:r>
-              <a:t>AI-generated text is usually garbled or misspelled</a:t>
-            </a:r>
-          </a:p>
-        </p:txBody>
-      </p:sp>
-      <p:sp>
-        <p:nvSpPr>
-          <p:cNvPr id="11" name="Oval 10"/>
+              <a:t>AI trained on artists' work without permission — is that fair?</a:t>
+            </a:r>
+          </a:p>
+        </p:txBody>
+      </p:sp>
+      <p:sp>
+        <p:nvSpPr>
+          <p:cNvPr id="12" name="Rounded Rectangle 11"/>
           <p:cNvSpPr/>
           <p:nvPr/>
         </p:nvSpPr>
         <p:spPr>
           <a:xfrm>
-            <a:off x="640080" y="3383280"/>
-            <a:ext cx="640080" cy="640080"/>
-          </a:xfrm>
-          <a:prstGeom prst="ellipse">
+            <a:off x="457200" y="4709159"/>
+            <a:ext cx="2286000" cy="777240"/>
+          </a:xfrm>
+          <a:prstGeom prst="roundRect">
             <a:avLst/>
           </a:prstGeom>
           <a:solidFill>
-            <a:srgbClr val="009688"/>
+            <a:srgbClr val="424242"/>
           </a:solidFill>
           <a:ln>
             <a:noFill/>
@@ -4408,7 +4431,10 @@
           <a:lstStyle/>
           <a:p>
             <a:pPr algn="ctr">
-              <a:defRPr sz="1800" b="1">
+              <a:spcBef>
+                <a:spcPts val="800"/>
+              </a:spcBef>
+              <a:defRPr sz="1400" b="1">
                 <a:solidFill>
                   <a:srgbClr val="FFFFFF"/>
                 </a:solidFill>
@@ -4416,21 +4442,21 @@
               </a:defRPr>
             </a:pPr>
             <a:r>
-              <a:t>3</a:t>
-            </a:r>
-          </a:p>
-        </p:txBody>
-      </p:sp>
-      <p:sp>
-        <p:nvSpPr>
-          <p:cNvPr id="12" name="TextBox 11"/>
+              <a:t>Identity Theft</a:t>
+            </a:r>
+          </a:p>
+        </p:txBody>
+      </p:sp>
+      <p:sp>
+        <p:nvSpPr>
+          <p:cNvPr id="13" name="TextBox 12"/>
           <p:cNvSpPr txBox="1"/>
           <p:nvPr/>
         </p:nvSpPr>
         <p:spPr>
           <a:xfrm>
-            <a:off x="1554480" y="3429000"/>
-            <a:ext cx="2286000" cy="457200"/>
+            <a:off x="3017520" y="4846320"/>
+            <a:ext cx="8686800" cy="640080"/>
           </a:xfrm>
           <a:prstGeom prst="rect">
             <a:avLst/>
@@ -4444,42 +4470,6 @@
           <a:lstStyle/>
           <a:p>
             <a:pPr algn="l">
-              <a:defRPr sz="1500" b="1">
-                <a:solidFill>
-                  <a:srgbClr val="1E3A5F"/>
-                </a:solidFill>
-                <a:latin typeface="Segoe UI"/>
-              </a:defRPr>
-            </a:pPr>
-            <a:r>
-              <a:t>Background Details</a:t>
-            </a:r>
-          </a:p>
-        </p:txBody>
-      </p:sp>
-      <p:sp>
-        <p:nvSpPr>
-          <p:cNvPr id="13" name="TextBox 12"/>
-          <p:cNvSpPr txBox="1"/>
-          <p:nvPr/>
-        </p:nvSpPr>
-        <p:spPr>
-          <a:xfrm>
-            <a:off x="3931920" y="3429000"/>
-            <a:ext cx="7772400" cy="457200"/>
-          </a:xfrm>
-          <a:prstGeom prst="rect">
-            <a:avLst/>
-          </a:prstGeom>
-          <a:noFill/>
-        </p:spPr>
-        <p:txBody>
-          <a:bodyPr wrap="square">
-            <a:spAutoFit/>
-          </a:bodyPr>
-          <a:lstStyle/>
-          <a:p>
-            <a:pPr algn="l">
               <a:defRPr sz="1400" b="0">
                 <a:solidFill>
                   <a:srgbClr val="424242"/>
@@ -4488,264 +4478,14 @@
               </a:defRPr>
             </a:pPr>
             <a:r>
-              <a:t>Look for melting objects, impossible architecture</a:t>
-            </a:r>
-          </a:p>
-        </p:txBody>
-      </p:sp>
-      <p:sp>
-        <p:nvSpPr>
-          <p:cNvPr id="14" name="Oval 13"/>
-          <p:cNvSpPr/>
-          <p:nvPr/>
-        </p:nvSpPr>
-        <p:spPr>
-          <a:xfrm>
-            <a:off x="640080" y="4297680"/>
-            <a:ext cx="640080" cy="640080"/>
-          </a:xfrm>
-          <a:prstGeom prst="ellipse">
-            <a:avLst/>
-          </a:prstGeom>
-          <a:solidFill>
-            <a:srgbClr val="FFB300"/>
-          </a:solidFill>
-          <a:ln>
-            <a:noFill/>
-          </a:ln>
-        </p:spPr>
-        <p:style>
-          <a:lnRef idx="1">
-            <a:schemeClr val="accent1"/>
-          </a:lnRef>
-          <a:fillRef idx="3">
-            <a:schemeClr val="accent1"/>
-          </a:fillRef>
-          <a:effectRef idx="2">
-            <a:schemeClr val="accent1"/>
-          </a:effectRef>
-          <a:fontRef idx="minor">
-            <a:schemeClr val="lt1"/>
-          </a:fontRef>
-        </p:style>
-        <p:txBody>
-          <a:bodyPr rtlCol="0" anchor="ctr" wrap="square"/>
-          <a:lstStyle/>
-          <a:p>
-            <a:pPr algn="ctr">
-              <a:defRPr sz="1800" b="1">
-                <a:solidFill>
-                  <a:srgbClr val="FFFFFF"/>
-                </a:solidFill>
-                <a:latin typeface="Segoe UI"/>
-              </a:defRPr>
-            </a:pPr>
-            <a:r>
-              <a:t>4</a:t>
-            </a:r>
-          </a:p>
-        </p:txBody>
-      </p:sp>
-      <p:sp>
-        <p:nvSpPr>
-          <p:cNvPr id="15" name="TextBox 14"/>
-          <p:cNvSpPr txBox="1"/>
-          <p:nvPr/>
-        </p:nvSpPr>
-        <p:spPr>
-          <a:xfrm>
-            <a:off x="1554480" y="4343400"/>
-            <a:ext cx="2286000" cy="457200"/>
-          </a:xfrm>
-          <a:prstGeom prst="rect">
-            <a:avLst/>
-          </a:prstGeom>
-          <a:noFill/>
-        </p:spPr>
-        <p:txBody>
-          <a:bodyPr wrap="square">
-            <a:spAutoFit/>
-          </a:bodyPr>
-          <a:lstStyle/>
-          <a:p>
-            <a:pPr algn="l">
-              <a:defRPr sz="1500" b="1">
-                <a:solidFill>
-                  <a:srgbClr val="1E3A5F"/>
-                </a:solidFill>
-                <a:latin typeface="Segoe UI"/>
-              </a:defRPr>
-            </a:pPr>
-            <a:r>
-              <a:t>Too Perfect</a:t>
-            </a:r>
-          </a:p>
-        </p:txBody>
-      </p:sp>
-      <p:sp>
-        <p:nvSpPr>
-          <p:cNvPr id="16" name="TextBox 15"/>
-          <p:cNvSpPr txBox="1"/>
-          <p:nvPr/>
-        </p:nvSpPr>
-        <p:spPr>
-          <a:xfrm>
-            <a:off x="3931920" y="4343400"/>
-            <a:ext cx="7772400" cy="457200"/>
-          </a:xfrm>
-          <a:prstGeom prst="rect">
-            <a:avLst/>
-          </a:prstGeom>
-          <a:noFill/>
-        </p:spPr>
-        <p:txBody>
-          <a:bodyPr wrap="square">
-            <a:spAutoFit/>
-          </a:bodyPr>
-          <a:lstStyle/>
-          <a:p>
-            <a:pPr algn="l">
-              <a:defRPr sz="1400" b="0">
-                <a:solidFill>
-                  <a:srgbClr val="424242"/>
-                </a:solidFill>
-                <a:latin typeface="Segoe UI"/>
-              </a:defRPr>
-            </a:pPr>
-            <a:r>
-              <a:t>Skin too smooth, lighting too even, no imperfections</a:t>
-            </a:r>
-          </a:p>
-        </p:txBody>
-      </p:sp>
-      <p:sp>
-        <p:nvSpPr>
-          <p:cNvPr id="17" name="Oval 16"/>
-          <p:cNvSpPr/>
-          <p:nvPr/>
-        </p:nvSpPr>
-        <p:spPr>
-          <a:xfrm>
-            <a:off x="640080" y="5212080"/>
-            <a:ext cx="640080" cy="640080"/>
-          </a:xfrm>
-          <a:prstGeom prst="ellipse">
-            <a:avLst/>
-          </a:prstGeom>
-          <a:solidFill>
-            <a:srgbClr val="E53935"/>
-          </a:solidFill>
-          <a:ln>
-            <a:noFill/>
-          </a:ln>
-        </p:spPr>
-        <p:style>
-          <a:lnRef idx="1">
-            <a:schemeClr val="accent1"/>
-          </a:lnRef>
-          <a:fillRef idx="3">
-            <a:schemeClr val="accent1"/>
-          </a:fillRef>
-          <a:effectRef idx="2">
-            <a:schemeClr val="accent1"/>
-          </a:effectRef>
-          <a:fontRef idx="minor">
-            <a:schemeClr val="lt1"/>
-          </a:fontRef>
-        </p:style>
-        <p:txBody>
-          <a:bodyPr rtlCol="0" anchor="ctr" wrap="square"/>
-          <a:lstStyle/>
-          <a:p>
-            <a:pPr algn="ctr">
-              <a:defRPr sz="1800" b="1">
-                <a:solidFill>
-                  <a:srgbClr val="FFFFFF"/>
-                </a:solidFill>
-                <a:latin typeface="Segoe UI"/>
-              </a:defRPr>
-            </a:pPr>
-            <a:r>
-              <a:t>5</a:t>
-            </a:r>
-          </a:p>
-        </p:txBody>
-      </p:sp>
-      <p:sp>
-        <p:nvSpPr>
-          <p:cNvPr id="18" name="TextBox 17"/>
-          <p:cNvSpPr txBox="1"/>
-          <p:nvPr/>
-        </p:nvSpPr>
-        <p:spPr>
-          <a:xfrm>
-            <a:off x="1554480" y="5257800"/>
-            <a:ext cx="2286000" cy="457200"/>
-          </a:xfrm>
-          <a:prstGeom prst="rect">
-            <a:avLst/>
-          </a:prstGeom>
-          <a:noFill/>
-        </p:spPr>
-        <p:txBody>
-          <a:bodyPr wrap="square">
-            <a:spAutoFit/>
-          </a:bodyPr>
-          <a:lstStyle/>
-          <a:p>
-            <a:pPr algn="l">
-              <a:defRPr sz="1500" b="1">
-                <a:solidFill>
-                  <a:srgbClr val="1E3A5F"/>
-                </a:solidFill>
-                <a:latin typeface="Segoe UI"/>
-              </a:defRPr>
-            </a:pPr>
-            <a:r>
-              <a:t>Context Clues</a:t>
-            </a:r>
-          </a:p>
-        </p:txBody>
-      </p:sp>
-      <p:sp>
-        <p:nvSpPr>
-          <p:cNvPr id="19" name="TextBox 18"/>
-          <p:cNvSpPr txBox="1"/>
-          <p:nvPr/>
-        </p:nvSpPr>
-        <p:spPr>
-          <a:xfrm>
-            <a:off x="3931920" y="5257800"/>
-            <a:ext cx="7772400" cy="457200"/>
-          </a:xfrm>
-          <a:prstGeom prst="rect">
-            <a:avLst/>
-          </a:prstGeom>
-          <a:noFill/>
-        </p:spPr>
-        <p:txBody>
-          <a:bodyPr wrap="square">
-            <a:spAutoFit/>
-          </a:bodyPr>
-          <a:lstStyle/>
-          <a:p>
-            <a:pPr algn="l">
-              <a:defRPr sz="1400" b="0">
-                <a:solidFill>
-                  <a:srgbClr val="424242"/>
-                </a:solidFill>
-                <a:latin typeface="Segoe UI"/>
-              </a:defRPr>
-            </a:pPr>
-            <a:r>
-              <a:t>Check the source — who shared it and why?</a:t>
-            </a:r>
-          </a:p>
-        </p:txBody>
-      </p:sp>
-      <p:sp>
-        <p:nvSpPr>
-          <p:cNvPr id="20" name="Rounded Rectangle 19"/>
+              <a:t>Fake profile pictures, impersonation, fraud</a:t>
+            </a:r>
+          </a:p>
+        </p:txBody>
+      </p:sp>
+      <p:sp>
+        <p:nvSpPr>
+          <p:cNvPr id="14" name="Rounded Rectangle 13"/>
           <p:cNvSpPr/>
           <p:nvPr/>
         </p:nvSpPr>
@@ -4794,7 +4534,7 @@
               </a:defRPr>
             </a:pPr>
             <a:r>
-              <a:t>When in doubt, reverse image search or check the source!</a:t>
+              <a:t>RULE: Never create fake images of real people. Always think before you share.</a:t>
             </a:r>
           </a:p>
         </p:txBody>
@@ -4891,7 +4631,7 @@
               </a:defRPr>
             </a:pPr>
             <a:r>
-              <a:t>Key Vocabulary</a:t>
+              <a:t>How to Spot AI-Generated Images</a:t>
             </a:r>
           </a:p>
         </p:txBody>
@@ -4941,16 +4681,141 @@
       </p:sp>
       <p:sp>
         <p:nvSpPr>
-          <p:cNvPr id="5" name="Rounded Rectangle 4"/>
+          <p:cNvPr id="5" name="Oval 4"/>
           <p:cNvSpPr/>
           <p:nvPr/>
         </p:nvSpPr>
         <p:spPr>
           <a:xfrm>
-            <a:off x="457200" y="1463040"/>
-            <a:ext cx="2560320" cy="594360"/>
-          </a:xfrm>
-          <a:prstGeom prst="roundRect">
+            <a:off x="640080" y="1554480"/>
+            <a:ext cx="640080" cy="640080"/>
+          </a:xfrm>
+          <a:prstGeom prst="ellipse">
+            <a:avLst/>
+          </a:prstGeom>
+          <a:solidFill>
+            <a:srgbClr val="2196F3"/>
+          </a:solidFill>
+          <a:ln>
+            <a:noFill/>
+          </a:ln>
+        </p:spPr>
+        <p:style>
+          <a:lnRef idx="1">
+            <a:schemeClr val="accent1"/>
+          </a:lnRef>
+          <a:fillRef idx="3">
+            <a:schemeClr val="accent1"/>
+          </a:fillRef>
+          <a:effectRef idx="2">
+            <a:schemeClr val="accent1"/>
+          </a:effectRef>
+          <a:fontRef idx="minor">
+            <a:schemeClr val="lt1"/>
+          </a:fontRef>
+        </p:style>
+        <p:txBody>
+          <a:bodyPr rtlCol="0" anchor="ctr" wrap="square"/>
+          <a:lstStyle/>
+          <a:p>
+            <a:pPr algn="ctr">
+              <a:defRPr sz="1800" b="1">
+                <a:solidFill>
+                  <a:srgbClr val="FFFFFF"/>
+                </a:solidFill>
+                <a:latin typeface="Segoe UI"/>
+              </a:defRPr>
+            </a:pPr>
+            <a:r>
+              <a:t>1</a:t>
+            </a:r>
+          </a:p>
+        </p:txBody>
+      </p:sp>
+      <p:sp>
+        <p:nvSpPr>
+          <p:cNvPr id="6" name="TextBox 5"/>
+          <p:cNvSpPr txBox="1"/>
+          <p:nvPr/>
+        </p:nvSpPr>
+        <p:spPr>
+          <a:xfrm>
+            <a:off x="1554480" y="1600200"/>
+            <a:ext cx="2286000" cy="457200"/>
+          </a:xfrm>
+          <a:prstGeom prst="rect">
+            <a:avLst/>
+          </a:prstGeom>
+          <a:noFill/>
+        </p:spPr>
+        <p:txBody>
+          <a:bodyPr wrap="square">
+            <a:spAutoFit/>
+          </a:bodyPr>
+          <a:lstStyle/>
+          <a:p>
+            <a:pPr algn="l">
+              <a:defRPr sz="1500" b="1">
+                <a:solidFill>
+                  <a:srgbClr val="1E3A5F"/>
+                </a:solidFill>
+                <a:latin typeface="Segoe UI"/>
+              </a:defRPr>
+            </a:pPr>
+            <a:r>
+              <a:t>Hands &amp; Fingers</a:t>
+            </a:r>
+          </a:p>
+        </p:txBody>
+      </p:sp>
+      <p:sp>
+        <p:nvSpPr>
+          <p:cNvPr id="7" name="TextBox 6"/>
+          <p:cNvSpPr txBox="1"/>
+          <p:nvPr/>
+        </p:nvSpPr>
+        <p:spPr>
+          <a:xfrm>
+            <a:off x="3931920" y="1600200"/>
+            <a:ext cx="7772400" cy="457200"/>
+          </a:xfrm>
+          <a:prstGeom prst="rect">
+            <a:avLst/>
+          </a:prstGeom>
+          <a:noFill/>
+        </p:spPr>
+        <p:txBody>
+          <a:bodyPr wrap="square">
+            <a:spAutoFit/>
+          </a:bodyPr>
+          <a:lstStyle/>
+          <a:p>
+            <a:pPr algn="l">
+              <a:defRPr sz="1400" b="0">
+                <a:solidFill>
+                  <a:srgbClr val="424242"/>
+                </a:solidFill>
+                <a:latin typeface="Segoe UI"/>
+              </a:defRPr>
+            </a:pPr>
+            <a:r>
+              <a:t>Often too many or too few fingers, weird poses</a:t>
+            </a:r>
+          </a:p>
+        </p:txBody>
+      </p:sp>
+      <p:sp>
+        <p:nvSpPr>
+          <p:cNvPr id="8" name="Oval 7"/>
+          <p:cNvSpPr/>
+          <p:nvPr/>
+        </p:nvSpPr>
+        <p:spPr>
+          <a:xfrm>
+            <a:off x="640080" y="2468880"/>
+            <a:ext cx="640080" cy="640080"/>
+          </a:xfrm>
+          <a:prstGeom prst="ellipse">
             <a:avLst/>
           </a:prstGeom>
           <a:solidFill>
@@ -4979,10 +4844,7 @@
           <a:lstStyle/>
           <a:p>
             <a:pPr algn="ctr">
-              <a:spcBef>
-                <a:spcPts val="800"/>
-              </a:spcBef>
-              <a:defRPr sz="1300" b="1">
+              <a:defRPr sz="1800" b="1">
                 <a:solidFill>
                   <a:srgbClr val="FFFFFF"/>
                 </a:solidFill>
@@ -4990,21 +4852,21 @@
               </a:defRPr>
             </a:pPr>
             <a:r>
-              <a:t>Text-to-Image</a:t>
-            </a:r>
-          </a:p>
-        </p:txBody>
-      </p:sp>
-      <p:sp>
-        <p:nvSpPr>
-          <p:cNvPr id="6" name="TextBox 5"/>
+              <a:t>2</a:t>
+            </a:r>
+          </a:p>
+        </p:txBody>
+      </p:sp>
+      <p:sp>
+        <p:nvSpPr>
+          <p:cNvPr id="9" name="TextBox 8"/>
           <p:cNvSpPr txBox="1"/>
           <p:nvPr/>
         </p:nvSpPr>
         <p:spPr>
           <a:xfrm>
-            <a:off x="3291840" y="1554480"/>
-            <a:ext cx="8412480" cy="502920"/>
+            <a:off x="1554480" y="2514600"/>
+            <a:ext cx="2286000" cy="457200"/>
           </a:xfrm>
           <a:prstGeom prst="rect">
             <a:avLst/>
@@ -5018,85 +4880,29 @@
           <a:lstStyle/>
           <a:p>
             <a:pPr algn="l">
-              <a:defRPr sz="1400" b="0">
-                <a:solidFill>
-                  <a:srgbClr val="424242"/>
-                </a:solidFill>
-                <a:latin typeface="Segoe UI"/>
-              </a:defRPr>
-            </a:pPr>
-            <a:r>
-              <a:t>AI model that creates pictures from text descriptions</a:t>
-            </a:r>
-          </a:p>
-        </p:txBody>
-      </p:sp>
-      <p:sp>
-        <p:nvSpPr>
-          <p:cNvPr id="7" name="Rounded Rectangle 6"/>
-          <p:cNvSpPr/>
-          <p:nvPr/>
-        </p:nvSpPr>
-        <p:spPr>
-          <a:xfrm>
-            <a:off x="457200" y="2240280"/>
-            <a:ext cx="2560320" cy="594360"/>
-          </a:xfrm>
-          <a:prstGeom prst="roundRect">
-            <a:avLst/>
-          </a:prstGeom>
-          <a:solidFill>
-            <a:srgbClr val="2196F3"/>
-          </a:solidFill>
-          <a:ln>
-            <a:noFill/>
-          </a:ln>
-        </p:spPr>
-        <p:style>
-          <a:lnRef idx="1">
-            <a:schemeClr val="accent1"/>
-          </a:lnRef>
-          <a:fillRef idx="3">
-            <a:schemeClr val="accent1"/>
-          </a:fillRef>
-          <a:effectRef idx="2">
-            <a:schemeClr val="accent1"/>
-          </a:effectRef>
-          <a:fontRef idx="minor">
-            <a:schemeClr val="lt1"/>
-          </a:fontRef>
-        </p:style>
-        <p:txBody>
-          <a:bodyPr rtlCol="0" anchor="ctr" wrap="square"/>
-          <a:lstStyle/>
-          <a:p>
-            <a:pPr algn="ctr">
-              <a:spcBef>
-                <a:spcPts val="800"/>
-              </a:spcBef>
-              <a:defRPr sz="1300" b="1">
-                <a:solidFill>
-                  <a:srgbClr val="FFFFFF"/>
-                </a:solidFill>
-                <a:latin typeface="Segoe UI"/>
-              </a:defRPr>
-            </a:pPr>
-            <a:r>
-              <a:t>Diffusion</a:t>
-            </a:r>
-          </a:p>
-        </p:txBody>
-      </p:sp>
-      <p:sp>
-        <p:nvSpPr>
-          <p:cNvPr id="8" name="TextBox 7"/>
+              <a:defRPr sz="1500" b="1">
+                <a:solidFill>
+                  <a:srgbClr val="1E3A5F"/>
+                </a:solidFill>
+                <a:latin typeface="Segoe UI"/>
+              </a:defRPr>
+            </a:pPr>
+            <a:r>
+              <a:t>Text in Images</a:t>
+            </a:r>
+          </a:p>
+        </p:txBody>
+      </p:sp>
+      <p:sp>
+        <p:nvSpPr>
+          <p:cNvPr id="10" name="TextBox 9"/>
           <p:cNvSpPr txBox="1"/>
           <p:nvPr/>
         </p:nvSpPr>
         <p:spPr>
           <a:xfrm>
-            <a:off x="3291840" y="2331720"/>
-            <a:ext cx="8412480" cy="502920"/>
+            <a:off x="3931920" y="2514600"/>
+            <a:ext cx="7772400" cy="457200"/>
           </a:xfrm>
           <a:prstGeom prst="rect">
             <a:avLst/>
@@ -5118,23 +4924,23 @@
               </a:defRPr>
             </a:pPr>
             <a:r>
-              <a:t>The process of removing noise step by step to create an image</a:t>
-            </a:r>
-          </a:p>
-        </p:txBody>
-      </p:sp>
-      <p:sp>
-        <p:nvSpPr>
-          <p:cNvPr id="9" name="Rounded Rectangle 8"/>
+              <a:t>AI-generated text is usually garbled or misspelled</a:t>
+            </a:r>
+          </a:p>
+        </p:txBody>
+      </p:sp>
+      <p:sp>
+        <p:nvSpPr>
+          <p:cNvPr id="11" name="Oval 10"/>
           <p:cNvSpPr/>
           <p:nvPr/>
         </p:nvSpPr>
         <p:spPr>
           <a:xfrm>
-            <a:off x="457200" y="3017520"/>
-            <a:ext cx="2560320" cy="594360"/>
-          </a:xfrm>
-          <a:prstGeom prst="roundRect">
+            <a:off x="640080" y="3383280"/>
+            <a:ext cx="640080" cy="640080"/>
+          </a:xfrm>
+          <a:prstGeom prst="ellipse">
             <a:avLst/>
           </a:prstGeom>
           <a:solidFill>
@@ -5163,10 +4969,7 @@
           <a:lstStyle/>
           <a:p>
             <a:pPr algn="ctr">
-              <a:spcBef>
-                <a:spcPts val="800"/>
-              </a:spcBef>
-              <a:defRPr sz="1300" b="1">
+              <a:defRPr sz="1800" b="1">
                 <a:solidFill>
                   <a:srgbClr val="FFFFFF"/>
                 </a:solidFill>
@@ -5174,21 +4977,21 @@
               </a:defRPr>
             </a:pPr>
             <a:r>
-              <a:t>Multimodal</a:t>
-            </a:r>
-          </a:p>
-        </p:txBody>
-      </p:sp>
-      <p:sp>
-        <p:nvSpPr>
-          <p:cNvPr id="10" name="TextBox 9"/>
+              <a:t>3</a:t>
+            </a:r>
+          </a:p>
+        </p:txBody>
+      </p:sp>
+      <p:sp>
+        <p:nvSpPr>
+          <p:cNvPr id="12" name="TextBox 11"/>
           <p:cNvSpPr txBox="1"/>
           <p:nvPr/>
         </p:nvSpPr>
         <p:spPr>
           <a:xfrm>
-            <a:off x="3291840" y="3108960"/>
-            <a:ext cx="8412480" cy="502920"/>
+            <a:off x="1554480" y="3429000"/>
+            <a:ext cx="2286000" cy="457200"/>
           </a:xfrm>
           <a:prstGeom prst="rect">
             <a:avLst/>
@@ -5202,6 +5005,42 @@
           <a:lstStyle/>
           <a:p>
             <a:pPr algn="l">
+              <a:defRPr sz="1500" b="1">
+                <a:solidFill>
+                  <a:srgbClr val="1E3A5F"/>
+                </a:solidFill>
+                <a:latin typeface="Segoe UI"/>
+              </a:defRPr>
+            </a:pPr>
+            <a:r>
+              <a:t>Background Details</a:t>
+            </a:r>
+          </a:p>
+        </p:txBody>
+      </p:sp>
+      <p:sp>
+        <p:nvSpPr>
+          <p:cNvPr id="13" name="TextBox 12"/>
+          <p:cNvSpPr txBox="1"/>
+          <p:nvPr/>
+        </p:nvSpPr>
+        <p:spPr>
+          <a:xfrm>
+            <a:off x="3931920" y="3429000"/>
+            <a:ext cx="7772400" cy="457200"/>
+          </a:xfrm>
+          <a:prstGeom prst="rect">
+            <a:avLst/>
+          </a:prstGeom>
+          <a:noFill/>
+        </p:spPr>
+        <p:txBody>
+          <a:bodyPr wrap="square">
+            <a:spAutoFit/>
+          </a:bodyPr>
+          <a:lstStyle/>
+          <a:p>
+            <a:pPr algn="l">
               <a:defRPr sz="1400" b="0">
                 <a:solidFill>
                   <a:srgbClr val="424242"/>
@@ -5210,23 +5049,148 @@
               </a:defRPr>
             </a:pPr>
             <a:r>
-              <a:t>AI that works with multiple types of data (text + image + audio)</a:t>
-            </a:r>
-          </a:p>
-        </p:txBody>
-      </p:sp>
-      <p:sp>
-        <p:nvSpPr>
-          <p:cNvPr id="11" name="Rounded Rectangle 10"/>
+              <a:t>Look for melting objects, impossible architecture</a:t>
+            </a:r>
+          </a:p>
+        </p:txBody>
+      </p:sp>
+      <p:sp>
+        <p:nvSpPr>
+          <p:cNvPr id="14" name="Oval 13"/>
           <p:cNvSpPr/>
           <p:nvPr/>
         </p:nvSpPr>
         <p:spPr>
           <a:xfrm>
-            <a:off x="457200" y="3794760"/>
-            <a:ext cx="2560320" cy="594360"/>
-          </a:xfrm>
-          <a:prstGeom prst="roundRect">
+            <a:off x="640080" y="4297680"/>
+            <a:ext cx="640080" cy="640080"/>
+          </a:xfrm>
+          <a:prstGeom prst="ellipse">
+            <a:avLst/>
+          </a:prstGeom>
+          <a:solidFill>
+            <a:srgbClr val="FFB300"/>
+          </a:solidFill>
+          <a:ln>
+            <a:noFill/>
+          </a:ln>
+        </p:spPr>
+        <p:style>
+          <a:lnRef idx="1">
+            <a:schemeClr val="accent1"/>
+          </a:lnRef>
+          <a:fillRef idx="3">
+            <a:schemeClr val="accent1"/>
+          </a:fillRef>
+          <a:effectRef idx="2">
+            <a:schemeClr val="accent1"/>
+          </a:effectRef>
+          <a:fontRef idx="minor">
+            <a:schemeClr val="lt1"/>
+          </a:fontRef>
+        </p:style>
+        <p:txBody>
+          <a:bodyPr rtlCol="0" anchor="ctr" wrap="square"/>
+          <a:lstStyle/>
+          <a:p>
+            <a:pPr algn="ctr">
+              <a:defRPr sz="1800" b="1">
+                <a:solidFill>
+                  <a:srgbClr val="FFFFFF"/>
+                </a:solidFill>
+                <a:latin typeface="Segoe UI"/>
+              </a:defRPr>
+            </a:pPr>
+            <a:r>
+              <a:t>4</a:t>
+            </a:r>
+          </a:p>
+        </p:txBody>
+      </p:sp>
+      <p:sp>
+        <p:nvSpPr>
+          <p:cNvPr id="15" name="TextBox 14"/>
+          <p:cNvSpPr txBox="1"/>
+          <p:nvPr/>
+        </p:nvSpPr>
+        <p:spPr>
+          <a:xfrm>
+            <a:off x="1554480" y="4343400"/>
+            <a:ext cx="2286000" cy="457200"/>
+          </a:xfrm>
+          <a:prstGeom prst="rect">
+            <a:avLst/>
+          </a:prstGeom>
+          <a:noFill/>
+        </p:spPr>
+        <p:txBody>
+          <a:bodyPr wrap="square">
+            <a:spAutoFit/>
+          </a:bodyPr>
+          <a:lstStyle/>
+          <a:p>
+            <a:pPr algn="l">
+              <a:defRPr sz="1500" b="1">
+                <a:solidFill>
+                  <a:srgbClr val="1E3A5F"/>
+                </a:solidFill>
+                <a:latin typeface="Segoe UI"/>
+              </a:defRPr>
+            </a:pPr>
+            <a:r>
+              <a:t>Too Perfect</a:t>
+            </a:r>
+          </a:p>
+        </p:txBody>
+      </p:sp>
+      <p:sp>
+        <p:nvSpPr>
+          <p:cNvPr id="16" name="TextBox 15"/>
+          <p:cNvSpPr txBox="1"/>
+          <p:nvPr/>
+        </p:nvSpPr>
+        <p:spPr>
+          <a:xfrm>
+            <a:off x="3931920" y="4343400"/>
+            <a:ext cx="7772400" cy="457200"/>
+          </a:xfrm>
+          <a:prstGeom prst="rect">
+            <a:avLst/>
+          </a:prstGeom>
+          <a:noFill/>
+        </p:spPr>
+        <p:txBody>
+          <a:bodyPr wrap="square">
+            <a:spAutoFit/>
+          </a:bodyPr>
+          <a:lstStyle/>
+          <a:p>
+            <a:pPr algn="l">
+              <a:defRPr sz="1400" b="0">
+                <a:solidFill>
+                  <a:srgbClr val="424242"/>
+                </a:solidFill>
+                <a:latin typeface="Segoe UI"/>
+              </a:defRPr>
+            </a:pPr>
+            <a:r>
+              <a:t>Skin too smooth, lighting too even, no imperfections</a:t>
+            </a:r>
+          </a:p>
+        </p:txBody>
+      </p:sp>
+      <p:sp>
+        <p:nvSpPr>
+          <p:cNvPr id="17" name="Oval 16"/>
+          <p:cNvSpPr/>
+          <p:nvPr/>
+        </p:nvSpPr>
+        <p:spPr>
+          <a:xfrm>
+            <a:off x="640080" y="5212080"/>
+            <a:ext cx="640080" cy="640080"/>
+          </a:xfrm>
+          <a:prstGeom prst="ellipse">
             <a:avLst/>
           </a:prstGeom>
           <a:solidFill>
@@ -5255,10 +5219,7 @@
           <a:lstStyle/>
           <a:p>
             <a:pPr algn="ctr">
-              <a:spcBef>
-                <a:spcPts val="800"/>
-              </a:spcBef>
-              <a:defRPr sz="1300" b="1">
+              <a:defRPr sz="1800" b="1">
                 <a:solidFill>
                   <a:srgbClr val="FFFFFF"/>
                 </a:solidFill>
@@ -5266,21 +5227,21 @@
               </a:defRPr>
             </a:pPr>
             <a:r>
-              <a:t>Deepfake</a:t>
-            </a:r>
-          </a:p>
-        </p:txBody>
-      </p:sp>
-      <p:sp>
-        <p:nvSpPr>
-          <p:cNvPr id="12" name="TextBox 11"/>
+              <a:t>5</a:t>
+            </a:r>
+          </a:p>
+        </p:txBody>
+      </p:sp>
+      <p:sp>
+        <p:nvSpPr>
+          <p:cNvPr id="18" name="TextBox 17"/>
           <p:cNvSpPr txBox="1"/>
           <p:nvPr/>
         </p:nvSpPr>
         <p:spPr>
           <a:xfrm>
-            <a:off x="3291840" y="3886200"/>
-            <a:ext cx="8412480" cy="502920"/>
+            <a:off x="1554480" y="5257800"/>
+            <a:ext cx="2286000" cy="457200"/>
           </a:xfrm>
           <a:prstGeom prst="rect">
             <a:avLst/>
@@ -5294,6 +5255,42 @@
           <a:lstStyle/>
           <a:p>
             <a:pPr algn="l">
+              <a:defRPr sz="1500" b="1">
+                <a:solidFill>
+                  <a:srgbClr val="1E3A5F"/>
+                </a:solidFill>
+                <a:latin typeface="Segoe UI"/>
+              </a:defRPr>
+            </a:pPr>
+            <a:r>
+              <a:t>Context Clues</a:t>
+            </a:r>
+          </a:p>
+        </p:txBody>
+      </p:sp>
+      <p:sp>
+        <p:nvSpPr>
+          <p:cNvPr id="19" name="TextBox 18"/>
+          <p:cNvSpPr txBox="1"/>
+          <p:nvPr/>
+        </p:nvSpPr>
+        <p:spPr>
+          <a:xfrm>
+            <a:off x="3931920" y="5257800"/>
+            <a:ext cx="7772400" cy="457200"/>
+          </a:xfrm>
+          <a:prstGeom prst="rect">
+            <a:avLst/>
+          </a:prstGeom>
+          <a:noFill/>
+        </p:spPr>
+        <p:txBody>
+          <a:bodyPr wrap="square">
+            <a:spAutoFit/>
+          </a:bodyPr>
+          <a:lstStyle/>
+          <a:p>
+            <a:pPr algn="l">
               <a:defRPr sz="1400" b="0">
                 <a:solidFill>
                   <a:srgbClr val="424242"/>
@@ -5302,27 +5299,27 @@
               </a:defRPr>
             </a:pPr>
             <a:r>
-              <a:t>AI-generated fake image or video of a real person</a:t>
-            </a:r>
-          </a:p>
-        </p:txBody>
-      </p:sp>
-      <p:sp>
-        <p:nvSpPr>
-          <p:cNvPr id="13" name="Rounded Rectangle 12"/>
+              <a:t>Check the source — who shared it and why?</a:t>
+            </a:r>
+          </a:p>
+        </p:txBody>
+      </p:sp>
+      <p:sp>
+        <p:nvSpPr>
+          <p:cNvPr id="20" name="Rounded Rectangle 19"/>
           <p:cNvSpPr/>
           <p:nvPr/>
         </p:nvSpPr>
         <p:spPr>
           <a:xfrm>
-            <a:off x="457200" y="4572000"/>
-            <a:ext cx="2560320" cy="594360"/>
+            <a:off x="914400" y="5760720"/>
+            <a:ext cx="10360152" cy="640080"/>
           </a:xfrm>
           <a:prstGeom prst="roundRect">
             <a:avLst/>
           </a:prstGeom>
           <a:solidFill>
-            <a:srgbClr val="FFB300"/>
+            <a:srgbClr val="1E3A5F"/>
           </a:solidFill>
           <a:ln>
             <a:noFill/>
@@ -5350,7 +5347,7 @@
               <a:spcBef>
                 <a:spcPts val="800"/>
               </a:spcBef>
-              <a:defRPr sz="1300" b="1">
+              <a:defRPr sz="1800" b="1">
                 <a:solidFill>
                   <a:srgbClr val="FFFFFF"/>
                 </a:solidFill>
@@ -5358,135 +5355,7 @@
               </a:defRPr>
             </a:pPr>
             <a:r>
-              <a:t>Image Prompt</a:t>
-            </a:r>
-          </a:p>
-        </p:txBody>
-      </p:sp>
-      <p:sp>
-        <p:nvSpPr>
-          <p:cNvPr id="14" name="TextBox 13"/>
-          <p:cNvSpPr txBox="1"/>
-          <p:nvPr/>
-        </p:nvSpPr>
-        <p:spPr>
-          <a:xfrm>
-            <a:off x="3291840" y="4663440"/>
-            <a:ext cx="8412480" cy="502920"/>
-          </a:xfrm>
-          <a:prstGeom prst="rect">
-            <a:avLst/>
-          </a:prstGeom>
-          <a:noFill/>
-        </p:spPr>
-        <p:txBody>
-          <a:bodyPr wrap="square">
-            <a:spAutoFit/>
-          </a:bodyPr>
-          <a:lstStyle/>
-          <a:p>
-            <a:pPr algn="l">
-              <a:defRPr sz="1400" b="0">
-                <a:solidFill>
-                  <a:srgbClr val="424242"/>
-                </a:solidFill>
-                <a:latin typeface="Segoe UI"/>
-              </a:defRPr>
-            </a:pPr>
-            <a:r>
-              <a:t>The text description you give to an image generator</a:t>
-            </a:r>
-          </a:p>
-        </p:txBody>
-      </p:sp>
-      <p:sp>
-        <p:nvSpPr>
-          <p:cNvPr id="15" name="Rounded Rectangle 14"/>
-          <p:cNvSpPr/>
-          <p:nvPr/>
-        </p:nvSpPr>
-        <p:spPr>
-          <a:xfrm>
-            <a:off x="457200" y="5349240"/>
-            <a:ext cx="2560320" cy="594360"/>
-          </a:xfrm>
-          <a:prstGeom prst="roundRect">
-            <a:avLst/>
-          </a:prstGeom>
-          <a:solidFill>
-            <a:srgbClr val="EC407A"/>
-          </a:solidFill>
-          <a:ln>
-            <a:noFill/>
-          </a:ln>
-        </p:spPr>
-        <p:style>
-          <a:lnRef idx="1">
-            <a:schemeClr val="accent1"/>
-          </a:lnRef>
-          <a:fillRef idx="3">
-            <a:schemeClr val="accent1"/>
-          </a:fillRef>
-          <a:effectRef idx="2">
-            <a:schemeClr val="accent1"/>
-          </a:effectRef>
-          <a:fontRef idx="minor">
-            <a:schemeClr val="lt1"/>
-          </a:fontRef>
-        </p:style>
-        <p:txBody>
-          <a:bodyPr rtlCol="0" anchor="ctr" wrap="square"/>
-          <a:lstStyle/>
-          <a:p>
-            <a:pPr algn="ctr">
-              <a:spcBef>
-                <a:spcPts val="800"/>
-              </a:spcBef>
-              <a:defRPr sz="1300" b="1">
-                <a:solidFill>
-                  <a:srgbClr val="FFFFFF"/>
-                </a:solidFill>
-                <a:latin typeface="Segoe UI"/>
-              </a:defRPr>
-            </a:pPr>
-            <a:r>
-              <a:t>Style Transfer</a:t>
-            </a:r>
-          </a:p>
-        </p:txBody>
-      </p:sp>
-      <p:sp>
-        <p:nvSpPr>
-          <p:cNvPr id="16" name="TextBox 15"/>
-          <p:cNvSpPr txBox="1"/>
-          <p:nvPr/>
-        </p:nvSpPr>
-        <p:spPr>
-          <a:xfrm>
-            <a:off x="3291840" y="5440679"/>
-            <a:ext cx="8412480" cy="502920"/>
-          </a:xfrm>
-          <a:prstGeom prst="rect">
-            <a:avLst/>
-          </a:prstGeom>
-          <a:noFill/>
-        </p:spPr>
-        <p:txBody>
-          <a:bodyPr wrap="square">
-            <a:spAutoFit/>
-          </a:bodyPr>
-          <a:lstStyle/>
-          <a:p>
-            <a:pPr algn="l">
-              <a:defRPr sz="1400" b="0">
-                <a:solidFill>
-                  <a:srgbClr val="424242"/>
-                </a:solidFill>
-                <a:latin typeface="Segoe UI"/>
-              </a:defRPr>
-            </a:pPr>
-            <a:r>
-              <a:t>Applying one artistic style to another image</a:t>
+              <a:t>When in doubt, reverse image search or check the source!</a:t>
             </a:r>
           </a:p>
         </p:txBody>
@@ -5583,7 +5452,7 @@
               </a:defRPr>
             </a:pPr>
             <a:r>
-              <a:t>Today's Key Takeaways</a:t>
+              <a:t>Key Vocabulary</a:t>
             </a:r>
           </a:p>
         </p:txBody>
@@ -5633,20 +5502,20 @@
       </p:sp>
       <p:sp>
         <p:nvSpPr>
-          <p:cNvPr id="5" name="Oval 4"/>
+          <p:cNvPr id="5" name="Rounded Rectangle 4"/>
           <p:cNvSpPr/>
           <p:nvPr/>
         </p:nvSpPr>
         <p:spPr>
           <a:xfrm>
-            <a:off x="731520" y="1508760"/>
-            <a:ext cx="502920" cy="502920"/>
-          </a:xfrm>
-          <a:prstGeom prst="ellipse">
+            <a:off x="457200" y="1463040"/>
+            <a:ext cx="2560320" cy="594360"/>
+          </a:xfrm>
+          <a:prstGeom prst="roundRect">
             <a:avLst/>
           </a:prstGeom>
           <a:solidFill>
-            <a:srgbClr val="3467A6"/>
+            <a:srgbClr val="7E57C2"/>
           </a:solidFill>
           <a:ln>
             <a:noFill/>
@@ -5671,7 +5540,10 @@
           <a:lstStyle/>
           <a:p>
             <a:pPr algn="ctr">
-              <a:defRPr sz="1600" b="1">
+              <a:spcBef>
+                <a:spcPts val="800"/>
+              </a:spcBef>
+              <a:defRPr sz="1300" b="1">
                 <a:solidFill>
                   <a:srgbClr val="FFFFFF"/>
                 </a:solidFill>
@@ -5679,7 +5551,7 @@
               </a:defRPr>
             </a:pPr>
             <a:r>
-              <a:t>1</a:t>
+              <a:t>Text-to-Image</a:t>
             </a:r>
           </a:p>
         </p:txBody>
@@ -5692,8 +5564,8 @@
         </p:nvSpPr>
         <p:spPr>
           <a:xfrm>
-            <a:off x="1554480" y="1554480"/>
-            <a:ext cx="10058400" cy="548640"/>
+            <a:off x="3291840" y="1554480"/>
+            <a:ext cx="8412480" cy="502920"/>
           </a:xfrm>
           <a:prstGeom prst="rect">
             <a:avLst/>
@@ -5707,7 +5579,7 @@
           <a:lstStyle/>
           <a:p>
             <a:pPr algn="l">
-              <a:defRPr sz="1700" b="0">
+              <a:defRPr sz="1400" b="0">
                 <a:solidFill>
                   <a:srgbClr val="424242"/>
                 </a:solidFill>
@@ -5715,23 +5587,115 @@
               </a:defRPr>
             </a:pPr>
             <a:r>
-              <a:t>AI can generate images from text using diffusion (noise removal)</a:t>
-            </a:r>
-          </a:p>
-        </p:txBody>
-      </p:sp>
-      <p:sp>
-        <p:nvSpPr>
-          <p:cNvPr id="7" name="Oval 6"/>
+              <a:t>AI model that creates pictures from text descriptions</a:t>
+            </a:r>
+          </a:p>
+        </p:txBody>
+      </p:sp>
+      <p:sp>
+        <p:nvSpPr>
+          <p:cNvPr id="7" name="Rounded Rectangle 6"/>
           <p:cNvSpPr/>
           <p:nvPr/>
         </p:nvSpPr>
         <p:spPr>
           <a:xfrm>
-            <a:off x="731520" y="2286000"/>
-            <a:ext cx="502920" cy="502920"/>
-          </a:xfrm>
-          <a:prstGeom prst="ellipse">
+            <a:off x="457200" y="2240280"/>
+            <a:ext cx="2560320" cy="594360"/>
+          </a:xfrm>
+          <a:prstGeom prst="roundRect">
+            <a:avLst/>
+          </a:prstGeom>
+          <a:solidFill>
+            <a:srgbClr val="2196F3"/>
+          </a:solidFill>
+          <a:ln>
+            <a:noFill/>
+          </a:ln>
+        </p:spPr>
+        <p:style>
+          <a:lnRef idx="1">
+            <a:schemeClr val="accent1"/>
+          </a:lnRef>
+          <a:fillRef idx="3">
+            <a:schemeClr val="accent1"/>
+          </a:fillRef>
+          <a:effectRef idx="2">
+            <a:schemeClr val="accent1"/>
+          </a:effectRef>
+          <a:fontRef idx="minor">
+            <a:schemeClr val="lt1"/>
+          </a:fontRef>
+        </p:style>
+        <p:txBody>
+          <a:bodyPr rtlCol="0" anchor="ctr" wrap="square"/>
+          <a:lstStyle/>
+          <a:p>
+            <a:pPr algn="ctr">
+              <a:spcBef>
+                <a:spcPts val="800"/>
+              </a:spcBef>
+              <a:defRPr sz="1300" b="1">
+                <a:solidFill>
+                  <a:srgbClr val="FFFFFF"/>
+                </a:solidFill>
+                <a:latin typeface="Segoe UI"/>
+              </a:defRPr>
+            </a:pPr>
+            <a:r>
+              <a:t>Diffusion</a:t>
+            </a:r>
+          </a:p>
+        </p:txBody>
+      </p:sp>
+      <p:sp>
+        <p:nvSpPr>
+          <p:cNvPr id="8" name="TextBox 7"/>
+          <p:cNvSpPr txBox="1"/>
+          <p:nvPr/>
+        </p:nvSpPr>
+        <p:spPr>
+          <a:xfrm>
+            <a:off x="3291840" y="2331720"/>
+            <a:ext cx="8412480" cy="502920"/>
+          </a:xfrm>
+          <a:prstGeom prst="rect">
+            <a:avLst/>
+          </a:prstGeom>
+          <a:noFill/>
+        </p:spPr>
+        <p:txBody>
+          <a:bodyPr wrap="square">
+            <a:spAutoFit/>
+          </a:bodyPr>
+          <a:lstStyle/>
+          <a:p>
+            <a:pPr algn="l">
+              <a:defRPr sz="1400" b="0">
+                <a:solidFill>
+                  <a:srgbClr val="424242"/>
+                </a:solidFill>
+                <a:latin typeface="Segoe UI"/>
+              </a:defRPr>
+            </a:pPr>
+            <a:r>
+              <a:t>The process of removing noise step by step to create an image</a:t>
+            </a:r>
+          </a:p>
+        </p:txBody>
+      </p:sp>
+      <p:sp>
+        <p:nvSpPr>
+          <p:cNvPr id="9" name="Rounded Rectangle 8"/>
+          <p:cNvSpPr/>
+          <p:nvPr/>
+        </p:nvSpPr>
+        <p:spPr>
+          <a:xfrm>
+            <a:off x="457200" y="3017520"/>
+            <a:ext cx="2560320" cy="594360"/>
+          </a:xfrm>
+          <a:prstGeom prst="roundRect">
             <a:avLst/>
           </a:prstGeom>
           <a:solidFill>
@@ -5760,7 +5724,10 @@
           <a:lstStyle/>
           <a:p>
             <a:pPr algn="ctr">
-              <a:defRPr sz="1600" b="1">
+              <a:spcBef>
+                <a:spcPts val="800"/>
+              </a:spcBef>
+              <a:defRPr sz="1300" b="1">
                 <a:solidFill>
                   <a:srgbClr val="FFFFFF"/>
                 </a:solidFill>
@@ -5768,21 +5735,21 @@
               </a:defRPr>
             </a:pPr>
             <a:r>
-              <a:t>2</a:t>
-            </a:r>
-          </a:p>
-        </p:txBody>
-      </p:sp>
-      <p:sp>
-        <p:nvSpPr>
-          <p:cNvPr id="8" name="TextBox 7"/>
+              <a:t>Multimodal</a:t>
+            </a:r>
+          </a:p>
+        </p:txBody>
+      </p:sp>
+      <p:sp>
+        <p:nvSpPr>
+          <p:cNvPr id="10" name="TextBox 9"/>
           <p:cNvSpPr txBox="1"/>
           <p:nvPr/>
         </p:nvSpPr>
         <p:spPr>
           <a:xfrm>
-            <a:off x="1554480" y="2331720"/>
-            <a:ext cx="10058400" cy="548640"/>
+            <a:off x="3291840" y="3108960"/>
+            <a:ext cx="8412480" cy="502920"/>
           </a:xfrm>
           <a:prstGeom prst="rect">
             <a:avLst/>
@@ -5796,7 +5763,7 @@
           <a:lstStyle/>
           <a:p>
             <a:pPr algn="l">
-              <a:defRPr sz="1700" b="0">
+              <a:defRPr sz="1400" b="0">
                 <a:solidFill>
                   <a:srgbClr val="424242"/>
                 </a:solidFill>
@@ -5804,23 +5771,115 @@
               </a:defRPr>
             </a:pPr>
             <a:r>
-              <a:t>Multimodal AI understands text, images, audio, and video together</a:t>
-            </a:r>
-          </a:p>
-        </p:txBody>
-      </p:sp>
-      <p:sp>
-        <p:nvSpPr>
-          <p:cNvPr id="9" name="Oval 8"/>
+              <a:t>AI that works with multiple types of data (text + image + audio)</a:t>
+            </a:r>
+          </a:p>
+        </p:txBody>
+      </p:sp>
+      <p:sp>
+        <p:nvSpPr>
+          <p:cNvPr id="11" name="Rounded Rectangle 10"/>
           <p:cNvSpPr/>
           <p:nvPr/>
         </p:nvSpPr>
         <p:spPr>
           <a:xfrm>
-            <a:off x="731520" y="3063239"/>
-            <a:ext cx="502920" cy="502920"/>
-          </a:xfrm>
-          <a:prstGeom prst="ellipse">
+            <a:off x="457200" y="3794760"/>
+            <a:ext cx="2560320" cy="594360"/>
+          </a:xfrm>
+          <a:prstGeom prst="roundRect">
+            <a:avLst/>
+          </a:prstGeom>
+          <a:solidFill>
+            <a:srgbClr val="E53935"/>
+          </a:solidFill>
+          <a:ln>
+            <a:noFill/>
+          </a:ln>
+        </p:spPr>
+        <p:style>
+          <a:lnRef idx="1">
+            <a:schemeClr val="accent1"/>
+          </a:lnRef>
+          <a:fillRef idx="3">
+            <a:schemeClr val="accent1"/>
+          </a:fillRef>
+          <a:effectRef idx="2">
+            <a:schemeClr val="accent1"/>
+          </a:effectRef>
+          <a:fontRef idx="minor">
+            <a:schemeClr val="lt1"/>
+          </a:fontRef>
+        </p:style>
+        <p:txBody>
+          <a:bodyPr rtlCol="0" anchor="ctr" wrap="square"/>
+          <a:lstStyle/>
+          <a:p>
+            <a:pPr algn="ctr">
+              <a:spcBef>
+                <a:spcPts val="800"/>
+              </a:spcBef>
+              <a:defRPr sz="1300" b="1">
+                <a:solidFill>
+                  <a:srgbClr val="FFFFFF"/>
+                </a:solidFill>
+                <a:latin typeface="Segoe UI"/>
+              </a:defRPr>
+            </a:pPr>
+            <a:r>
+              <a:t>Deepfake</a:t>
+            </a:r>
+          </a:p>
+        </p:txBody>
+      </p:sp>
+      <p:sp>
+        <p:nvSpPr>
+          <p:cNvPr id="12" name="TextBox 11"/>
+          <p:cNvSpPr txBox="1"/>
+          <p:nvPr/>
+        </p:nvSpPr>
+        <p:spPr>
+          <a:xfrm>
+            <a:off x="3291840" y="3886200"/>
+            <a:ext cx="8412480" cy="502920"/>
+          </a:xfrm>
+          <a:prstGeom prst="rect">
+            <a:avLst/>
+          </a:prstGeom>
+          <a:noFill/>
+        </p:spPr>
+        <p:txBody>
+          <a:bodyPr wrap="square">
+            <a:spAutoFit/>
+          </a:bodyPr>
+          <a:lstStyle/>
+          <a:p>
+            <a:pPr algn="l">
+              <a:defRPr sz="1400" b="0">
+                <a:solidFill>
+                  <a:srgbClr val="424242"/>
+                </a:solidFill>
+                <a:latin typeface="Segoe UI"/>
+              </a:defRPr>
+            </a:pPr>
+            <a:r>
+              <a:t>AI-generated fake image or video of a real person</a:t>
+            </a:r>
+          </a:p>
+        </p:txBody>
+      </p:sp>
+      <p:sp>
+        <p:nvSpPr>
+          <p:cNvPr id="13" name="Rounded Rectangle 12"/>
+          <p:cNvSpPr/>
+          <p:nvPr/>
+        </p:nvSpPr>
+        <p:spPr>
+          <a:xfrm>
+            <a:off x="457200" y="4572000"/>
+            <a:ext cx="2560320" cy="594360"/>
+          </a:xfrm>
+          <a:prstGeom prst="roundRect">
             <a:avLst/>
           </a:prstGeom>
           <a:solidFill>
@@ -5849,7 +5908,10 @@
           <a:lstStyle/>
           <a:p>
             <a:pPr algn="ctr">
-              <a:defRPr sz="1600" b="1">
+              <a:spcBef>
+                <a:spcPts val="800"/>
+              </a:spcBef>
+              <a:defRPr sz="1300" b="1">
                 <a:solidFill>
                   <a:srgbClr val="FFFFFF"/>
                 </a:solidFill>
@@ -5857,21 +5919,21 @@
               </a:defRPr>
             </a:pPr>
             <a:r>
-              <a:t>3</a:t>
-            </a:r>
-          </a:p>
-        </p:txBody>
-      </p:sp>
-      <p:sp>
-        <p:nvSpPr>
-          <p:cNvPr id="10" name="TextBox 9"/>
+              <a:t>Image Prompt</a:t>
+            </a:r>
+          </a:p>
+        </p:txBody>
+      </p:sp>
+      <p:sp>
+        <p:nvSpPr>
+          <p:cNvPr id="14" name="TextBox 13"/>
           <p:cNvSpPr txBox="1"/>
           <p:nvPr/>
         </p:nvSpPr>
         <p:spPr>
           <a:xfrm>
-            <a:off x="1554480" y="3108960"/>
-            <a:ext cx="10058400" cy="548640"/>
+            <a:off x="3291840" y="4663440"/>
+            <a:ext cx="8412480" cy="502920"/>
           </a:xfrm>
           <a:prstGeom prst="rect">
             <a:avLst/>
@@ -5885,7 +5947,7 @@
           <a:lstStyle/>
           <a:p>
             <a:pPr algn="l">
-              <a:defRPr sz="1700" b="0">
+              <a:defRPr sz="1400" b="0">
                 <a:solidFill>
                   <a:srgbClr val="424242"/>
                 </a:solidFill>
@@ -5893,27 +5955,27 @@
               </a:defRPr>
             </a:pPr>
             <a:r>
-              <a:t>Better prompts = better images (describe subject, style, lighting, mood)</a:t>
-            </a:r>
-          </a:p>
-        </p:txBody>
-      </p:sp>
-      <p:sp>
-        <p:nvSpPr>
-          <p:cNvPr id="11" name="Oval 10"/>
+              <a:t>The text description you give to an image generator</a:t>
+            </a:r>
+          </a:p>
+        </p:txBody>
+      </p:sp>
+      <p:sp>
+        <p:nvSpPr>
+          <p:cNvPr id="15" name="Rounded Rectangle 14"/>
           <p:cNvSpPr/>
           <p:nvPr/>
         </p:nvSpPr>
         <p:spPr>
           <a:xfrm>
-            <a:off x="731520" y="3840480"/>
-            <a:ext cx="502920" cy="502920"/>
-          </a:xfrm>
-          <a:prstGeom prst="ellipse">
+            <a:off x="457200" y="5349240"/>
+            <a:ext cx="2560320" cy="594360"/>
+          </a:xfrm>
+          <a:prstGeom prst="roundRect">
             <a:avLst/>
           </a:prstGeom>
           <a:solidFill>
-            <a:srgbClr val="7E57C2"/>
+            <a:srgbClr val="EC407A"/>
           </a:solidFill>
           <a:ln>
             <a:noFill/>
@@ -5938,7 +6000,10 @@
           <a:lstStyle/>
           <a:p>
             <a:pPr algn="ctr">
-              <a:defRPr sz="1600" b="1">
+              <a:spcBef>
+                <a:spcPts val="800"/>
+              </a:spcBef>
+              <a:defRPr sz="1300" b="1">
                 <a:solidFill>
                   <a:srgbClr val="FFFFFF"/>
                 </a:solidFill>
@@ -5946,21 +6011,21 @@
               </a:defRPr>
             </a:pPr>
             <a:r>
-              <a:t>4</a:t>
-            </a:r>
-          </a:p>
-        </p:txBody>
-      </p:sp>
-      <p:sp>
-        <p:nvSpPr>
-          <p:cNvPr id="12" name="TextBox 11"/>
+              <a:t>Style Transfer</a:t>
+            </a:r>
+          </a:p>
+        </p:txBody>
+      </p:sp>
+      <p:sp>
+        <p:nvSpPr>
+          <p:cNvPr id="16" name="TextBox 15"/>
           <p:cNvSpPr txBox="1"/>
           <p:nvPr/>
         </p:nvSpPr>
         <p:spPr>
           <a:xfrm>
-            <a:off x="1554480" y="3886200"/>
-            <a:ext cx="10058400" cy="548640"/>
+            <a:off x="3291840" y="5440679"/>
+            <a:ext cx="8412480" cy="502920"/>
           </a:xfrm>
           <a:prstGeom prst="rect">
             <a:avLst/>
@@ -5974,7 +6039,7 @@
           <a:lstStyle/>
           <a:p>
             <a:pPr algn="l">
-              <a:defRPr sz="1700" b="0">
+              <a:defRPr sz="1400" b="0">
                 <a:solidFill>
                   <a:srgbClr val="424242"/>
                 </a:solidFill>
@@ -5982,185 +6047,7 @@
               </a:defRPr>
             </a:pPr>
             <a:r>
-              <a:t>AI images are NOT copied — they're generated from learned patterns</a:t>
-            </a:r>
-          </a:p>
-        </p:txBody>
-      </p:sp>
-      <p:sp>
-        <p:nvSpPr>
-          <p:cNvPr id="13" name="Oval 12"/>
-          <p:cNvSpPr/>
-          <p:nvPr/>
-        </p:nvSpPr>
-        <p:spPr>
-          <a:xfrm>
-            <a:off x="731520" y="4617720"/>
-            <a:ext cx="502920" cy="502920"/>
-          </a:xfrm>
-          <a:prstGeom prst="ellipse">
-            <a:avLst/>
-          </a:prstGeom>
-          <a:solidFill>
-            <a:srgbClr val="E53935"/>
-          </a:solidFill>
-          <a:ln>
-            <a:noFill/>
-          </a:ln>
-        </p:spPr>
-        <p:style>
-          <a:lnRef idx="1">
-            <a:schemeClr val="accent1"/>
-          </a:lnRef>
-          <a:fillRef idx="3">
-            <a:schemeClr val="accent1"/>
-          </a:fillRef>
-          <a:effectRef idx="2">
-            <a:schemeClr val="accent1"/>
-          </a:effectRef>
-          <a:fontRef idx="minor">
-            <a:schemeClr val="lt1"/>
-          </a:fontRef>
-        </p:style>
-        <p:txBody>
-          <a:bodyPr rtlCol="0" anchor="ctr" wrap="square"/>
-          <a:lstStyle/>
-          <a:p>
-            <a:pPr algn="ctr">
-              <a:defRPr sz="1600" b="1">
-                <a:solidFill>
-                  <a:srgbClr val="FFFFFF"/>
-                </a:solidFill>
-                <a:latin typeface="Segoe UI"/>
-              </a:defRPr>
-            </a:pPr>
-            <a:r>
-              <a:t>5</a:t>
-            </a:r>
-          </a:p>
-        </p:txBody>
-      </p:sp>
-      <p:sp>
-        <p:nvSpPr>
-          <p:cNvPr id="14" name="TextBox 13"/>
-          <p:cNvSpPr txBox="1"/>
-          <p:nvPr/>
-        </p:nvSpPr>
-        <p:spPr>
-          <a:xfrm>
-            <a:off x="1554480" y="4663440"/>
-            <a:ext cx="10058400" cy="548640"/>
-          </a:xfrm>
-          <a:prstGeom prst="rect">
-            <a:avLst/>
-          </a:prstGeom>
-          <a:noFill/>
-        </p:spPr>
-        <p:txBody>
-          <a:bodyPr wrap="square">
-            <a:spAutoFit/>
-          </a:bodyPr>
-          <a:lstStyle/>
-          <a:p>
-            <a:pPr algn="l">
-              <a:defRPr sz="1700" b="0">
-                <a:solidFill>
-                  <a:srgbClr val="424242"/>
-                </a:solidFill>
-                <a:latin typeface="Segoe UI"/>
-              </a:defRPr>
-            </a:pPr>
-            <a:r>
-              <a:t>Deepfakes are dangerous — never make fake images of real people</a:t>
-            </a:r>
-          </a:p>
-        </p:txBody>
-      </p:sp>
-      <p:sp>
-        <p:nvSpPr>
-          <p:cNvPr id="15" name="Oval 14"/>
-          <p:cNvSpPr/>
-          <p:nvPr/>
-        </p:nvSpPr>
-        <p:spPr>
-          <a:xfrm>
-            <a:off x="731520" y="5394959"/>
-            <a:ext cx="502920" cy="502920"/>
-          </a:xfrm>
-          <a:prstGeom prst="ellipse">
-            <a:avLst/>
-          </a:prstGeom>
-          <a:solidFill>
-            <a:srgbClr val="4CAF50"/>
-          </a:solidFill>
-          <a:ln>
-            <a:noFill/>
-          </a:ln>
-        </p:spPr>
-        <p:style>
-          <a:lnRef idx="1">
-            <a:schemeClr val="accent1"/>
-          </a:lnRef>
-          <a:fillRef idx="3">
-            <a:schemeClr val="accent1"/>
-          </a:fillRef>
-          <a:effectRef idx="2">
-            <a:schemeClr val="accent1"/>
-          </a:effectRef>
-          <a:fontRef idx="minor">
-            <a:schemeClr val="lt1"/>
-          </a:fontRef>
-        </p:style>
-        <p:txBody>
-          <a:bodyPr rtlCol="0" anchor="ctr" wrap="square"/>
-          <a:lstStyle/>
-          <a:p>
-            <a:pPr algn="ctr">
-              <a:defRPr sz="1600" b="1">
-                <a:solidFill>
-                  <a:srgbClr val="FFFFFF"/>
-                </a:solidFill>
-                <a:latin typeface="Segoe UI"/>
-              </a:defRPr>
-            </a:pPr>
-            <a:r>
-              <a:t>6</a:t>
-            </a:r>
-          </a:p>
-        </p:txBody>
-      </p:sp>
-      <p:sp>
-        <p:nvSpPr>
-          <p:cNvPr id="16" name="TextBox 15"/>
-          <p:cNvSpPr txBox="1"/>
-          <p:nvPr/>
-        </p:nvSpPr>
-        <p:spPr>
-          <a:xfrm>
-            <a:off x="1554480" y="5440679"/>
-            <a:ext cx="10058400" cy="548640"/>
-          </a:xfrm>
-          <a:prstGeom prst="rect">
-            <a:avLst/>
-          </a:prstGeom>
-          <a:noFill/>
-        </p:spPr>
-        <p:txBody>
-          <a:bodyPr wrap="square">
-            <a:spAutoFit/>
-          </a:bodyPr>
-          <a:lstStyle/>
-          <a:p>
-            <a:pPr algn="l">
-              <a:defRPr sz="1700" b="0">
-                <a:solidFill>
-                  <a:srgbClr val="424242"/>
-                </a:solidFill>
-                <a:latin typeface="Segoe UI"/>
-              </a:defRPr>
-            </a:pPr>
-            <a:r>
-              <a:t>Always check if an image is AI-generated before trusting or sharing it</a:t>
+              <a:t>Applying one artistic style to another image</a:t>
             </a:r>
           </a:p>
         </p:txBody>
@@ -6192,6 +6079,680 @@
         <p:spPr>
           <a:xfrm>
             <a:off x="0" y="0"/>
+            <a:ext cx="12188952" cy="1188720"/>
+          </a:xfrm>
+          <a:prstGeom prst="rect">
+            <a:avLst/>
+          </a:prstGeom>
+          <a:solidFill>
+            <a:srgbClr val="1E3A5F"/>
+          </a:solidFill>
+          <a:ln>
+            <a:noFill/>
+          </a:ln>
+        </p:spPr>
+        <p:style>
+          <a:lnRef idx="1">
+            <a:schemeClr val="accent1"/>
+          </a:lnRef>
+          <a:fillRef idx="3">
+            <a:schemeClr val="accent1"/>
+          </a:fillRef>
+          <a:effectRef idx="2">
+            <a:schemeClr val="accent1"/>
+          </a:effectRef>
+          <a:fontRef idx="minor">
+            <a:schemeClr val="lt1"/>
+          </a:fontRef>
+        </p:style>
+        <p:txBody>
+          <a:bodyPr rtlCol="0" anchor="ctr"/>
+          <a:lstStyle/>
+          <a:p>
+            <a:pPr algn="ctr"/>
+          </a:p>
+        </p:txBody>
+      </p:sp>
+      <p:sp>
+        <p:nvSpPr>
+          <p:cNvPr id="3" name="TextBox 2"/>
+          <p:cNvSpPr txBox="1"/>
+          <p:nvPr/>
+        </p:nvSpPr>
+        <p:spPr>
+          <a:xfrm>
+            <a:off x="457200" y="320040"/>
+            <a:ext cx="11274552" cy="640080"/>
+          </a:xfrm>
+          <a:prstGeom prst="rect">
+            <a:avLst/>
+          </a:prstGeom>
+          <a:noFill/>
+        </p:spPr>
+        <p:txBody>
+          <a:bodyPr wrap="square">
+            <a:spAutoFit/>
+          </a:bodyPr>
+          <a:lstStyle/>
+          <a:p>
+            <a:pPr algn="l">
+              <a:defRPr sz="3600" b="1">
+                <a:solidFill>
+                  <a:srgbClr val="FFFFFF"/>
+                </a:solidFill>
+                <a:latin typeface="Segoe UI Semibold"/>
+              </a:defRPr>
+            </a:pPr>
+            <a:r>
+              <a:t>Today's Key Takeaways</a:t>
+            </a:r>
+          </a:p>
+        </p:txBody>
+      </p:sp>
+      <p:sp>
+        <p:nvSpPr>
+          <p:cNvPr id="4" name="Rectangle 3"/>
+          <p:cNvSpPr/>
+          <p:nvPr/>
+        </p:nvSpPr>
+        <p:spPr>
+          <a:xfrm>
+            <a:off x="0" y="1188720"/>
+            <a:ext cx="12188952" cy="73152"/>
+          </a:xfrm>
+          <a:prstGeom prst="rect">
+            <a:avLst/>
+          </a:prstGeom>
+          <a:solidFill>
+            <a:srgbClr val="FF9933"/>
+          </a:solidFill>
+          <a:ln>
+            <a:noFill/>
+          </a:ln>
+        </p:spPr>
+        <p:style>
+          <a:lnRef idx="1">
+            <a:schemeClr val="accent1"/>
+          </a:lnRef>
+          <a:fillRef idx="3">
+            <a:schemeClr val="accent1"/>
+          </a:fillRef>
+          <a:effectRef idx="2">
+            <a:schemeClr val="accent1"/>
+          </a:effectRef>
+          <a:fontRef idx="minor">
+            <a:schemeClr val="lt1"/>
+          </a:fontRef>
+        </p:style>
+        <p:txBody>
+          <a:bodyPr rtlCol="0" anchor="ctr"/>
+          <a:lstStyle/>
+          <a:p>
+            <a:pPr algn="ctr"/>
+          </a:p>
+        </p:txBody>
+      </p:sp>
+      <p:sp>
+        <p:nvSpPr>
+          <p:cNvPr id="5" name="Oval 4"/>
+          <p:cNvSpPr/>
+          <p:nvPr/>
+        </p:nvSpPr>
+        <p:spPr>
+          <a:xfrm>
+            <a:off x="731520" y="1508760"/>
+            <a:ext cx="502920" cy="502920"/>
+          </a:xfrm>
+          <a:prstGeom prst="ellipse">
+            <a:avLst/>
+          </a:prstGeom>
+          <a:solidFill>
+            <a:srgbClr val="3467A6"/>
+          </a:solidFill>
+          <a:ln>
+            <a:noFill/>
+          </a:ln>
+        </p:spPr>
+        <p:style>
+          <a:lnRef idx="1">
+            <a:schemeClr val="accent1"/>
+          </a:lnRef>
+          <a:fillRef idx="3">
+            <a:schemeClr val="accent1"/>
+          </a:fillRef>
+          <a:effectRef idx="2">
+            <a:schemeClr val="accent1"/>
+          </a:effectRef>
+          <a:fontRef idx="minor">
+            <a:schemeClr val="lt1"/>
+          </a:fontRef>
+        </p:style>
+        <p:txBody>
+          <a:bodyPr rtlCol="0" anchor="ctr" wrap="square"/>
+          <a:lstStyle/>
+          <a:p>
+            <a:pPr algn="ctr">
+              <a:defRPr sz="1600" b="1">
+                <a:solidFill>
+                  <a:srgbClr val="FFFFFF"/>
+                </a:solidFill>
+                <a:latin typeface="Segoe UI"/>
+              </a:defRPr>
+            </a:pPr>
+            <a:r>
+              <a:t>1</a:t>
+            </a:r>
+          </a:p>
+        </p:txBody>
+      </p:sp>
+      <p:sp>
+        <p:nvSpPr>
+          <p:cNvPr id="6" name="TextBox 5"/>
+          <p:cNvSpPr txBox="1"/>
+          <p:nvPr/>
+        </p:nvSpPr>
+        <p:spPr>
+          <a:xfrm>
+            <a:off x="1554480" y="1554480"/>
+            <a:ext cx="10058400" cy="548640"/>
+          </a:xfrm>
+          <a:prstGeom prst="rect">
+            <a:avLst/>
+          </a:prstGeom>
+          <a:noFill/>
+        </p:spPr>
+        <p:txBody>
+          <a:bodyPr wrap="square">
+            <a:spAutoFit/>
+          </a:bodyPr>
+          <a:lstStyle/>
+          <a:p>
+            <a:pPr algn="l">
+              <a:defRPr sz="1700" b="0">
+                <a:solidFill>
+                  <a:srgbClr val="424242"/>
+                </a:solidFill>
+                <a:latin typeface="Segoe UI"/>
+              </a:defRPr>
+            </a:pPr>
+            <a:r>
+              <a:t>AI can generate images from text using diffusion (noise removal)</a:t>
+            </a:r>
+          </a:p>
+        </p:txBody>
+      </p:sp>
+      <p:sp>
+        <p:nvSpPr>
+          <p:cNvPr id="7" name="Oval 6"/>
+          <p:cNvSpPr/>
+          <p:nvPr/>
+        </p:nvSpPr>
+        <p:spPr>
+          <a:xfrm>
+            <a:off x="731520" y="2286000"/>
+            <a:ext cx="502920" cy="502920"/>
+          </a:xfrm>
+          <a:prstGeom prst="ellipse">
+            <a:avLst/>
+          </a:prstGeom>
+          <a:solidFill>
+            <a:srgbClr val="009688"/>
+          </a:solidFill>
+          <a:ln>
+            <a:noFill/>
+          </a:ln>
+        </p:spPr>
+        <p:style>
+          <a:lnRef idx="1">
+            <a:schemeClr val="accent1"/>
+          </a:lnRef>
+          <a:fillRef idx="3">
+            <a:schemeClr val="accent1"/>
+          </a:fillRef>
+          <a:effectRef idx="2">
+            <a:schemeClr val="accent1"/>
+          </a:effectRef>
+          <a:fontRef idx="minor">
+            <a:schemeClr val="lt1"/>
+          </a:fontRef>
+        </p:style>
+        <p:txBody>
+          <a:bodyPr rtlCol="0" anchor="ctr" wrap="square"/>
+          <a:lstStyle/>
+          <a:p>
+            <a:pPr algn="ctr">
+              <a:defRPr sz="1600" b="1">
+                <a:solidFill>
+                  <a:srgbClr val="FFFFFF"/>
+                </a:solidFill>
+                <a:latin typeface="Segoe UI"/>
+              </a:defRPr>
+            </a:pPr>
+            <a:r>
+              <a:t>2</a:t>
+            </a:r>
+          </a:p>
+        </p:txBody>
+      </p:sp>
+      <p:sp>
+        <p:nvSpPr>
+          <p:cNvPr id="8" name="TextBox 7"/>
+          <p:cNvSpPr txBox="1"/>
+          <p:nvPr/>
+        </p:nvSpPr>
+        <p:spPr>
+          <a:xfrm>
+            <a:off x="1554480" y="2331720"/>
+            <a:ext cx="10058400" cy="548640"/>
+          </a:xfrm>
+          <a:prstGeom prst="rect">
+            <a:avLst/>
+          </a:prstGeom>
+          <a:noFill/>
+        </p:spPr>
+        <p:txBody>
+          <a:bodyPr wrap="square">
+            <a:spAutoFit/>
+          </a:bodyPr>
+          <a:lstStyle/>
+          <a:p>
+            <a:pPr algn="l">
+              <a:defRPr sz="1700" b="0">
+                <a:solidFill>
+                  <a:srgbClr val="424242"/>
+                </a:solidFill>
+                <a:latin typeface="Segoe UI"/>
+              </a:defRPr>
+            </a:pPr>
+            <a:r>
+              <a:t>Multimodal AI understands text, images, audio, and video together</a:t>
+            </a:r>
+          </a:p>
+        </p:txBody>
+      </p:sp>
+      <p:sp>
+        <p:nvSpPr>
+          <p:cNvPr id="9" name="Oval 8"/>
+          <p:cNvSpPr/>
+          <p:nvPr/>
+        </p:nvSpPr>
+        <p:spPr>
+          <a:xfrm>
+            <a:off x="731520" y="3063239"/>
+            <a:ext cx="502920" cy="502920"/>
+          </a:xfrm>
+          <a:prstGeom prst="ellipse">
+            <a:avLst/>
+          </a:prstGeom>
+          <a:solidFill>
+            <a:srgbClr val="FFB300"/>
+          </a:solidFill>
+          <a:ln>
+            <a:noFill/>
+          </a:ln>
+        </p:spPr>
+        <p:style>
+          <a:lnRef idx="1">
+            <a:schemeClr val="accent1"/>
+          </a:lnRef>
+          <a:fillRef idx="3">
+            <a:schemeClr val="accent1"/>
+          </a:fillRef>
+          <a:effectRef idx="2">
+            <a:schemeClr val="accent1"/>
+          </a:effectRef>
+          <a:fontRef idx="minor">
+            <a:schemeClr val="lt1"/>
+          </a:fontRef>
+        </p:style>
+        <p:txBody>
+          <a:bodyPr rtlCol="0" anchor="ctr" wrap="square"/>
+          <a:lstStyle/>
+          <a:p>
+            <a:pPr algn="ctr">
+              <a:defRPr sz="1600" b="1">
+                <a:solidFill>
+                  <a:srgbClr val="FFFFFF"/>
+                </a:solidFill>
+                <a:latin typeface="Segoe UI"/>
+              </a:defRPr>
+            </a:pPr>
+            <a:r>
+              <a:t>3</a:t>
+            </a:r>
+          </a:p>
+        </p:txBody>
+      </p:sp>
+      <p:sp>
+        <p:nvSpPr>
+          <p:cNvPr id="10" name="TextBox 9"/>
+          <p:cNvSpPr txBox="1"/>
+          <p:nvPr/>
+        </p:nvSpPr>
+        <p:spPr>
+          <a:xfrm>
+            <a:off x="1554480" y="3108960"/>
+            <a:ext cx="10058400" cy="548640"/>
+          </a:xfrm>
+          <a:prstGeom prst="rect">
+            <a:avLst/>
+          </a:prstGeom>
+          <a:noFill/>
+        </p:spPr>
+        <p:txBody>
+          <a:bodyPr wrap="square">
+            <a:spAutoFit/>
+          </a:bodyPr>
+          <a:lstStyle/>
+          <a:p>
+            <a:pPr algn="l">
+              <a:defRPr sz="1700" b="0">
+                <a:solidFill>
+                  <a:srgbClr val="424242"/>
+                </a:solidFill>
+                <a:latin typeface="Segoe UI"/>
+              </a:defRPr>
+            </a:pPr>
+            <a:r>
+              <a:t>Better prompts = better images (describe subject, style, lighting, mood)</a:t>
+            </a:r>
+          </a:p>
+        </p:txBody>
+      </p:sp>
+      <p:sp>
+        <p:nvSpPr>
+          <p:cNvPr id="11" name="Oval 10"/>
+          <p:cNvSpPr/>
+          <p:nvPr/>
+        </p:nvSpPr>
+        <p:spPr>
+          <a:xfrm>
+            <a:off x="731520" y="3840480"/>
+            <a:ext cx="502920" cy="502920"/>
+          </a:xfrm>
+          <a:prstGeom prst="ellipse">
+            <a:avLst/>
+          </a:prstGeom>
+          <a:solidFill>
+            <a:srgbClr val="7E57C2"/>
+          </a:solidFill>
+          <a:ln>
+            <a:noFill/>
+          </a:ln>
+        </p:spPr>
+        <p:style>
+          <a:lnRef idx="1">
+            <a:schemeClr val="accent1"/>
+          </a:lnRef>
+          <a:fillRef idx="3">
+            <a:schemeClr val="accent1"/>
+          </a:fillRef>
+          <a:effectRef idx="2">
+            <a:schemeClr val="accent1"/>
+          </a:effectRef>
+          <a:fontRef idx="minor">
+            <a:schemeClr val="lt1"/>
+          </a:fontRef>
+        </p:style>
+        <p:txBody>
+          <a:bodyPr rtlCol="0" anchor="ctr" wrap="square"/>
+          <a:lstStyle/>
+          <a:p>
+            <a:pPr algn="ctr">
+              <a:defRPr sz="1600" b="1">
+                <a:solidFill>
+                  <a:srgbClr val="FFFFFF"/>
+                </a:solidFill>
+                <a:latin typeface="Segoe UI"/>
+              </a:defRPr>
+            </a:pPr>
+            <a:r>
+              <a:t>4</a:t>
+            </a:r>
+          </a:p>
+        </p:txBody>
+      </p:sp>
+      <p:sp>
+        <p:nvSpPr>
+          <p:cNvPr id="12" name="TextBox 11"/>
+          <p:cNvSpPr txBox="1"/>
+          <p:nvPr/>
+        </p:nvSpPr>
+        <p:spPr>
+          <a:xfrm>
+            <a:off x="1554480" y="3886200"/>
+            <a:ext cx="10058400" cy="548640"/>
+          </a:xfrm>
+          <a:prstGeom prst="rect">
+            <a:avLst/>
+          </a:prstGeom>
+          <a:noFill/>
+        </p:spPr>
+        <p:txBody>
+          <a:bodyPr wrap="square">
+            <a:spAutoFit/>
+          </a:bodyPr>
+          <a:lstStyle/>
+          <a:p>
+            <a:pPr algn="l">
+              <a:defRPr sz="1700" b="0">
+                <a:solidFill>
+                  <a:srgbClr val="424242"/>
+                </a:solidFill>
+                <a:latin typeface="Segoe UI"/>
+              </a:defRPr>
+            </a:pPr>
+            <a:r>
+              <a:t>AI images are NOT copied — they're generated from learned patterns</a:t>
+            </a:r>
+          </a:p>
+        </p:txBody>
+      </p:sp>
+      <p:sp>
+        <p:nvSpPr>
+          <p:cNvPr id="13" name="Oval 12"/>
+          <p:cNvSpPr/>
+          <p:nvPr/>
+        </p:nvSpPr>
+        <p:spPr>
+          <a:xfrm>
+            <a:off x="731520" y="4617720"/>
+            <a:ext cx="502920" cy="502920"/>
+          </a:xfrm>
+          <a:prstGeom prst="ellipse">
+            <a:avLst/>
+          </a:prstGeom>
+          <a:solidFill>
+            <a:srgbClr val="E53935"/>
+          </a:solidFill>
+          <a:ln>
+            <a:noFill/>
+          </a:ln>
+        </p:spPr>
+        <p:style>
+          <a:lnRef idx="1">
+            <a:schemeClr val="accent1"/>
+          </a:lnRef>
+          <a:fillRef idx="3">
+            <a:schemeClr val="accent1"/>
+          </a:fillRef>
+          <a:effectRef idx="2">
+            <a:schemeClr val="accent1"/>
+          </a:effectRef>
+          <a:fontRef idx="minor">
+            <a:schemeClr val="lt1"/>
+          </a:fontRef>
+        </p:style>
+        <p:txBody>
+          <a:bodyPr rtlCol="0" anchor="ctr" wrap="square"/>
+          <a:lstStyle/>
+          <a:p>
+            <a:pPr algn="ctr">
+              <a:defRPr sz="1600" b="1">
+                <a:solidFill>
+                  <a:srgbClr val="FFFFFF"/>
+                </a:solidFill>
+                <a:latin typeface="Segoe UI"/>
+              </a:defRPr>
+            </a:pPr>
+            <a:r>
+              <a:t>5</a:t>
+            </a:r>
+          </a:p>
+        </p:txBody>
+      </p:sp>
+      <p:sp>
+        <p:nvSpPr>
+          <p:cNvPr id="14" name="TextBox 13"/>
+          <p:cNvSpPr txBox="1"/>
+          <p:nvPr/>
+        </p:nvSpPr>
+        <p:spPr>
+          <a:xfrm>
+            <a:off x="1554480" y="4663440"/>
+            <a:ext cx="10058400" cy="548640"/>
+          </a:xfrm>
+          <a:prstGeom prst="rect">
+            <a:avLst/>
+          </a:prstGeom>
+          <a:noFill/>
+        </p:spPr>
+        <p:txBody>
+          <a:bodyPr wrap="square">
+            <a:spAutoFit/>
+          </a:bodyPr>
+          <a:lstStyle/>
+          <a:p>
+            <a:pPr algn="l">
+              <a:defRPr sz="1700" b="0">
+                <a:solidFill>
+                  <a:srgbClr val="424242"/>
+                </a:solidFill>
+                <a:latin typeface="Segoe UI"/>
+              </a:defRPr>
+            </a:pPr>
+            <a:r>
+              <a:t>Deepfakes are dangerous — never make fake images of real people</a:t>
+            </a:r>
+          </a:p>
+        </p:txBody>
+      </p:sp>
+      <p:sp>
+        <p:nvSpPr>
+          <p:cNvPr id="15" name="Oval 14"/>
+          <p:cNvSpPr/>
+          <p:nvPr/>
+        </p:nvSpPr>
+        <p:spPr>
+          <a:xfrm>
+            <a:off x="731520" y="5394959"/>
+            <a:ext cx="502920" cy="502920"/>
+          </a:xfrm>
+          <a:prstGeom prst="ellipse">
+            <a:avLst/>
+          </a:prstGeom>
+          <a:solidFill>
+            <a:srgbClr val="4CAF50"/>
+          </a:solidFill>
+          <a:ln>
+            <a:noFill/>
+          </a:ln>
+        </p:spPr>
+        <p:style>
+          <a:lnRef idx="1">
+            <a:schemeClr val="accent1"/>
+          </a:lnRef>
+          <a:fillRef idx="3">
+            <a:schemeClr val="accent1"/>
+          </a:fillRef>
+          <a:effectRef idx="2">
+            <a:schemeClr val="accent1"/>
+          </a:effectRef>
+          <a:fontRef idx="minor">
+            <a:schemeClr val="lt1"/>
+          </a:fontRef>
+        </p:style>
+        <p:txBody>
+          <a:bodyPr rtlCol="0" anchor="ctr" wrap="square"/>
+          <a:lstStyle/>
+          <a:p>
+            <a:pPr algn="ctr">
+              <a:defRPr sz="1600" b="1">
+                <a:solidFill>
+                  <a:srgbClr val="FFFFFF"/>
+                </a:solidFill>
+                <a:latin typeface="Segoe UI"/>
+              </a:defRPr>
+            </a:pPr>
+            <a:r>
+              <a:t>6</a:t>
+            </a:r>
+          </a:p>
+        </p:txBody>
+      </p:sp>
+      <p:sp>
+        <p:nvSpPr>
+          <p:cNvPr id="16" name="TextBox 15"/>
+          <p:cNvSpPr txBox="1"/>
+          <p:nvPr/>
+        </p:nvSpPr>
+        <p:spPr>
+          <a:xfrm>
+            <a:off x="1554480" y="5440679"/>
+            <a:ext cx="10058400" cy="548640"/>
+          </a:xfrm>
+          <a:prstGeom prst="rect">
+            <a:avLst/>
+          </a:prstGeom>
+          <a:noFill/>
+        </p:spPr>
+        <p:txBody>
+          <a:bodyPr wrap="square">
+            <a:spAutoFit/>
+          </a:bodyPr>
+          <a:lstStyle/>
+          <a:p>
+            <a:pPr algn="l">
+              <a:defRPr sz="1700" b="0">
+                <a:solidFill>
+                  <a:srgbClr val="424242"/>
+                </a:solidFill>
+                <a:latin typeface="Segoe UI"/>
+              </a:defRPr>
+            </a:pPr>
+            <a:r>
+              <a:t>Always check if an image is AI-generated before trusting or sharing it</a:t>
+            </a:r>
+          </a:p>
+        </p:txBody>
+      </p:sp>
+    </p:spTree>
+  </p:cSld>
+  <p:clrMapOvr>
+    <a:masterClrMapping/>
+  </p:clrMapOvr>
+</p:sld>
+</file>
+
+<file path=ppt/slides/slide15.xml><?xml version="1.0" encoding="utf-8"?>
+<p:sld xmlns:a="http://schemas.openxmlformats.org/drawingml/2006/main" xmlns:p="http://schemas.openxmlformats.org/presentationml/2006/main" xmlns:r="http://schemas.openxmlformats.org/officeDocument/2006/relationships">
+  <p:cSld>
+    <p:spTree>
+      <p:nvGrpSpPr>
+        <p:cNvPr id="1" name=""/>
+        <p:cNvGrpSpPr/>
+        <p:nvPr/>
+      </p:nvGrpSpPr>
+      <p:grpSpPr/>
+      <p:sp>
+        <p:nvSpPr>
+          <p:cNvPr id="2" name="Rectangle 1"/>
+          <p:cNvSpPr/>
+          <p:nvPr/>
+        </p:nvSpPr>
+        <p:spPr>
+          <a:xfrm>
+            <a:off x="0" y="0"/>
             <a:ext cx="12188952" cy="6858000"/>
           </a:xfrm>
           <a:prstGeom prst="rect">
@@ -8476,7 +9037,7 @@
               </a:defRPr>
             </a:pPr>
             <a:r>
-              <a:t>How Do Image Models Work?</a:t>
+              <a:t>How Are Image Models Trained?</a:t>
             </a:r>
           </a:p>
         </p:txBody>
@@ -8555,7 +9116,7 @@
               </a:defRPr>
             </a:pPr>
             <a:r>
-              <a:t>The Big Idea: Diffusion (Removing Noise)</a:t>
+              <a:t>They learn from BILLIONS of image + caption pairs</a:t>
             </a:r>
           </a:p>
         </p:txBody>
@@ -8569,7 +9130,7 @@
         <p:spPr>
           <a:xfrm>
             <a:off x="457200" y="1463040"/>
-            <a:ext cx="11274552" cy="1097280"/>
+            <a:ext cx="11274552" cy="914400"/>
           </a:xfrm>
           <a:prstGeom prst="roundRect">
             <a:avLst/>
@@ -8612,7 +9173,7 @@
         <p:spPr>
           <a:xfrm>
             <a:off x="731520" y="1554480"/>
-            <a:ext cx="10698480" cy="457200"/>
+            <a:ext cx="10698480" cy="365760"/>
           </a:xfrm>
           <a:prstGeom prst="rect">
             <a:avLst/>
@@ -8626,7 +9187,7 @@
           <a:lstStyle/>
           <a:p>
             <a:pPr algn="l">
-              <a:defRPr sz="1800" b="1">
+              <a:defRPr sz="1600" b="1">
                 <a:solidFill>
                   <a:srgbClr val="1E3A5F"/>
                 </a:solidFill>
@@ -8634,63 +9195,27 @@
               </a:defRPr>
             </a:pPr>
             <a:r>
-              <a:t>Imagine a sculptor starting with a rough block of marble...</a:t>
-            </a:r>
-          </a:p>
-        </p:txBody>
-      </p:sp>
-      <p:sp>
-        <p:nvSpPr>
-          <p:cNvPr id="8" name="TextBox 7"/>
-          <p:cNvSpPr txBox="1"/>
-          <p:nvPr/>
-        </p:nvSpPr>
-        <p:spPr>
-          <a:xfrm>
-            <a:off x="731520" y="2011680"/>
-            <a:ext cx="10698480" cy="457200"/>
-          </a:xfrm>
-          <a:prstGeom prst="rect">
-            <a:avLst/>
-          </a:prstGeom>
-          <a:noFill/>
-        </p:spPr>
-        <p:txBody>
-          <a:bodyPr wrap="square">
-            <a:spAutoFit/>
-          </a:bodyPr>
-          <a:lstStyle/>
-          <a:p>
-            <a:pPr algn="l">
-              <a:defRPr sz="1600" b="0">
-                <a:solidFill>
-                  <a:srgbClr val="424242"/>
-                </a:solidFill>
-                <a:latin typeface="Segoe UI"/>
-              </a:defRPr>
-            </a:pPr>
-            <a:r>
-              <a:t>They chip away noise until a beautiful statue appears. AI image models do the same with pixels!</a:t>
-            </a:r>
-          </a:p>
-        </p:txBody>
-      </p:sp>
-      <p:sp>
-        <p:nvSpPr>
-          <p:cNvPr id="9" name="Rounded Rectangle 8"/>
+              <a:t>Think of it like art school — but instead of years, it's weeks of studying billions of examples.</a:t>
+            </a:r>
+          </a:p>
+        </p:txBody>
+      </p:sp>
+      <p:sp>
+        <p:nvSpPr>
+          <p:cNvPr id="8" name="Rounded Rectangle 7"/>
           <p:cNvSpPr/>
           <p:nvPr/>
         </p:nvSpPr>
         <p:spPr>
           <a:xfrm>
-            <a:off x="548640" y="3017520"/>
-            <a:ext cx="2651760" cy="1188720"/>
+            <a:off x="365760" y="2651760"/>
+            <a:ext cx="2743200" cy="640080"/>
           </a:xfrm>
           <a:prstGeom prst="roundRect">
             <a:avLst/>
           </a:prstGeom>
           <a:solidFill>
-            <a:srgbClr val="424242"/>
+            <a:srgbClr val="3467A6"/>
           </a:solidFill>
           <a:ln>
             <a:noFill/>
@@ -8726,11 +9251,51 @@
               </a:defRPr>
             </a:pPr>
             <a:r>
-              <a:t>1. Start with</a:t>
+              <a:t>1. Collect Data</a:t>
+            </a:r>
+          </a:p>
+        </p:txBody>
+      </p:sp>
+      <p:sp>
+        <p:nvSpPr>
+          <p:cNvPr id="9" name="TextBox 8"/>
+          <p:cNvSpPr txBox="1"/>
+          <p:nvPr/>
+        </p:nvSpPr>
+        <p:spPr>
+          <a:xfrm>
+            <a:off x="502920" y="3383280"/>
+            <a:ext cx="2560320" cy="1097280"/>
+          </a:xfrm>
+          <a:prstGeom prst="rect">
+            <a:avLst/>
+          </a:prstGeom>
+          <a:noFill/>
+        </p:spPr>
+        <p:txBody>
+          <a:bodyPr wrap="square">
+            <a:spAutoFit/>
+          </a:bodyPr>
+          <a:lstStyle/>
+          <a:p>
+            <a:pPr algn="ctr">
+              <a:defRPr sz="1200" b="0">
+                <a:solidFill>
+                  <a:srgbClr val="424242"/>
+                </a:solidFill>
+                <a:latin typeface="Segoe UI"/>
+              </a:defRPr>
+            </a:pPr>
+            <a:r>
+              <a:t>Billions of images from the</a:t>
             </a:r>
             <a:br/>
             <a:r>
-              <a:t>Random Noise</a:t>
+              <a:t>internet with text descriptions</a:t>
+            </a:r>
+            <a:br/>
+            <a:r>
+              <a:t>(captions, alt text, tags)</a:t>
             </a:r>
           </a:p>
         </p:txBody>
@@ -8743,8 +9308,8 @@
         </p:nvSpPr>
         <p:spPr>
           <a:xfrm>
-            <a:off x="3291840" y="3474720"/>
-            <a:ext cx="457200" cy="274320"/>
+            <a:off x="3154679" y="2834640"/>
+            <a:ext cx="365760" cy="274320"/>
           </a:xfrm>
           <a:prstGeom prst="rightArrow">
             <a:avLst/>
@@ -8786,8 +9351,8 @@
         </p:nvSpPr>
         <p:spPr>
           <a:xfrm>
-            <a:off x="3474720" y="3017520"/>
-            <a:ext cx="2651760" cy="1188720"/>
+            <a:off x="3337560" y="2651760"/>
+            <a:ext cx="2743200" cy="640080"/>
           </a:xfrm>
           <a:prstGeom prst="roundRect">
             <a:avLst/>
@@ -8829,25 +9394,65 @@
               </a:defRPr>
             </a:pPr>
             <a:r>
-              <a:t>2. AI Removes Noise</a:t>
+              <a:t>2. Add Noise</a:t>
+            </a:r>
+          </a:p>
+        </p:txBody>
+      </p:sp>
+      <p:sp>
+        <p:nvSpPr>
+          <p:cNvPr id="12" name="TextBox 11"/>
+          <p:cNvSpPr txBox="1"/>
+          <p:nvPr/>
+        </p:nvSpPr>
+        <p:spPr>
+          <a:xfrm>
+            <a:off x="3474720" y="3383280"/>
+            <a:ext cx="2560320" cy="1097280"/>
+          </a:xfrm>
+          <a:prstGeom prst="rect">
+            <a:avLst/>
+          </a:prstGeom>
+          <a:noFill/>
+        </p:spPr>
+        <p:txBody>
+          <a:bodyPr wrap="square">
+            <a:spAutoFit/>
+          </a:bodyPr>
+          <a:lstStyle/>
+          <a:p>
+            <a:pPr algn="ctr">
+              <a:defRPr sz="1200" b="0">
+                <a:solidFill>
+                  <a:srgbClr val="424242"/>
+                </a:solidFill>
+                <a:latin typeface="Segoe UI"/>
+              </a:defRPr>
+            </a:pPr>
+            <a:r>
+              <a:t>The model learns to add random</a:t>
             </a:r>
             <a:br/>
             <a:r>
-              <a:t>(Many Steps)</a:t>
-            </a:r>
-          </a:p>
-        </p:txBody>
-      </p:sp>
-      <p:sp>
-        <p:nvSpPr>
-          <p:cNvPr id="12" name="Right Arrow 11"/>
+              <a:t>noise to images (blur them</a:t>
+            </a:r>
+            <a:br/>
+            <a:r>
+              <a:t>more and more)</a:t>
+            </a:r>
+          </a:p>
+        </p:txBody>
+      </p:sp>
+      <p:sp>
+        <p:nvSpPr>
+          <p:cNvPr id="13" name="Right Arrow 12"/>
           <p:cNvSpPr/>
           <p:nvPr/>
         </p:nvSpPr>
         <p:spPr>
           <a:xfrm>
-            <a:off x="6217920" y="3474720"/>
-            <a:ext cx="457200" cy="274320"/>
+            <a:off x="6126479" y="2834640"/>
+            <a:ext cx="365760" cy="274320"/>
           </a:xfrm>
           <a:prstGeom prst="rightArrow">
             <a:avLst/>
@@ -8883,14 +9488,157 @@
       </p:sp>
       <p:sp>
         <p:nvSpPr>
-          <p:cNvPr id="13" name="Rounded Rectangle 12"/>
+          <p:cNvPr id="14" name="Rounded Rectangle 13"/>
           <p:cNvSpPr/>
           <p:nvPr/>
         </p:nvSpPr>
         <p:spPr>
           <a:xfrm>
-            <a:off x="6400800" y="3017520"/>
-            <a:ext cx="2651760" cy="1188720"/>
+            <a:off x="6309360" y="2651760"/>
+            <a:ext cx="2743200" cy="640080"/>
+          </a:xfrm>
+          <a:prstGeom prst="roundRect">
+            <a:avLst/>
+          </a:prstGeom>
+          <a:solidFill>
+            <a:srgbClr val="7E57C2"/>
+          </a:solidFill>
+          <a:ln>
+            <a:noFill/>
+          </a:ln>
+        </p:spPr>
+        <p:style>
+          <a:lnRef idx="1">
+            <a:schemeClr val="accent1"/>
+          </a:lnRef>
+          <a:fillRef idx="3">
+            <a:schemeClr val="accent1"/>
+          </a:fillRef>
+          <a:effectRef idx="2">
+            <a:schemeClr val="accent1"/>
+          </a:effectRef>
+          <a:fontRef idx="minor">
+            <a:schemeClr val="lt1"/>
+          </a:fontRef>
+        </p:style>
+        <p:txBody>
+          <a:bodyPr rtlCol="0" anchor="ctr" wrap="square"/>
+          <a:lstStyle/>
+          <a:p>
+            <a:pPr algn="ctr">
+              <a:spcBef>
+                <a:spcPts val="800"/>
+              </a:spcBef>
+              <a:defRPr sz="1400" b="1">
+                <a:solidFill>
+                  <a:srgbClr val="FFFFFF"/>
+                </a:solidFill>
+                <a:latin typeface="Segoe UI"/>
+              </a:defRPr>
+            </a:pPr>
+            <a:r>
+              <a:t>3. Learn to Denoise</a:t>
+            </a:r>
+          </a:p>
+        </p:txBody>
+      </p:sp>
+      <p:sp>
+        <p:nvSpPr>
+          <p:cNvPr id="15" name="TextBox 14"/>
+          <p:cNvSpPr txBox="1"/>
+          <p:nvPr/>
+        </p:nvSpPr>
+        <p:spPr>
+          <a:xfrm>
+            <a:off x="6446520" y="3383280"/>
+            <a:ext cx="2560320" cy="1097280"/>
+          </a:xfrm>
+          <a:prstGeom prst="rect">
+            <a:avLst/>
+          </a:prstGeom>
+          <a:noFill/>
+        </p:spPr>
+        <p:txBody>
+          <a:bodyPr wrap="square">
+            <a:spAutoFit/>
+          </a:bodyPr>
+          <a:lstStyle/>
+          <a:p>
+            <a:pPr algn="ctr">
+              <a:defRPr sz="1200" b="0">
+                <a:solidFill>
+                  <a:srgbClr val="424242"/>
+                </a:solidFill>
+                <a:latin typeface="Segoe UI"/>
+              </a:defRPr>
+            </a:pPr>
+            <a:r>
+              <a:t>Then it learns to REVERSE the</a:t>
+            </a:r>
+            <a:br/>
+            <a:r>
+              <a:t>process — remove the noise to</a:t>
+            </a:r>
+            <a:br/>
+            <a:r>
+              <a:t>get back to the original image</a:t>
+            </a:r>
+          </a:p>
+        </p:txBody>
+      </p:sp>
+      <p:sp>
+        <p:nvSpPr>
+          <p:cNvPr id="16" name="Right Arrow 15"/>
+          <p:cNvSpPr/>
+          <p:nvPr/>
+        </p:nvSpPr>
+        <p:spPr>
+          <a:xfrm>
+            <a:off x="9098280" y="2834640"/>
+            <a:ext cx="365760" cy="274320"/>
+          </a:xfrm>
+          <a:prstGeom prst="rightArrow">
+            <a:avLst/>
+          </a:prstGeom>
+          <a:solidFill>
+            <a:srgbClr val="FF9933"/>
+          </a:solidFill>
+          <a:ln>
+            <a:noFill/>
+          </a:ln>
+        </p:spPr>
+        <p:style>
+          <a:lnRef idx="1">
+            <a:schemeClr val="accent1"/>
+          </a:lnRef>
+          <a:fillRef idx="3">
+            <a:schemeClr val="accent1"/>
+          </a:fillRef>
+          <a:effectRef idx="2">
+            <a:schemeClr val="accent1"/>
+          </a:effectRef>
+          <a:fontRef idx="minor">
+            <a:schemeClr val="lt1"/>
+          </a:fontRef>
+        </p:style>
+        <p:txBody>
+          <a:bodyPr rtlCol="0" anchor="ctr"/>
+          <a:lstStyle/>
+          <a:p>
+            <a:pPr algn="ctr"/>
+          </a:p>
+        </p:txBody>
+      </p:sp>
+      <p:sp>
+        <p:nvSpPr>
+          <p:cNvPr id="17" name="Rounded Rectangle 16"/>
+          <p:cNvSpPr/>
+          <p:nvPr/>
+        </p:nvSpPr>
+        <p:spPr>
+          <a:xfrm>
+            <a:off x="9281160" y="2651760"/>
+            <a:ext cx="2743200" cy="640080"/>
           </a:xfrm>
           <a:prstGeom prst="roundRect">
             <a:avLst/>
@@ -8932,121 +9680,58 @@
               </a:defRPr>
             </a:pPr>
             <a:r>
-              <a:t>3. Text Prompt</a:t>
+              <a:t>4. Connect Text</a:t>
+            </a:r>
+          </a:p>
+        </p:txBody>
+      </p:sp>
+      <p:sp>
+        <p:nvSpPr>
+          <p:cNvPr id="18" name="TextBox 17"/>
+          <p:cNvSpPr txBox="1"/>
+          <p:nvPr/>
+        </p:nvSpPr>
+        <p:spPr>
+          <a:xfrm>
+            <a:off x="9418320" y="3383280"/>
+            <a:ext cx="2560320" cy="1097280"/>
+          </a:xfrm>
+          <a:prstGeom prst="rect">
+            <a:avLst/>
+          </a:prstGeom>
+          <a:noFill/>
+        </p:spPr>
+        <p:txBody>
+          <a:bodyPr wrap="square">
+            <a:spAutoFit/>
+          </a:bodyPr>
+          <a:lstStyle/>
+          <a:p>
+            <a:pPr algn="ctr">
+              <a:defRPr sz="1200" b="0">
+                <a:solidFill>
+                  <a:srgbClr val="424242"/>
+                </a:solidFill>
+                <a:latin typeface="Segoe UI"/>
+              </a:defRPr>
+            </a:pPr>
+            <a:r>
+              <a:t>It learns which text descriptions</a:t>
             </a:r>
             <a:br/>
             <a:r>
-              <a:t>Guides the Shape</a:t>
-            </a:r>
-          </a:p>
-        </p:txBody>
-      </p:sp>
-      <p:sp>
-        <p:nvSpPr>
-          <p:cNvPr id="14" name="Right Arrow 13"/>
-          <p:cNvSpPr/>
-          <p:nvPr/>
-        </p:nvSpPr>
-        <p:spPr>
-          <a:xfrm>
-            <a:off x="9144000" y="3474720"/>
-            <a:ext cx="457200" cy="274320"/>
-          </a:xfrm>
-          <a:prstGeom prst="rightArrow">
-            <a:avLst/>
-          </a:prstGeom>
-          <a:solidFill>
-            <a:srgbClr val="FF9933"/>
-          </a:solidFill>
-          <a:ln>
-            <a:noFill/>
-          </a:ln>
-        </p:spPr>
-        <p:style>
-          <a:lnRef idx="1">
-            <a:schemeClr val="accent1"/>
-          </a:lnRef>
-          <a:fillRef idx="3">
-            <a:schemeClr val="accent1"/>
-          </a:fillRef>
-          <a:effectRef idx="2">
-            <a:schemeClr val="accent1"/>
-          </a:effectRef>
-          <a:fontRef idx="minor">
-            <a:schemeClr val="lt1"/>
-          </a:fontRef>
-        </p:style>
-        <p:txBody>
-          <a:bodyPr rtlCol="0" anchor="ctr"/>
-          <a:lstStyle/>
-          <a:p>
-            <a:pPr algn="ctr"/>
-          </a:p>
-        </p:txBody>
-      </p:sp>
-      <p:sp>
-        <p:nvSpPr>
-          <p:cNvPr id="15" name="Rounded Rectangle 14"/>
-          <p:cNvSpPr/>
-          <p:nvPr/>
-        </p:nvSpPr>
-        <p:spPr>
-          <a:xfrm>
-            <a:off x="9326880" y="3017520"/>
-            <a:ext cx="2651760" cy="1188720"/>
-          </a:xfrm>
-          <a:prstGeom prst="roundRect">
-            <a:avLst/>
-          </a:prstGeom>
-          <a:solidFill>
-            <a:srgbClr val="4CAF50"/>
-          </a:solidFill>
-          <a:ln>
-            <a:noFill/>
-          </a:ln>
-        </p:spPr>
-        <p:style>
-          <a:lnRef idx="1">
-            <a:schemeClr val="accent1"/>
-          </a:lnRef>
-          <a:fillRef idx="3">
-            <a:schemeClr val="accent1"/>
-          </a:fillRef>
-          <a:effectRef idx="2">
-            <a:schemeClr val="accent1"/>
-          </a:effectRef>
-          <a:fontRef idx="minor">
-            <a:schemeClr val="lt1"/>
-          </a:fontRef>
-        </p:style>
-        <p:txBody>
-          <a:bodyPr rtlCol="0" anchor="ctr" wrap="square"/>
-          <a:lstStyle/>
-          <a:p>
-            <a:pPr algn="ctr">
-              <a:spcBef>
-                <a:spcPts val="800"/>
-              </a:spcBef>
-              <a:defRPr sz="1400" b="1">
-                <a:solidFill>
-                  <a:srgbClr val="FFFFFF"/>
-                </a:solidFill>
-                <a:latin typeface="Segoe UI"/>
-              </a:defRPr>
-            </a:pPr>
-            <a:r>
-              <a:t>4. Final Image</a:t>
+              <a:t>match which images, so your</a:t>
             </a:r>
             <a:br/>
             <a:r>
-              <a:t>Appears!</a:t>
-            </a:r>
-          </a:p>
-        </p:txBody>
-      </p:sp>
-      <p:sp>
-        <p:nvSpPr>
-          <p:cNvPr id="16" name="Rounded Rectangle 15"/>
+              <a:t>prompt can guide the output</a:t>
+            </a:r>
+          </a:p>
+        </p:txBody>
+      </p:sp>
+      <p:sp>
+        <p:nvSpPr>
+          <p:cNvPr id="19" name="Rounded Rectangle 18"/>
           <p:cNvSpPr/>
           <p:nvPr/>
         </p:nvSpPr>
@@ -9095,7 +9780,7 @@
               </a:defRPr>
             </a:pPr>
             <a:r>
-              <a:t>Diffusion = Start with noise, subtract it step by step, guided by your text prompt</a:t>
+              <a:t>Training takes weeks on thousands of GPUs — but once trained, generation takes seconds!</a:t>
             </a:r>
           </a:p>
         </p:txBody>
@@ -9192,7 +9877,7 @@
               </a:defRPr>
             </a:pPr>
             <a:r>
-              <a:t>Text-to-Image: Step by Step</a:t>
+              <a:t>How Do Image Models Work?</a:t>
             </a:r>
           </a:p>
         </p:txBody>
@@ -9242,14 +9927,371 @@
       </p:sp>
       <p:sp>
         <p:nvSpPr>
-          <p:cNvPr id="5" name="Rounded Rectangle 4"/>
+          <p:cNvPr id="5" name="TextBox 4"/>
+          <p:cNvSpPr txBox="1"/>
+          <p:nvPr/>
+        </p:nvSpPr>
+        <p:spPr>
+          <a:xfrm>
+            <a:off x="457200" y="868680"/>
+            <a:ext cx="11274552" cy="365760"/>
+          </a:xfrm>
+          <a:prstGeom prst="rect">
+            <a:avLst/>
+          </a:prstGeom>
+          <a:noFill/>
+        </p:spPr>
+        <p:txBody>
+          <a:bodyPr wrap="square">
+            <a:spAutoFit/>
+          </a:bodyPr>
+          <a:lstStyle/>
+          <a:p>
+            <a:pPr algn="l">
+              <a:defRPr sz="1600" b="0">
+                <a:solidFill>
+                  <a:srgbClr val="ADD8E6"/>
+                </a:solidFill>
+                <a:latin typeface="Segoe UI"/>
+              </a:defRPr>
+            </a:pPr>
+            <a:r>
+              <a:t>The Big Idea: Diffusion (Removing Noise)</a:t>
+            </a:r>
+          </a:p>
+        </p:txBody>
+      </p:sp>
+      <p:sp>
+        <p:nvSpPr>
+          <p:cNvPr id="6" name="Rounded Rectangle 5"/>
           <p:cNvSpPr/>
           <p:nvPr/>
         </p:nvSpPr>
         <p:spPr>
           <a:xfrm>
-            <a:off x="914400" y="1554480"/>
-            <a:ext cx="2743200" cy="822960"/>
+            <a:off x="457200" y="1463040"/>
+            <a:ext cx="11274552" cy="1097280"/>
+          </a:xfrm>
+          <a:prstGeom prst="roundRect">
+            <a:avLst/>
+          </a:prstGeom>
+          <a:solidFill>
+            <a:srgbClr val="ADD8E6"/>
+          </a:solidFill>
+          <a:ln>
+            <a:noFill/>
+          </a:ln>
+        </p:spPr>
+        <p:style>
+          <a:lnRef idx="1">
+            <a:schemeClr val="accent1"/>
+          </a:lnRef>
+          <a:fillRef idx="3">
+            <a:schemeClr val="accent1"/>
+          </a:fillRef>
+          <a:effectRef idx="2">
+            <a:schemeClr val="accent1"/>
+          </a:effectRef>
+          <a:fontRef idx="minor">
+            <a:schemeClr val="lt1"/>
+          </a:fontRef>
+        </p:style>
+        <p:txBody>
+          <a:bodyPr rtlCol="0" anchor="ctr"/>
+          <a:lstStyle/>
+          <a:p>
+            <a:pPr algn="ctr"/>
+          </a:p>
+        </p:txBody>
+      </p:sp>
+      <p:sp>
+        <p:nvSpPr>
+          <p:cNvPr id="7" name="TextBox 6"/>
+          <p:cNvSpPr txBox="1"/>
+          <p:nvPr/>
+        </p:nvSpPr>
+        <p:spPr>
+          <a:xfrm>
+            <a:off x="731520" y="1554480"/>
+            <a:ext cx="10698480" cy="457200"/>
+          </a:xfrm>
+          <a:prstGeom prst="rect">
+            <a:avLst/>
+          </a:prstGeom>
+          <a:noFill/>
+        </p:spPr>
+        <p:txBody>
+          <a:bodyPr wrap="square">
+            <a:spAutoFit/>
+          </a:bodyPr>
+          <a:lstStyle/>
+          <a:p>
+            <a:pPr algn="l">
+              <a:defRPr sz="1800" b="1">
+                <a:solidFill>
+                  <a:srgbClr val="1E3A5F"/>
+                </a:solidFill>
+                <a:latin typeface="Segoe UI"/>
+              </a:defRPr>
+            </a:pPr>
+            <a:r>
+              <a:t>Imagine a sculptor starting with a rough block of marble...</a:t>
+            </a:r>
+          </a:p>
+        </p:txBody>
+      </p:sp>
+      <p:sp>
+        <p:nvSpPr>
+          <p:cNvPr id="8" name="TextBox 7"/>
+          <p:cNvSpPr txBox="1"/>
+          <p:nvPr/>
+        </p:nvSpPr>
+        <p:spPr>
+          <a:xfrm>
+            <a:off x="731520" y="2011680"/>
+            <a:ext cx="10698480" cy="457200"/>
+          </a:xfrm>
+          <a:prstGeom prst="rect">
+            <a:avLst/>
+          </a:prstGeom>
+          <a:noFill/>
+        </p:spPr>
+        <p:txBody>
+          <a:bodyPr wrap="square">
+            <a:spAutoFit/>
+          </a:bodyPr>
+          <a:lstStyle/>
+          <a:p>
+            <a:pPr algn="l">
+              <a:defRPr sz="1600" b="0">
+                <a:solidFill>
+                  <a:srgbClr val="424242"/>
+                </a:solidFill>
+                <a:latin typeface="Segoe UI"/>
+              </a:defRPr>
+            </a:pPr>
+            <a:r>
+              <a:t>They chip away noise until a beautiful statue appears. AI image models do the same with pixels!</a:t>
+            </a:r>
+          </a:p>
+        </p:txBody>
+      </p:sp>
+      <p:sp>
+        <p:nvSpPr>
+          <p:cNvPr id="9" name="Rounded Rectangle 8"/>
+          <p:cNvSpPr/>
+          <p:nvPr/>
+        </p:nvSpPr>
+        <p:spPr>
+          <a:xfrm>
+            <a:off x="548640" y="3017520"/>
+            <a:ext cx="2651760" cy="1188720"/>
+          </a:xfrm>
+          <a:prstGeom prst="roundRect">
+            <a:avLst/>
+          </a:prstGeom>
+          <a:solidFill>
+            <a:srgbClr val="424242"/>
+          </a:solidFill>
+          <a:ln>
+            <a:noFill/>
+          </a:ln>
+        </p:spPr>
+        <p:style>
+          <a:lnRef idx="1">
+            <a:schemeClr val="accent1"/>
+          </a:lnRef>
+          <a:fillRef idx="3">
+            <a:schemeClr val="accent1"/>
+          </a:fillRef>
+          <a:effectRef idx="2">
+            <a:schemeClr val="accent1"/>
+          </a:effectRef>
+          <a:fontRef idx="minor">
+            <a:schemeClr val="lt1"/>
+          </a:fontRef>
+        </p:style>
+        <p:txBody>
+          <a:bodyPr rtlCol="0" anchor="ctr" wrap="square"/>
+          <a:lstStyle/>
+          <a:p>
+            <a:pPr algn="ctr">
+              <a:spcBef>
+                <a:spcPts val="800"/>
+              </a:spcBef>
+              <a:defRPr sz="1400" b="1">
+                <a:solidFill>
+                  <a:srgbClr val="FFFFFF"/>
+                </a:solidFill>
+                <a:latin typeface="Segoe UI"/>
+              </a:defRPr>
+            </a:pPr>
+            <a:r>
+              <a:t>1. Start with</a:t>
+            </a:r>
+            <a:br/>
+            <a:r>
+              <a:t>Random Noise</a:t>
+            </a:r>
+          </a:p>
+        </p:txBody>
+      </p:sp>
+      <p:sp>
+        <p:nvSpPr>
+          <p:cNvPr id="10" name="Right Arrow 9"/>
+          <p:cNvSpPr/>
+          <p:nvPr/>
+        </p:nvSpPr>
+        <p:spPr>
+          <a:xfrm>
+            <a:off x="3291840" y="3474720"/>
+            <a:ext cx="457200" cy="274320"/>
+          </a:xfrm>
+          <a:prstGeom prst="rightArrow">
+            <a:avLst/>
+          </a:prstGeom>
+          <a:solidFill>
+            <a:srgbClr val="FF9933"/>
+          </a:solidFill>
+          <a:ln>
+            <a:noFill/>
+          </a:ln>
+        </p:spPr>
+        <p:style>
+          <a:lnRef idx="1">
+            <a:schemeClr val="accent1"/>
+          </a:lnRef>
+          <a:fillRef idx="3">
+            <a:schemeClr val="accent1"/>
+          </a:fillRef>
+          <a:effectRef idx="2">
+            <a:schemeClr val="accent1"/>
+          </a:effectRef>
+          <a:fontRef idx="minor">
+            <a:schemeClr val="lt1"/>
+          </a:fontRef>
+        </p:style>
+        <p:txBody>
+          <a:bodyPr rtlCol="0" anchor="ctr"/>
+          <a:lstStyle/>
+          <a:p>
+            <a:pPr algn="ctr"/>
+          </a:p>
+        </p:txBody>
+      </p:sp>
+      <p:sp>
+        <p:nvSpPr>
+          <p:cNvPr id="11" name="Rounded Rectangle 10"/>
+          <p:cNvSpPr/>
+          <p:nvPr/>
+        </p:nvSpPr>
+        <p:spPr>
+          <a:xfrm>
+            <a:off x="3474720" y="3017520"/>
+            <a:ext cx="2651760" cy="1188720"/>
+          </a:xfrm>
+          <a:prstGeom prst="roundRect">
+            <a:avLst/>
+          </a:prstGeom>
+          <a:solidFill>
+            <a:srgbClr val="2196F3"/>
+          </a:solidFill>
+          <a:ln>
+            <a:noFill/>
+          </a:ln>
+        </p:spPr>
+        <p:style>
+          <a:lnRef idx="1">
+            <a:schemeClr val="accent1"/>
+          </a:lnRef>
+          <a:fillRef idx="3">
+            <a:schemeClr val="accent1"/>
+          </a:fillRef>
+          <a:effectRef idx="2">
+            <a:schemeClr val="accent1"/>
+          </a:effectRef>
+          <a:fontRef idx="minor">
+            <a:schemeClr val="lt1"/>
+          </a:fontRef>
+        </p:style>
+        <p:txBody>
+          <a:bodyPr rtlCol="0" anchor="ctr" wrap="square"/>
+          <a:lstStyle/>
+          <a:p>
+            <a:pPr algn="ctr">
+              <a:spcBef>
+                <a:spcPts val="800"/>
+              </a:spcBef>
+              <a:defRPr sz="1400" b="1">
+                <a:solidFill>
+                  <a:srgbClr val="FFFFFF"/>
+                </a:solidFill>
+                <a:latin typeface="Segoe UI"/>
+              </a:defRPr>
+            </a:pPr>
+            <a:r>
+              <a:t>2. AI Removes Noise</a:t>
+            </a:r>
+            <a:br/>
+            <a:r>
+              <a:t>(Many Steps)</a:t>
+            </a:r>
+          </a:p>
+        </p:txBody>
+      </p:sp>
+      <p:sp>
+        <p:nvSpPr>
+          <p:cNvPr id="12" name="Right Arrow 11"/>
+          <p:cNvSpPr/>
+          <p:nvPr/>
+        </p:nvSpPr>
+        <p:spPr>
+          <a:xfrm>
+            <a:off x="6217920" y="3474720"/>
+            <a:ext cx="457200" cy="274320"/>
+          </a:xfrm>
+          <a:prstGeom prst="rightArrow">
+            <a:avLst/>
+          </a:prstGeom>
+          <a:solidFill>
+            <a:srgbClr val="FF9933"/>
+          </a:solidFill>
+          <a:ln>
+            <a:noFill/>
+          </a:ln>
+        </p:spPr>
+        <p:style>
+          <a:lnRef idx="1">
+            <a:schemeClr val="accent1"/>
+          </a:lnRef>
+          <a:fillRef idx="3">
+            <a:schemeClr val="accent1"/>
+          </a:fillRef>
+          <a:effectRef idx="2">
+            <a:schemeClr val="accent1"/>
+          </a:effectRef>
+          <a:fontRef idx="minor">
+            <a:schemeClr val="lt1"/>
+          </a:fontRef>
+        </p:style>
+        <p:txBody>
+          <a:bodyPr rtlCol="0" anchor="ctr"/>
+          <a:lstStyle/>
+          <a:p>
+            <a:pPr algn="ctr"/>
+          </a:p>
+        </p:txBody>
+      </p:sp>
+      <p:sp>
+        <p:nvSpPr>
+          <p:cNvPr id="13" name="Rounded Rectangle 12"/>
+          <p:cNvSpPr/>
+          <p:nvPr/>
+        </p:nvSpPr>
+        <p:spPr>
+          <a:xfrm>
+            <a:off x="6400800" y="3017520"/>
+            <a:ext cx="2651760" cy="1188720"/>
           </a:xfrm>
           <a:prstGeom prst="roundRect">
             <a:avLst/>
@@ -9283,7 +10325,7 @@
               <a:spcBef>
                 <a:spcPts val="800"/>
               </a:spcBef>
-              <a:defRPr sz="1600" b="1">
+              <a:defRPr sz="1400" b="1">
                 <a:solidFill>
                   <a:srgbClr val="FFFFFF"/>
                 </a:solidFill>
@@ -9291,63 +10333,27 @@
               </a:defRPr>
             </a:pPr>
             <a:r>
-              <a:t>Your Prompt</a:t>
-            </a:r>
-          </a:p>
-        </p:txBody>
-      </p:sp>
-      <p:sp>
-        <p:nvSpPr>
-          <p:cNvPr id="6" name="TextBox 5"/>
-          <p:cNvSpPr txBox="1"/>
-          <p:nvPr/>
-        </p:nvSpPr>
-        <p:spPr>
-          <a:xfrm>
-            <a:off x="3931920" y="1645920"/>
-            <a:ext cx="7315200" cy="731520"/>
-          </a:xfrm>
-          <a:prstGeom prst="rect">
-            <a:avLst/>
-          </a:prstGeom>
-          <a:noFill/>
-        </p:spPr>
-        <p:txBody>
-          <a:bodyPr wrap="square">
-            <a:spAutoFit/>
-          </a:bodyPr>
-          <a:lstStyle/>
-          <a:p>
-            <a:pPr algn="l">
-              <a:defRPr sz="1500" b="0">
-                <a:solidFill>
-                  <a:srgbClr val="424242"/>
-                </a:solidFill>
-                <a:latin typeface="Segoe UI"/>
-              </a:defRPr>
-            </a:pPr>
-            <a:r>
-              <a:t>A dragon reading</a:t>
+              <a:t>3. Text Prompt</a:t>
             </a:r>
             <a:br/>
             <a:r>
-              <a:t>a book in a library</a:t>
-            </a:r>
-          </a:p>
-        </p:txBody>
-      </p:sp>
-      <p:sp>
-        <p:nvSpPr>
-          <p:cNvPr id="7" name="Down Arrow 6"/>
+              <a:t>Guides the Shape</a:t>
+            </a:r>
+          </a:p>
+        </p:txBody>
+      </p:sp>
+      <p:sp>
+        <p:nvSpPr>
+          <p:cNvPr id="14" name="Right Arrow 13"/>
           <p:cNvSpPr/>
           <p:nvPr/>
         </p:nvSpPr>
         <p:spPr>
           <a:xfrm>
-            <a:off x="2103120" y="2423160"/>
-            <a:ext cx="365760" cy="228600"/>
-          </a:xfrm>
-          <a:prstGeom prst="downArrow">
+            <a:off x="9144000" y="3474720"/>
+            <a:ext cx="457200" cy="274320"/>
+          </a:xfrm>
+          <a:prstGeom prst="rightArrow">
             <a:avLst/>
           </a:prstGeom>
           <a:solidFill>
@@ -9381,292 +10387,14 @@
       </p:sp>
       <p:sp>
         <p:nvSpPr>
-          <p:cNvPr id="8" name="Rounded Rectangle 7"/>
+          <p:cNvPr id="15" name="Rounded Rectangle 14"/>
           <p:cNvSpPr/>
           <p:nvPr/>
         </p:nvSpPr>
         <p:spPr>
           <a:xfrm>
-            <a:off x="914400" y="2743200"/>
-            <a:ext cx="2743200" cy="822960"/>
-          </a:xfrm>
-          <a:prstGeom prst="roundRect">
-            <a:avLst/>
-          </a:prstGeom>
-          <a:solidFill>
-            <a:srgbClr val="3467A6"/>
-          </a:solidFill>
-          <a:ln>
-            <a:noFill/>
-          </a:ln>
-        </p:spPr>
-        <p:style>
-          <a:lnRef idx="1">
-            <a:schemeClr val="accent1"/>
-          </a:lnRef>
-          <a:fillRef idx="3">
-            <a:schemeClr val="accent1"/>
-          </a:fillRef>
-          <a:effectRef idx="2">
-            <a:schemeClr val="accent1"/>
-          </a:effectRef>
-          <a:fontRef idx="minor">
-            <a:schemeClr val="lt1"/>
-          </a:fontRef>
-        </p:style>
-        <p:txBody>
-          <a:bodyPr rtlCol="0" anchor="ctr" wrap="square"/>
-          <a:lstStyle/>
-          <a:p>
-            <a:pPr algn="ctr">
-              <a:spcBef>
-                <a:spcPts val="800"/>
-              </a:spcBef>
-              <a:defRPr sz="1600" b="1">
-                <a:solidFill>
-                  <a:srgbClr val="FFFFFF"/>
-                </a:solidFill>
-                <a:latin typeface="Segoe UI"/>
-              </a:defRPr>
-            </a:pPr>
-            <a:r>
-              <a:t>Text Encoder</a:t>
-            </a:r>
-          </a:p>
-        </p:txBody>
-      </p:sp>
-      <p:sp>
-        <p:nvSpPr>
-          <p:cNvPr id="9" name="TextBox 8"/>
-          <p:cNvSpPr txBox="1"/>
-          <p:nvPr/>
-        </p:nvSpPr>
-        <p:spPr>
-          <a:xfrm>
-            <a:off x="3931920" y="2834640"/>
-            <a:ext cx="7315200" cy="731520"/>
-          </a:xfrm>
-          <a:prstGeom prst="rect">
-            <a:avLst/>
-          </a:prstGeom>
-          <a:noFill/>
-        </p:spPr>
-        <p:txBody>
-          <a:bodyPr wrap="square">
-            <a:spAutoFit/>
-          </a:bodyPr>
-          <a:lstStyle/>
-          <a:p>
-            <a:pPr algn="l">
-              <a:defRPr sz="1500" b="0">
-                <a:solidFill>
-                  <a:srgbClr val="424242"/>
-                </a:solidFill>
-                <a:latin typeface="Segoe UI"/>
-              </a:defRPr>
-            </a:pPr>
-            <a:r>
-              <a:t>Converts words into</a:t>
-            </a:r>
-            <a:br/>
-            <a:r>
-              <a:t>numbers AI understands</a:t>
-            </a:r>
-          </a:p>
-        </p:txBody>
-      </p:sp>
-      <p:sp>
-        <p:nvSpPr>
-          <p:cNvPr id="10" name="Down Arrow 9"/>
-          <p:cNvSpPr/>
-          <p:nvPr/>
-        </p:nvSpPr>
-        <p:spPr>
-          <a:xfrm>
-            <a:off x="2103120" y="3611880"/>
-            <a:ext cx="365760" cy="228600"/>
-          </a:xfrm>
-          <a:prstGeom prst="downArrow">
-            <a:avLst/>
-          </a:prstGeom>
-          <a:solidFill>
-            <a:srgbClr val="FF9933"/>
-          </a:solidFill>
-          <a:ln>
-            <a:noFill/>
-          </a:ln>
-        </p:spPr>
-        <p:style>
-          <a:lnRef idx="1">
-            <a:schemeClr val="accent1"/>
-          </a:lnRef>
-          <a:fillRef idx="3">
-            <a:schemeClr val="accent1"/>
-          </a:fillRef>
-          <a:effectRef idx="2">
-            <a:schemeClr val="accent1"/>
-          </a:effectRef>
-          <a:fontRef idx="minor">
-            <a:schemeClr val="lt1"/>
-          </a:fontRef>
-        </p:style>
-        <p:txBody>
-          <a:bodyPr rtlCol="0" anchor="ctr"/>
-          <a:lstStyle/>
-          <a:p>
-            <a:pPr algn="ctr"/>
-          </a:p>
-        </p:txBody>
-      </p:sp>
-      <p:sp>
-        <p:nvSpPr>
-          <p:cNvPr id="11" name="Rounded Rectangle 10"/>
-          <p:cNvSpPr/>
-          <p:nvPr/>
-        </p:nvSpPr>
-        <p:spPr>
-          <a:xfrm>
-            <a:off x="914400" y="3931920"/>
-            <a:ext cx="2743200" cy="822960"/>
-          </a:xfrm>
-          <a:prstGeom prst="roundRect">
-            <a:avLst/>
-          </a:prstGeom>
-          <a:solidFill>
-            <a:srgbClr val="2196F3"/>
-          </a:solidFill>
-          <a:ln>
-            <a:noFill/>
-          </a:ln>
-        </p:spPr>
-        <p:style>
-          <a:lnRef idx="1">
-            <a:schemeClr val="accent1"/>
-          </a:lnRef>
-          <a:fillRef idx="3">
-            <a:schemeClr val="accent1"/>
-          </a:fillRef>
-          <a:effectRef idx="2">
-            <a:schemeClr val="accent1"/>
-          </a:effectRef>
-          <a:fontRef idx="minor">
-            <a:schemeClr val="lt1"/>
-          </a:fontRef>
-        </p:style>
-        <p:txBody>
-          <a:bodyPr rtlCol="0" anchor="ctr" wrap="square"/>
-          <a:lstStyle/>
-          <a:p>
-            <a:pPr algn="ctr">
-              <a:spcBef>
-                <a:spcPts val="800"/>
-              </a:spcBef>
-              <a:defRPr sz="1600" b="1">
-                <a:solidFill>
-                  <a:srgbClr val="FFFFFF"/>
-                </a:solidFill>
-                <a:latin typeface="Segoe UI"/>
-              </a:defRPr>
-            </a:pPr>
-            <a:r>
-              <a:t>Diffusion Model</a:t>
-            </a:r>
-          </a:p>
-        </p:txBody>
-      </p:sp>
-      <p:sp>
-        <p:nvSpPr>
-          <p:cNvPr id="12" name="TextBox 11"/>
-          <p:cNvSpPr txBox="1"/>
-          <p:nvPr/>
-        </p:nvSpPr>
-        <p:spPr>
-          <a:xfrm>
-            <a:off x="3931920" y="4023359"/>
-            <a:ext cx="7315200" cy="731520"/>
-          </a:xfrm>
-          <a:prstGeom prst="rect">
-            <a:avLst/>
-          </a:prstGeom>
-          <a:noFill/>
-        </p:spPr>
-        <p:txBody>
-          <a:bodyPr wrap="square">
-            <a:spAutoFit/>
-          </a:bodyPr>
-          <a:lstStyle/>
-          <a:p>
-            <a:pPr algn="l">
-              <a:defRPr sz="1500" b="0">
-                <a:solidFill>
-                  <a:srgbClr val="424242"/>
-                </a:solidFill>
-                <a:latin typeface="Segoe UI"/>
-              </a:defRPr>
-            </a:pPr>
-            <a:r>
-              <a:t>Removes noise step</a:t>
-            </a:r>
-            <a:br/>
-            <a:r>
-              <a:t>by step (50-100 steps)</a:t>
-            </a:r>
-          </a:p>
-        </p:txBody>
-      </p:sp>
-      <p:sp>
-        <p:nvSpPr>
-          <p:cNvPr id="13" name="Down Arrow 12"/>
-          <p:cNvSpPr/>
-          <p:nvPr/>
-        </p:nvSpPr>
-        <p:spPr>
-          <a:xfrm>
-            <a:off x="2103120" y="4800600"/>
-            <a:ext cx="365760" cy="228600"/>
-          </a:xfrm>
-          <a:prstGeom prst="downArrow">
-            <a:avLst/>
-          </a:prstGeom>
-          <a:solidFill>
-            <a:srgbClr val="FF9933"/>
-          </a:solidFill>
-          <a:ln>
-            <a:noFill/>
-          </a:ln>
-        </p:spPr>
-        <p:style>
-          <a:lnRef idx="1">
-            <a:schemeClr val="accent1"/>
-          </a:lnRef>
-          <a:fillRef idx="3">
-            <a:schemeClr val="accent1"/>
-          </a:fillRef>
-          <a:effectRef idx="2">
-            <a:schemeClr val="accent1"/>
-          </a:effectRef>
-          <a:fontRef idx="minor">
-            <a:schemeClr val="lt1"/>
-          </a:fontRef>
-        </p:style>
-        <p:txBody>
-          <a:bodyPr rtlCol="0" anchor="ctr"/>
-          <a:lstStyle/>
-          <a:p>
-            <a:pPr algn="ctr"/>
-          </a:p>
-        </p:txBody>
-      </p:sp>
-      <p:sp>
-        <p:nvSpPr>
-          <p:cNvPr id="14" name="Rounded Rectangle 13"/>
-          <p:cNvSpPr/>
-          <p:nvPr/>
-        </p:nvSpPr>
-        <p:spPr>
-          <a:xfrm>
-            <a:off x="914400" y="5120640"/>
-            <a:ext cx="2743200" cy="822960"/>
+            <a:off x="9326880" y="3017520"/>
+            <a:ext cx="2651760" cy="1188720"/>
           </a:xfrm>
           <a:prstGeom prst="roundRect">
             <a:avLst/>
@@ -9700,7 +10428,7 @@
               <a:spcBef>
                 <a:spcPts val="800"/>
               </a:spcBef>
-              <a:defRPr sz="1600" b="1">
+              <a:defRPr sz="1400" b="1">
                 <a:solidFill>
                   <a:srgbClr val="FFFFFF"/>
                 </a:solidFill>
@@ -9708,83 +10436,67 @@
               </a:defRPr>
             </a:pPr>
             <a:r>
-              <a:t>Final Image</a:t>
-            </a:r>
-          </a:p>
-        </p:txBody>
-      </p:sp>
-      <p:sp>
-        <p:nvSpPr>
-          <p:cNvPr id="15" name="TextBox 14"/>
-          <p:cNvSpPr txBox="1"/>
-          <p:nvPr/>
-        </p:nvSpPr>
-        <p:spPr>
-          <a:xfrm>
-            <a:off x="3931920" y="5212080"/>
-            <a:ext cx="7315200" cy="731520"/>
-          </a:xfrm>
-          <a:prstGeom prst="rect">
-            <a:avLst/>
-          </a:prstGeom>
-          <a:noFill/>
-        </p:spPr>
-        <p:txBody>
-          <a:bodyPr wrap="square">
-            <a:spAutoFit/>
-          </a:bodyPr>
-          <a:lstStyle/>
-          <a:p>
-            <a:pPr algn="l">
-              <a:defRPr sz="1500" b="0">
-                <a:solidFill>
-                  <a:srgbClr val="424242"/>
-                </a:solidFill>
-                <a:latin typeface="Segoe UI"/>
-              </a:defRPr>
-            </a:pPr>
-            <a:r>
-              <a:t>A brand new picture</a:t>
+              <a:t>4. Final Image</a:t>
             </a:r>
             <a:br/>
             <a:r>
-              <a:t>that never existed!</a:t>
-            </a:r>
-          </a:p>
-        </p:txBody>
-      </p:sp>
-      <p:sp>
-        <p:nvSpPr>
-          <p:cNvPr id="16" name="TextBox 15"/>
-          <p:cNvSpPr txBox="1"/>
-          <p:nvPr/>
-        </p:nvSpPr>
-        <p:spPr>
-          <a:xfrm>
-            <a:off x="914400" y="5943600"/>
-            <a:ext cx="10058400" cy="457200"/>
-          </a:xfrm>
-          <a:prstGeom prst="rect">
-            <a:avLst/>
-          </a:prstGeom>
-          <a:noFill/>
-        </p:spPr>
-        <p:txBody>
-          <a:bodyPr wrap="square">
-            <a:spAutoFit/>
-          </a:bodyPr>
-          <a:lstStyle/>
-          <a:p>
-            <a:pPr algn="l">
-              <a:defRPr sz="1400" b="1">
-                <a:solidFill>
-                  <a:srgbClr val="1E3A5F"/>
-                </a:solidFill>
-                <a:latin typeface="Segoe UI"/>
-              </a:defRPr>
-            </a:pPr>
-            <a:r>
-              <a:t>Key: The image is NOT copied from anywhere. It's generated from learned patterns!</a:t>
+              <a:t>Appears!</a:t>
+            </a:r>
+          </a:p>
+        </p:txBody>
+      </p:sp>
+      <p:sp>
+        <p:nvSpPr>
+          <p:cNvPr id="16" name="Rounded Rectangle 15"/>
+          <p:cNvSpPr/>
+          <p:nvPr/>
+        </p:nvSpPr>
+        <p:spPr>
+          <a:xfrm>
+            <a:off x="914400" y="5760720"/>
+            <a:ext cx="10360152" cy="640080"/>
+          </a:xfrm>
+          <a:prstGeom prst="roundRect">
+            <a:avLst/>
+          </a:prstGeom>
+          <a:solidFill>
+            <a:srgbClr val="1E3A5F"/>
+          </a:solidFill>
+          <a:ln>
+            <a:noFill/>
+          </a:ln>
+        </p:spPr>
+        <p:style>
+          <a:lnRef idx="1">
+            <a:schemeClr val="accent1"/>
+          </a:lnRef>
+          <a:fillRef idx="3">
+            <a:schemeClr val="accent1"/>
+          </a:fillRef>
+          <a:effectRef idx="2">
+            <a:schemeClr val="accent1"/>
+          </a:effectRef>
+          <a:fontRef idx="minor">
+            <a:schemeClr val="lt1"/>
+          </a:fontRef>
+        </p:style>
+        <p:txBody>
+          <a:bodyPr rtlCol="0" anchor="ctr" wrap="square"/>
+          <a:lstStyle/>
+          <a:p>
+            <a:pPr algn="ctr">
+              <a:spcBef>
+                <a:spcPts val="800"/>
+              </a:spcBef>
+              <a:defRPr sz="1800" b="1">
+                <a:solidFill>
+                  <a:srgbClr val="FFFFFF"/>
+                </a:solidFill>
+                <a:latin typeface="Segoe UI"/>
+              </a:defRPr>
+            </a:pPr>
+            <a:r>
+              <a:t>Diffusion = Start with noise, subtract it step by step, guided by your text prompt</a:t>
             </a:r>
           </a:p>
         </p:txBody>
@@ -9881,7 +10593,7 @@
               </a:defRPr>
             </a:pPr>
             <a:r>
-              <a:t>Multimodal AI: Beyond Just Text</a:t>
+              <a:t>Text-to-Image: Step by Step</a:t>
             </a:r>
           </a:p>
         </p:txBody>
@@ -9931,14 +10643,70 @@
       </p:sp>
       <p:sp>
         <p:nvSpPr>
-          <p:cNvPr id="5" name="TextBox 4"/>
+          <p:cNvPr id="5" name="Rounded Rectangle 4"/>
+          <p:cNvSpPr/>
+          <p:nvPr/>
+        </p:nvSpPr>
+        <p:spPr>
+          <a:xfrm>
+            <a:off x="914400" y="1554480"/>
+            <a:ext cx="2743200" cy="822960"/>
+          </a:xfrm>
+          <a:prstGeom prst="roundRect">
+            <a:avLst/>
+          </a:prstGeom>
+          <a:solidFill>
+            <a:srgbClr val="FFB300"/>
+          </a:solidFill>
+          <a:ln>
+            <a:noFill/>
+          </a:ln>
+        </p:spPr>
+        <p:style>
+          <a:lnRef idx="1">
+            <a:schemeClr val="accent1"/>
+          </a:lnRef>
+          <a:fillRef idx="3">
+            <a:schemeClr val="accent1"/>
+          </a:fillRef>
+          <a:effectRef idx="2">
+            <a:schemeClr val="accent1"/>
+          </a:effectRef>
+          <a:fontRef idx="minor">
+            <a:schemeClr val="lt1"/>
+          </a:fontRef>
+        </p:style>
+        <p:txBody>
+          <a:bodyPr rtlCol="0" anchor="ctr" wrap="square"/>
+          <a:lstStyle/>
+          <a:p>
+            <a:pPr algn="ctr">
+              <a:spcBef>
+                <a:spcPts val="800"/>
+              </a:spcBef>
+              <a:defRPr sz="1600" b="1">
+                <a:solidFill>
+                  <a:srgbClr val="FFFFFF"/>
+                </a:solidFill>
+                <a:latin typeface="Segoe UI"/>
+              </a:defRPr>
+            </a:pPr>
+            <a:r>
+              <a:t>Your Prompt</a:t>
+            </a:r>
+          </a:p>
+        </p:txBody>
+      </p:sp>
+      <p:sp>
+        <p:nvSpPr>
+          <p:cNvPr id="6" name="TextBox 5"/>
           <p:cNvSpPr txBox="1"/>
           <p:nvPr/>
         </p:nvSpPr>
         <p:spPr>
           <a:xfrm>
-            <a:off x="457200" y="1463040"/>
-            <a:ext cx="11430000" cy="457200"/>
+            <a:off x="3931920" y="1645920"/>
+            <a:ext cx="7315200" cy="731520"/>
           </a:xfrm>
           <a:prstGeom prst="rect">
             <a:avLst/>
@@ -9951,8 +10719,8 @@
           </a:bodyPr>
           <a:lstStyle/>
           <a:p>
-            <a:pPr algn="ctr">
-              <a:defRPr sz="1800" b="1">
+            <a:pPr algn="l">
+              <a:defRPr sz="1500" b="0">
                 <a:solidFill>
                   <a:srgbClr val="424242"/>
                 </a:solidFill>
@@ -9960,23 +10728,70 @@
               </a:defRPr>
             </a:pPr>
             <a:r>
-              <a:t>Multimodal = AI that understands AND generates MULTIPLE types of data</a:t>
-            </a:r>
-          </a:p>
-        </p:txBody>
-      </p:sp>
-      <p:sp>
-        <p:nvSpPr>
-          <p:cNvPr id="6" name="Oval 5"/>
+              <a:t>A dragon reading</a:t>
+            </a:r>
+            <a:br/>
+            <a:r>
+              <a:t>a book in a library</a:t>
+            </a:r>
+          </a:p>
+        </p:txBody>
+      </p:sp>
+      <p:sp>
+        <p:nvSpPr>
+          <p:cNvPr id="7" name="Down Arrow 6"/>
           <p:cNvSpPr/>
           <p:nvPr/>
         </p:nvSpPr>
         <p:spPr>
           <a:xfrm>
-            <a:off x="1280160" y="2194560"/>
-            <a:ext cx="1371600" cy="1371600"/>
-          </a:xfrm>
-          <a:prstGeom prst="ellipse">
+            <a:off x="2103120" y="2423160"/>
+            <a:ext cx="365760" cy="228600"/>
+          </a:xfrm>
+          <a:prstGeom prst="downArrow">
+            <a:avLst/>
+          </a:prstGeom>
+          <a:solidFill>
+            <a:srgbClr val="FF9933"/>
+          </a:solidFill>
+          <a:ln>
+            <a:noFill/>
+          </a:ln>
+        </p:spPr>
+        <p:style>
+          <a:lnRef idx="1">
+            <a:schemeClr val="accent1"/>
+          </a:lnRef>
+          <a:fillRef idx="3">
+            <a:schemeClr val="accent1"/>
+          </a:fillRef>
+          <a:effectRef idx="2">
+            <a:schemeClr val="accent1"/>
+          </a:effectRef>
+          <a:fontRef idx="minor">
+            <a:schemeClr val="lt1"/>
+          </a:fontRef>
+        </p:style>
+        <p:txBody>
+          <a:bodyPr rtlCol="0" anchor="ctr"/>
+          <a:lstStyle/>
+          <a:p>
+            <a:pPr algn="ctr"/>
+          </a:p>
+        </p:txBody>
+      </p:sp>
+      <p:sp>
+        <p:nvSpPr>
+          <p:cNvPr id="8" name="Rounded Rectangle 7"/>
+          <p:cNvSpPr/>
+          <p:nvPr/>
+        </p:nvSpPr>
+        <p:spPr>
+          <a:xfrm>
+            <a:off x="914400" y="2743200"/>
+            <a:ext cx="2743200" cy="822960"/>
+          </a:xfrm>
+          <a:prstGeom prst="roundRect">
             <a:avLst/>
           </a:prstGeom>
           <a:solidFill>
@@ -10005,6 +10820,9 @@
           <a:lstStyle/>
           <a:p>
             <a:pPr algn="ctr">
+              <a:spcBef>
+                <a:spcPts val="800"/>
+              </a:spcBef>
               <a:defRPr sz="1600" b="1">
                 <a:solidFill>
                   <a:srgbClr val="FFFFFF"/>
@@ -10013,21 +10831,21 @@
               </a:defRPr>
             </a:pPr>
             <a:r>
-              <a:t>Text</a:t>
-            </a:r>
-          </a:p>
-        </p:txBody>
-      </p:sp>
-      <p:sp>
-        <p:nvSpPr>
-          <p:cNvPr id="7" name="TextBox 6"/>
+              <a:t>Text Encoder</a:t>
+            </a:r>
+          </a:p>
+        </p:txBody>
+      </p:sp>
+      <p:sp>
+        <p:nvSpPr>
+          <p:cNvPr id="9" name="TextBox 8"/>
           <p:cNvSpPr txBox="1"/>
           <p:nvPr/>
         </p:nvSpPr>
         <p:spPr>
           <a:xfrm>
-            <a:off x="731520" y="3749039"/>
-            <a:ext cx="2560320" cy="548640"/>
+            <a:off x="3931920" y="2834640"/>
+            <a:ext cx="7315200" cy="731520"/>
           </a:xfrm>
           <a:prstGeom prst="rect">
             <a:avLst/>
@@ -10040,8 +10858,8 @@
           </a:bodyPr>
           <a:lstStyle/>
           <a:p>
-            <a:pPr algn="ctr">
-              <a:defRPr sz="1300" b="0">
+            <a:pPr algn="l">
+              <a:defRPr sz="1500" b="0">
                 <a:solidFill>
                   <a:srgbClr val="424242"/>
                 </a:solidFill>
@@ -10049,31 +10867,31 @@
               </a:defRPr>
             </a:pPr>
             <a:r>
-              <a:t>Read &amp; write</a:t>
+              <a:t>Converts words into</a:t>
             </a:r>
             <a:br/>
             <a:r>
-              <a:t>words</a:t>
-            </a:r>
-          </a:p>
-        </p:txBody>
-      </p:sp>
-      <p:sp>
-        <p:nvSpPr>
-          <p:cNvPr id="8" name="Oval 7"/>
+              <a:t>numbers AI understands</a:t>
+            </a:r>
+          </a:p>
+        </p:txBody>
+      </p:sp>
+      <p:sp>
+        <p:nvSpPr>
+          <p:cNvPr id="10" name="Down Arrow 9"/>
           <p:cNvSpPr/>
           <p:nvPr/>
         </p:nvSpPr>
         <p:spPr>
           <a:xfrm>
-            <a:off x="4206240" y="2194560"/>
-            <a:ext cx="1371600" cy="1371600"/>
-          </a:xfrm>
-          <a:prstGeom prst="ellipse">
+            <a:off x="2103120" y="3611880"/>
+            <a:ext cx="365760" cy="228600"/>
+          </a:xfrm>
+          <a:prstGeom prst="downArrow">
             <a:avLst/>
           </a:prstGeom>
           <a:solidFill>
-            <a:srgbClr val="7E57C2"/>
+            <a:srgbClr val="FF9933"/>
           </a:solidFill>
           <a:ln>
             <a:noFill/>
@@ -10094,79 +10912,29 @@
           </a:fontRef>
         </p:style>
         <p:txBody>
-          <a:bodyPr rtlCol="0" anchor="ctr" wrap="square"/>
-          <a:lstStyle/>
-          <a:p>
-            <a:pPr algn="ctr">
-              <a:defRPr sz="1600" b="1">
-                <a:solidFill>
-                  <a:srgbClr val="FFFFFF"/>
-                </a:solidFill>
-                <a:latin typeface="Segoe UI"/>
-              </a:defRPr>
-            </a:pPr>
-            <a:r>
-              <a:t>Images</a:t>
-            </a:r>
-          </a:p>
-        </p:txBody>
-      </p:sp>
-      <p:sp>
-        <p:nvSpPr>
-          <p:cNvPr id="9" name="TextBox 8"/>
-          <p:cNvSpPr txBox="1"/>
-          <p:nvPr/>
-        </p:nvSpPr>
-        <p:spPr>
-          <a:xfrm>
-            <a:off x="3657600" y="3749039"/>
-            <a:ext cx="2560320" cy="548640"/>
-          </a:xfrm>
-          <a:prstGeom prst="rect">
-            <a:avLst/>
-          </a:prstGeom>
-          <a:noFill/>
-        </p:spPr>
-        <p:txBody>
-          <a:bodyPr wrap="square">
-            <a:spAutoFit/>
-          </a:bodyPr>
-          <a:lstStyle/>
-          <a:p>
-            <a:pPr algn="ctr">
-              <a:defRPr sz="1300" b="0">
-                <a:solidFill>
-                  <a:srgbClr val="424242"/>
-                </a:solidFill>
-                <a:latin typeface="Segoe UI"/>
-              </a:defRPr>
-            </a:pPr>
-            <a:r>
-              <a:t>See &amp; create</a:t>
-            </a:r>
-            <a:br/>
-            <a:r>
-              <a:t>pictures</a:t>
-            </a:r>
-          </a:p>
-        </p:txBody>
-      </p:sp>
-      <p:sp>
-        <p:nvSpPr>
-          <p:cNvPr id="10" name="Oval 9"/>
+          <a:bodyPr rtlCol="0" anchor="ctr"/>
+          <a:lstStyle/>
+          <a:p>
+            <a:pPr algn="ctr"/>
+          </a:p>
+        </p:txBody>
+      </p:sp>
+      <p:sp>
+        <p:nvSpPr>
+          <p:cNvPr id="11" name="Rounded Rectangle 10"/>
           <p:cNvSpPr/>
           <p:nvPr/>
         </p:nvSpPr>
         <p:spPr>
           <a:xfrm>
-            <a:off x="7132320" y="2194560"/>
-            <a:ext cx="1371600" cy="1371600"/>
-          </a:xfrm>
-          <a:prstGeom prst="ellipse">
+            <a:off x="914400" y="3931920"/>
+            <a:ext cx="2743200" cy="822960"/>
+          </a:xfrm>
+          <a:prstGeom prst="roundRect">
             <a:avLst/>
           </a:prstGeom>
           <a:solidFill>
-            <a:srgbClr val="009688"/>
+            <a:srgbClr val="2196F3"/>
           </a:solidFill>
           <a:ln>
             <a:noFill/>
@@ -10191,6 +10959,9 @@
           <a:lstStyle/>
           <a:p>
             <a:pPr algn="ctr">
+              <a:spcBef>
+                <a:spcPts val="800"/>
+              </a:spcBef>
               <a:defRPr sz="1600" b="1">
                 <a:solidFill>
                   <a:srgbClr val="FFFFFF"/>
@@ -10199,21 +10970,21 @@
               </a:defRPr>
             </a:pPr>
             <a:r>
-              <a:t>Audio</a:t>
-            </a:r>
-          </a:p>
-        </p:txBody>
-      </p:sp>
-      <p:sp>
-        <p:nvSpPr>
-          <p:cNvPr id="11" name="TextBox 10"/>
+              <a:t>Diffusion Model</a:t>
+            </a:r>
+          </a:p>
+        </p:txBody>
+      </p:sp>
+      <p:sp>
+        <p:nvSpPr>
+          <p:cNvPr id="12" name="TextBox 11"/>
           <p:cNvSpPr txBox="1"/>
           <p:nvPr/>
         </p:nvSpPr>
         <p:spPr>
           <a:xfrm>
-            <a:off x="6583680" y="3749039"/>
-            <a:ext cx="2560320" cy="548640"/>
+            <a:off x="3931920" y="4023359"/>
+            <a:ext cx="7315200" cy="731520"/>
           </a:xfrm>
           <a:prstGeom prst="rect">
             <a:avLst/>
@@ -10226,8 +10997,8 @@
           </a:bodyPr>
           <a:lstStyle/>
           <a:p>
-            <a:pPr algn="ctr">
-              <a:defRPr sz="1300" b="0">
+            <a:pPr algn="l">
+              <a:defRPr sz="1500" b="0">
                 <a:solidFill>
                   <a:srgbClr val="424242"/>
                 </a:solidFill>
@@ -10235,31 +11006,31 @@
               </a:defRPr>
             </a:pPr>
             <a:r>
-              <a:t>Hear &amp; speak</a:t>
+              <a:t>Removes noise step</a:t>
             </a:r>
             <a:br/>
             <a:r>
-              <a:t>(voice)</a:t>
-            </a:r>
-          </a:p>
-        </p:txBody>
-      </p:sp>
-      <p:sp>
-        <p:nvSpPr>
-          <p:cNvPr id="12" name="Oval 11"/>
+              <a:t>by step (50-100 steps)</a:t>
+            </a:r>
+          </a:p>
+        </p:txBody>
+      </p:sp>
+      <p:sp>
+        <p:nvSpPr>
+          <p:cNvPr id="13" name="Down Arrow 12"/>
           <p:cNvSpPr/>
           <p:nvPr/>
         </p:nvSpPr>
         <p:spPr>
           <a:xfrm>
-            <a:off x="10058400" y="2194560"/>
-            <a:ext cx="1371600" cy="1371600"/>
-          </a:xfrm>
-          <a:prstGeom prst="ellipse">
+            <a:off x="2103120" y="4800600"/>
+            <a:ext cx="365760" cy="228600"/>
+          </a:xfrm>
+          <a:prstGeom prst="downArrow">
             <a:avLst/>
           </a:prstGeom>
           <a:solidFill>
-            <a:srgbClr val="EC407A"/>
+            <a:srgbClr val="FF9933"/>
           </a:solidFill>
           <a:ln>
             <a:noFill/>
@@ -10280,60 +11051,10 @@
           </a:fontRef>
         </p:style>
         <p:txBody>
-          <a:bodyPr rtlCol="0" anchor="ctr" wrap="square"/>
-          <a:lstStyle/>
-          <a:p>
-            <a:pPr algn="ctr">
-              <a:defRPr sz="1600" b="1">
-                <a:solidFill>
-                  <a:srgbClr val="FFFFFF"/>
-                </a:solidFill>
-                <a:latin typeface="Segoe UI"/>
-              </a:defRPr>
-            </a:pPr>
-            <a:r>
-              <a:t>Video</a:t>
-            </a:r>
-          </a:p>
-        </p:txBody>
-      </p:sp>
-      <p:sp>
-        <p:nvSpPr>
-          <p:cNvPr id="13" name="TextBox 12"/>
-          <p:cNvSpPr txBox="1"/>
-          <p:nvPr/>
-        </p:nvSpPr>
-        <p:spPr>
-          <a:xfrm>
-            <a:off x="9509760" y="3749039"/>
-            <a:ext cx="2560320" cy="548640"/>
-          </a:xfrm>
-          <a:prstGeom prst="rect">
-            <a:avLst/>
-          </a:prstGeom>
-          <a:noFill/>
-        </p:spPr>
-        <p:txBody>
-          <a:bodyPr wrap="square">
-            <a:spAutoFit/>
-          </a:bodyPr>
-          <a:lstStyle/>
-          <a:p>
-            <a:pPr algn="ctr">
-              <a:defRPr sz="1300" b="0">
-                <a:solidFill>
-                  <a:srgbClr val="424242"/>
-                </a:solidFill>
-                <a:latin typeface="Segoe UI"/>
-              </a:defRPr>
-            </a:pPr>
-            <a:r>
-              <a:t>Watch &amp; make</a:t>
-            </a:r>
-            <a:br/>
-            <a:r>
-              <a:t>clips</a:t>
-            </a:r>
+          <a:bodyPr rtlCol="0" anchor="ctr"/>
+          <a:lstStyle/>
+          <a:p>
+            <a:pPr algn="ctr"/>
           </a:p>
         </p:txBody>
       </p:sp>
@@ -10345,14 +11066,14 @@
         </p:nvSpPr>
         <p:spPr>
           <a:xfrm>
-            <a:off x="457200" y="4572000"/>
-            <a:ext cx="11274552" cy="1097280"/>
+            <a:off x="914400" y="5120640"/>
+            <a:ext cx="2743200" cy="822960"/>
           </a:xfrm>
           <a:prstGeom prst="roundRect">
             <a:avLst/>
           </a:prstGeom>
           <a:solidFill>
-            <a:srgbClr val="ADD8E6"/>
+            <a:srgbClr val="4CAF50"/>
           </a:solidFill>
           <a:ln>
             <a:noFill/>
@@ -10373,10 +11094,23 @@
           </a:fontRef>
         </p:style>
         <p:txBody>
-          <a:bodyPr rtlCol="0" anchor="ctr"/>
-          <a:lstStyle/>
-          <a:p>
-            <a:pPr algn="ctr"/>
+          <a:bodyPr rtlCol="0" anchor="ctr" wrap="square"/>
+          <a:lstStyle/>
+          <a:p>
+            <a:pPr algn="ctr">
+              <a:spcBef>
+                <a:spcPts val="800"/>
+              </a:spcBef>
+              <a:defRPr sz="1600" b="1">
+                <a:solidFill>
+                  <a:srgbClr val="FFFFFF"/>
+                </a:solidFill>
+                <a:latin typeface="Segoe UI"/>
+              </a:defRPr>
+            </a:pPr>
+            <a:r>
+              <a:t>Final Image</a:t>
+            </a:r>
           </a:p>
         </p:txBody>
       </p:sp>
@@ -10388,8 +11122,8 @@
         </p:nvSpPr>
         <p:spPr>
           <a:xfrm>
-            <a:off x="731520" y="4663440"/>
-            <a:ext cx="10698480" cy="365760"/>
+            <a:off x="3931920" y="5212080"/>
+            <a:ext cx="7315200" cy="731520"/>
           </a:xfrm>
           <a:prstGeom prst="rect">
             <a:avLst/>
@@ -10403,15 +11137,19 @@
           <a:lstStyle/>
           <a:p>
             <a:pPr algn="l">
-              <a:defRPr sz="1600" b="1">
-                <a:solidFill>
-                  <a:srgbClr val="1E3A5F"/>
-                </a:solidFill>
-                <a:latin typeface="Segoe UI"/>
-              </a:defRPr>
-            </a:pPr>
-            <a:r>
-              <a:t>Examples You Can Try Today:</a:t>
+              <a:defRPr sz="1500" b="0">
+                <a:solidFill>
+                  <a:srgbClr val="424242"/>
+                </a:solidFill>
+                <a:latin typeface="Segoe UI"/>
+              </a:defRPr>
+            </a:pPr>
+            <a:r>
+              <a:t>A brand new picture</a:t>
+            </a:r>
+            <a:br/>
+            <a:r>
+              <a:t>that never existed!</a:t>
             </a:r>
           </a:p>
         </p:txBody>
@@ -10424,8 +11162,8 @@
         </p:nvSpPr>
         <p:spPr>
           <a:xfrm>
-            <a:off x="731520" y="5029200"/>
-            <a:ext cx="10698480" cy="548640"/>
+            <a:off x="914400" y="5943600"/>
+            <a:ext cx="10058400" cy="457200"/>
           </a:xfrm>
           <a:prstGeom prst="rect">
             <a:avLst/>
@@ -10439,15 +11177,15 @@
           <a:lstStyle/>
           <a:p>
             <a:pPr algn="l">
-              <a:defRPr sz="1300" b="0">
-                <a:solidFill>
-                  <a:srgbClr val="424242"/>
-                </a:solidFill>
-                <a:latin typeface="Segoe UI"/>
-              </a:defRPr>
-            </a:pPr>
-            <a:r>
-              <a:t>GPT-4o: Upload a photo and ask questions about it  |  Gemini: Describe an image and it explains what's in it  |  Claude: Analyze charts, screenshots, and documents</a:t>
+              <a:defRPr sz="1400" b="1">
+                <a:solidFill>
+                  <a:srgbClr val="1E3A5F"/>
+                </a:solidFill>
+                <a:latin typeface="Segoe UI"/>
+              </a:defRPr>
+            </a:pPr>
+            <a:r>
+              <a:t>Key: The image is NOT copied from anywhere. It's generated from learned patterns!</a:t>
             </a:r>
           </a:p>
         </p:txBody>
@@ -10544,7 +11282,7 @@
               </a:defRPr>
             </a:pPr>
             <a:r>
-              <a:t>Prompting for Images vs. Text</a:t>
+              <a:t>Multimodal AI: Beyond Just Text</a:t>
             </a:r>
           </a:p>
         </p:txBody>
@@ -10594,16 +11332,52 @@
       </p:sp>
       <p:sp>
         <p:nvSpPr>
-          <p:cNvPr id="5" name="Rounded Rectangle 4"/>
+          <p:cNvPr id="5" name="TextBox 4"/>
+          <p:cNvSpPr txBox="1"/>
+          <p:nvPr/>
+        </p:nvSpPr>
+        <p:spPr>
+          <a:xfrm>
+            <a:off x="457200" y="1463040"/>
+            <a:ext cx="11430000" cy="457200"/>
+          </a:xfrm>
+          <a:prstGeom prst="rect">
+            <a:avLst/>
+          </a:prstGeom>
+          <a:noFill/>
+        </p:spPr>
+        <p:txBody>
+          <a:bodyPr wrap="square">
+            <a:spAutoFit/>
+          </a:bodyPr>
+          <a:lstStyle/>
+          <a:p>
+            <a:pPr algn="ctr">
+              <a:defRPr sz="1800" b="1">
+                <a:solidFill>
+                  <a:srgbClr val="424242"/>
+                </a:solidFill>
+                <a:latin typeface="Segoe UI"/>
+              </a:defRPr>
+            </a:pPr>
+            <a:r>
+              <a:t>Multimodal = AI that understands AND generates MULTIPLE types of data</a:t>
+            </a:r>
+          </a:p>
+        </p:txBody>
+      </p:sp>
+      <p:sp>
+        <p:nvSpPr>
+          <p:cNvPr id="6" name="Oval 5"/>
           <p:cNvSpPr/>
           <p:nvPr/>
         </p:nvSpPr>
         <p:spPr>
           <a:xfrm>
-            <a:off x="457200" y="1554480"/>
-            <a:ext cx="5486400" cy="548640"/>
-          </a:xfrm>
-          <a:prstGeom prst="roundRect">
+            <a:off x="1280160" y="2194560"/>
+            <a:ext cx="1371600" cy="1371600"/>
+          </a:xfrm>
+          <a:prstGeom prst="ellipse">
             <a:avLst/>
           </a:prstGeom>
           <a:solidFill>
@@ -10632,10 +11406,7 @@
           <a:lstStyle/>
           <a:p>
             <a:pPr algn="ctr">
-              <a:spcBef>
-                <a:spcPts val="800"/>
-              </a:spcBef>
-              <a:defRPr sz="1500" b="1">
+              <a:defRPr sz="1600" b="1">
                 <a:solidFill>
                   <a:srgbClr val="FFFFFF"/>
                 </a:solidFill>
@@ -10643,23 +11414,63 @@
               </a:defRPr>
             </a:pPr>
             <a:r>
-              <a:t>Text Prompts (what you know)</a:t>
-            </a:r>
-          </a:p>
-        </p:txBody>
-      </p:sp>
-      <p:sp>
-        <p:nvSpPr>
-          <p:cNvPr id="6" name="Rounded Rectangle 5"/>
+              <a:t>Text</a:t>
+            </a:r>
+          </a:p>
+        </p:txBody>
+      </p:sp>
+      <p:sp>
+        <p:nvSpPr>
+          <p:cNvPr id="7" name="TextBox 6"/>
+          <p:cNvSpPr txBox="1"/>
+          <p:nvPr/>
+        </p:nvSpPr>
+        <p:spPr>
+          <a:xfrm>
+            <a:off x="731520" y="3749039"/>
+            <a:ext cx="2560320" cy="548640"/>
+          </a:xfrm>
+          <a:prstGeom prst="rect">
+            <a:avLst/>
+          </a:prstGeom>
+          <a:noFill/>
+        </p:spPr>
+        <p:txBody>
+          <a:bodyPr wrap="square">
+            <a:spAutoFit/>
+          </a:bodyPr>
+          <a:lstStyle/>
+          <a:p>
+            <a:pPr algn="ctr">
+              <a:defRPr sz="1300" b="0">
+                <a:solidFill>
+                  <a:srgbClr val="424242"/>
+                </a:solidFill>
+                <a:latin typeface="Segoe UI"/>
+              </a:defRPr>
+            </a:pPr>
+            <a:r>
+              <a:t>Read &amp; write</a:t>
+            </a:r>
+            <a:br/>
+            <a:r>
+              <a:t>words</a:t>
+            </a:r>
+          </a:p>
+        </p:txBody>
+      </p:sp>
+      <p:sp>
+        <p:nvSpPr>
+          <p:cNvPr id="8" name="Oval 7"/>
           <p:cNvSpPr/>
           <p:nvPr/>
         </p:nvSpPr>
         <p:spPr>
           <a:xfrm>
-            <a:off x="6217920" y="1554480"/>
-            <a:ext cx="5486400" cy="548640"/>
-          </a:xfrm>
-          <a:prstGeom prst="roundRect">
+            <a:off x="4206240" y="2194560"/>
+            <a:ext cx="1371600" cy="1371600"/>
+          </a:xfrm>
+          <a:prstGeom prst="ellipse">
             <a:avLst/>
           </a:prstGeom>
           <a:solidFill>
@@ -10688,10 +11499,7 @@
           <a:lstStyle/>
           <a:p>
             <a:pPr algn="ctr">
-              <a:spcBef>
-                <a:spcPts val="800"/>
-              </a:spcBef>
-              <a:defRPr sz="1500" b="1">
+              <a:defRPr sz="1600" b="1">
                 <a:solidFill>
                   <a:srgbClr val="FFFFFF"/>
                 </a:solidFill>
@@ -10699,21 +11507,21 @@
               </a:defRPr>
             </a:pPr>
             <a:r>
-              <a:t>Image Prompts (new today!)</a:t>
-            </a:r>
-          </a:p>
-        </p:txBody>
-      </p:sp>
-      <p:sp>
-        <p:nvSpPr>
-          <p:cNvPr id="7" name="TextBox 6"/>
+              <a:t>Images</a:t>
+            </a:r>
+          </a:p>
+        </p:txBody>
+      </p:sp>
+      <p:sp>
+        <p:nvSpPr>
+          <p:cNvPr id="9" name="TextBox 8"/>
           <p:cNvSpPr txBox="1"/>
           <p:nvPr/>
         </p:nvSpPr>
         <p:spPr>
           <a:xfrm>
-            <a:off x="640080" y="2286000"/>
-            <a:ext cx="5303520" cy="457200"/>
+            <a:off x="3657600" y="3749039"/>
+            <a:ext cx="2560320" cy="548640"/>
           </a:xfrm>
           <a:prstGeom prst="rect">
             <a:avLst/>
@@ -10726,8 +11534,8 @@
           </a:bodyPr>
           <a:lstStyle/>
           <a:p>
-            <a:pPr algn="l">
-              <a:defRPr sz="1400" b="0">
+            <a:pPr algn="ctr">
+              <a:defRPr sz="1300" b="0">
                 <a:solidFill>
                   <a:srgbClr val="424242"/>
                 </a:solidFill>
@@ -10735,284 +11543,34 @@
               </a:defRPr>
             </a:pPr>
             <a:r>
-              <a:t>• Role, Task, Context, Format</a:t>
-            </a:r>
-          </a:p>
-        </p:txBody>
-      </p:sp>
-      <p:sp>
-        <p:nvSpPr>
-          <p:cNvPr id="8" name="TextBox 7"/>
-          <p:cNvSpPr txBox="1"/>
-          <p:nvPr/>
-        </p:nvSpPr>
-        <p:spPr>
-          <a:xfrm>
-            <a:off x="6400800" y="2286000"/>
-            <a:ext cx="5303520" cy="457200"/>
-          </a:xfrm>
-          <a:prstGeom prst="rect">
-            <a:avLst/>
-          </a:prstGeom>
-          <a:noFill/>
-        </p:spPr>
-        <p:txBody>
-          <a:bodyPr wrap="square">
-            <a:spAutoFit/>
-          </a:bodyPr>
-          <a:lstStyle/>
-          <a:p>
-            <a:pPr algn="l">
-              <a:defRPr sz="1400" b="0">
-                <a:solidFill>
-                  <a:srgbClr val="424242"/>
-                </a:solidFill>
-                <a:latin typeface="Segoe UI"/>
-              </a:defRPr>
-            </a:pPr>
-            <a:r>
-              <a:t>• Subject, Style, Lighting, Mood</a:t>
-            </a:r>
-          </a:p>
-        </p:txBody>
-      </p:sp>
-      <p:sp>
-        <p:nvSpPr>
-          <p:cNvPr id="9" name="TextBox 8"/>
-          <p:cNvSpPr txBox="1"/>
-          <p:nvPr/>
-        </p:nvSpPr>
-        <p:spPr>
-          <a:xfrm>
-            <a:off x="640080" y="2788920"/>
-            <a:ext cx="5303520" cy="457200"/>
-          </a:xfrm>
-          <a:prstGeom prst="rect">
-            <a:avLst/>
-          </a:prstGeom>
-          <a:noFill/>
-        </p:spPr>
-        <p:txBody>
-          <a:bodyPr wrap="square">
-            <a:spAutoFit/>
-          </a:bodyPr>
-          <a:lstStyle/>
-          <a:p>
-            <a:pPr algn="l">
-              <a:defRPr sz="1400" b="0">
-                <a:solidFill>
-                  <a:srgbClr val="424242"/>
-                </a:solidFill>
-                <a:latin typeface="Segoe UI"/>
-              </a:defRPr>
-            </a:pPr>
-            <a:r>
-              <a:t>• Be specific about what you want</a:t>
-            </a:r>
-          </a:p>
-        </p:txBody>
-      </p:sp>
-      <p:sp>
-        <p:nvSpPr>
-          <p:cNvPr id="10" name="TextBox 9"/>
-          <p:cNvSpPr txBox="1"/>
-          <p:nvPr/>
-        </p:nvSpPr>
-        <p:spPr>
-          <a:xfrm>
-            <a:off x="6400800" y="2788920"/>
-            <a:ext cx="5303520" cy="457200"/>
-          </a:xfrm>
-          <a:prstGeom prst="rect">
-            <a:avLst/>
-          </a:prstGeom>
-          <a:noFill/>
-        </p:spPr>
-        <p:txBody>
-          <a:bodyPr wrap="square">
-            <a:spAutoFit/>
-          </a:bodyPr>
-          <a:lstStyle/>
-          <a:p>
-            <a:pPr algn="l">
-              <a:defRPr sz="1400" b="0">
-                <a:solidFill>
-                  <a:srgbClr val="424242"/>
-                </a:solidFill>
-                <a:latin typeface="Segoe UI"/>
-              </a:defRPr>
-            </a:pPr>
-            <a:r>
-              <a:t>• Describe what the image LOOKS like</a:t>
-            </a:r>
-          </a:p>
-        </p:txBody>
-      </p:sp>
-      <p:sp>
-        <p:nvSpPr>
-          <p:cNvPr id="11" name="TextBox 10"/>
-          <p:cNvSpPr txBox="1"/>
-          <p:nvPr/>
-        </p:nvSpPr>
-        <p:spPr>
-          <a:xfrm>
-            <a:off x="640080" y="3291840"/>
-            <a:ext cx="5303520" cy="457200"/>
-          </a:xfrm>
-          <a:prstGeom prst="rect">
-            <a:avLst/>
-          </a:prstGeom>
-          <a:noFill/>
-        </p:spPr>
-        <p:txBody>
-          <a:bodyPr wrap="square">
-            <a:spAutoFit/>
-          </a:bodyPr>
-          <a:lstStyle/>
-          <a:p>
-            <a:pPr algn="l">
-              <a:defRPr sz="1400" b="0">
-                <a:solidFill>
-                  <a:srgbClr val="424242"/>
-                </a:solidFill>
-                <a:latin typeface="Segoe UI"/>
-              </a:defRPr>
-            </a:pPr>
-            <a:r>
-              <a:t>• Chain-of-thought for reasoning</a:t>
-            </a:r>
-          </a:p>
-        </p:txBody>
-      </p:sp>
-      <p:sp>
-        <p:nvSpPr>
-          <p:cNvPr id="12" name="TextBox 11"/>
-          <p:cNvSpPr txBox="1"/>
-          <p:nvPr/>
-        </p:nvSpPr>
-        <p:spPr>
-          <a:xfrm>
-            <a:off x="6400800" y="3291840"/>
-            <a:ext cx="5303520" cy="457200"/>
-          </a:xfrm>
-          <a:prstGeom prst="rect">
-            <a:avLst/>
-          </a:prstGeom>
-          <a:noFill/>
-        </p:spPr>
-        <p:txBody>
-          <a:bodyPr wrap="square">
-            <a:spAutoFit/>
-          </a:bodyPr>
-          <a:lstStyle/>
-          <a:p>
-            <a:pPr algn="l">
-              <a:defRPr sz="1400" b="0">
-                <a:solidFill>
-                  <a:srgbClr val="424242"/>
-                </a:solidFill>
-                <a:latin typeface="Segoe UI"/>
-              </a:defRPr>
-            </a:pPr>
-            <a:r>
-              <a:t>• Mention art style (cartoon, realistic, pixel art)</a:t>
-            </a:r>
-          </a:p>
-        </p:txBody>
-      </p:sp>
-      <p:sp>
-        <p:nvSpPr>
-          <p:cNvPr id="13" name="TextBox 12"/>
-          <p:cNvSpPr txBox="1"/>
-          <p:nvPr/>
-        </p:nvSpPr>
-        <p:spPr>
-          <a:xfrm>
-            <a:off x="640080" y="3794760"/>
-            <a:ext cx="5303520" cy="457200"/>
-          </a:xfrm>
-          <a:prstGeom prst="rect">
-            <a:avLst/>
-          </a:prstGeom>
-          <a:noFill/>
-        </p:spPr>
-        <p:txBody>
-          <a:bodyPr wrap="square">
-            <a:spAutoFit/>
-          </a:bodyPr>
-          <a:lstStyle/>
-          <a:p>
-            <a:pPr algn="l">
-              <a:defRPr sz="1400" b="0">
-                <a:solidFill>
-                  <a:srgbClr val="424242"/>
-                </a:solidFill>
-                <a:latin typeface="Segoe UI"/>
-              </a:defRPr>
-            </a:pPr>
-            <a:r>
-              <a:t>• More words = more detail</a:t>
-            </a:r>
-          </a:p>
-        </p:txBody>
-      </p:sp>
-      <p:sp>
-        <p:nvSpPr>
-          <p:cNvPr id="14" name="TextBox 13"/>
-          <p:cNvSpPr txBox="1"/>
-          <p:nvPr/>
-        </p:nvSpPr>
-        <p:spPr>
-          <a:xfrm>
-            <a:off x="6400800" y="3794760"/>
-            <a:ext cx="5303520" cy="457200"/>
-          </a:xfrm>
-          <a:prstGeom prst="rect">
-            <a:avLst/>
-          </a:prstGeom>
-          <a:noFill/>
-        </p:spPr>
-        <p:txBody>
-          <a:bodyPr wrap="square">
-            <a:spAutoFit/>
-          </a:bodyPr>
-          <a:lstStyle/>
-          <a:p>
-            <a:pPr algn="l">
-              <a:defRPr sz="1400" b="0">
-                <a:solidFill>
-                  <a:srgbClr val="424242"/>
-                </a:solidFill>
-                <a:latin typeface="Segoe UI"/>
-              </a:defRPr>
-            </a:pPr>
-            <a:r>
-              <a:t>• More descriptive = more detailed image</a:t>
-            </a:r>
-          </a:p>
-        </p:txBody>
-      </p:sp>
-      <p:sp>
-        <p:nvSpPr>
-          <p:cNvPr id="15" name="Rounded Rectangle 14"/>
+              <a:t>See &amp; create</a:t>
+            </a:r>
+            <a:br/>
+            <a:r>
+              <a:t>pictures</a:t>
+            </a:r>
+          </a:p>
+        </p:txBody>
+      </p:sp>
+      <p:sp>
+        <p:nvSpPr>
+          <p:cNvPr id="10" name="Oval 9"/>
           <p:cNvSpPr/>
           <p:nvPr/>
         </p:nvSpPr>
         <p:spPr>
           <a:xfrm>
-            <a:off x="457200" y="4480560"/>
-            <a:ext cx="11274552" cy="1645920"/>
-          </a:xfrm>
-          <a:prstGeom prst="roundRect">
+            <a:off x="7132320" y="2194560"/>
+            <a:ext cx="1371600" cy="1371600"/>
+          </a:xfrm>
+          <a:prstGeom prst="ellipse">
             <a:avLst/>
           </a:prstGeom>
           <a:solidFill>
-            <a:srgbClr val="F5F5F5"/>
+            <a:srgbClr val="009688"/>
           </a:solidFill>
-          <a:ln w="25400">
-            <a:solidFill>
-              <a:srgbClr val="3467A6"/>
-            </a:solidFill>
+          <a:ln>
+            <a:noFill/>
           </a:ln>
         </p:spPr>
         <p:style>
@@ -11030,23 +11588,33 @@
           </a:fontRef>
         </p:style>
         <p:txBody>
-          <a:bodyPr rtlCol="0" anchor="ctr"/>
-          <a:lstStyle/>
-          <a:p>
-            <a:pPr algn="ctr"/>
-          </a:p>
-        </p:txBody>
-      </p:sp>
-      <p:sp>
-        <p:nvSpPr>
-          <p:cNvPr id="16" name="TextBox 15"/>
+          <a:bodyPr rtlCol="0" anchor="ctr" wrap="square"/>
+          <a:lstStyle/>
+          <a:p>
+            <a:pPr algn="ctr">
+              <a:defRPr sz="1600" b="1">
+                <a:solidFill>
+                  <a:srgbClr val="FFFFFF"/>
+                </a:solidFill>
+                <a:latin typeface="Segoe UI"/>
+              </a:defRPr>
+            </a:pPr>
+            <a:r>
+              <a:t>Audio</a:t>
+            </a:r>
+          </a:p>
+        </p:txBody>
+      </p:sp>
+      <p:sp>
+        <p:nvSpPr>
+          <p:cNvPr id="11" name="TextBox 10"/>
           <p:cNvSpPr txBox="1"/>
           <p:nvPr/>
         </p:nvSpPr>
         <p:spPr>
           <a:xfrm>
-            <a:off x="731520" y="4572000"/>
-            <a:ext cx="5029200" cy="365760"/>
+            <a:off x="6583680" y="3749039"/>
+            <a:ext cx="2560320" cy="548640"/>
           </a:xfrm>
           <a:prstGeom prst="rect">
             <a:avLst/>
@@ -11059,30 +11627,87 @@
           </a:bodyPr>
           <a:lstStyle/>
           <a:p>
-            <a:pPr algn="l">
-              <a:defRPr sz="1400" b="1">
-                <a:solidFill>
-                  <a:srgbClr val="F44336"/>
-                </a:solidFill>
-                <a:latin typeface="Segoe UI"/>
-              </a:defRPr>
-            </a:pPr>
-            <a:r>
-              <a:t>Bad image prompt:</a:t>
-            </a:r>
-          </a:p>
-        </p:txBody>
-      </p:sp>
-      <p:sp>
-        <p:nvSpPr>
-          <p:cNvPr id="17" name="TextBox 16"/>
+            <a:pPr algn="ctr">
+              <a:defRPr sz="1300" b="0">
+                <a:solidFill>
+                  <a:srgbClr val="424242"/>
+                </a:solidFill>
+                <a:latin typeface="Segoe UI"/>
+              </a:defRPr>
+            </a:pPr>
+            <a:r>
+              <a:t>Hear &amp; speak</a:t>
+            </a:r>
+            <a:br/>
+            <a:r>
+              <a:t>(voice)</a:t>
+            </a:r>
+          </a:p>
+        </p:txBody>
+      </p:sp>
+      <p:sp>
+        <p:nvSpPr>
+          <p:cNvPr id="12" name="Oval 11"/>
+          <p:cNvSpPr/>
+          <p:nvPr/>
+        </p:nvSpPr>
+        <p:spPr>
+          <a:xfrm>
+            <a:off x="10058400" y="2194560"/>
+            <a:ext cx="1371600" cy="1371600"/>
+          </a:xfrm>
+          <a:prstGeom prst="ellipse">
+            <a:avLst/>
+          </a:prstGeom>
+          <a:solidFill>
+            <a:srgbClr val="EC407A"/>
+          </a:solidFill>
+          <a:ln>
+            <a:noFill/>
+          </a:ln>
+        </p:spPr>
+        <p:style>
+          <a:lnRef idx="1">
+            <a:schemeClr val="accent1"/>
+          </a:lnRef>
+          <a:fillRef idx="3">
+            <a:schemeClr val="accent1"/>
+          </a:fillRef>
+          <a:effectRef idx="2">
+            <a:schemeClr val="accent1"/>
+          </a:effectRef>
+          <a:fontRef idx="minor">
+            <a:schemeClr val="lt1"/>
+          </a:fontRef>
+        </p:style>
+        <p:txBody>
+          <a:bodyPr rtlCol="0" anchor="ctr" wrap="square"/>
+          <a:lstStyle/>
+          <a:p>
+            <a:pPr algn="ctr">
+              <a:defRPr sz="1600" b="1">
+                <a:solidFill>
+                  <a:srgbClr val="FFFFFF"/>
+                </a:solidFill>
+                <a:latin typeface="Segoe UI"/>
+              </a:defRPr>
+            </a:pPr>
+            <a:r>
+              <a:t>Video</a:t>
+            </a:r>
+          </a:p>
+        </p:txBody>
+      </p:sp>
+      <p:sp>
+        <p:nvSpPr>
+          <p:cNvPr id="13" name="TextBox 12"/>
           <p:cNvSpPr txBox="1"/>
           <p:nvPr/>
         </p:nvSpPr>
         <p:spPr>
           <a:xfrm>
-            <a:off x="731520" y="4892040"/>
-            <a:ext cx="5029200" cy="365760"/>
+            <a:off x="9509760" y="3749039"/>
+            <a:ext cx="2560320" cy="548640"/>
           </a:xfrm>
           <a:prstGeom prst="rect">
             <a:avLst/>
@@ -11095,7 +11720,7 @@
           </a:bodyPr>
           <a:lstStyle/>
           <a:p>
-            <a:pPr algn="l">
+            <a:pPr algn="ctr">
               <a:defRPr sz="1300" b="0">
                 <a:solidFill>
                   <a:srgbClr val="424242"/>
@@ -11104,21 +11729,68 @@
               </a:defRPr>
             </a:pPr>
             <a:r>
-              <a:t>"Make me a dog picture"</a:t>
-            </a:r>
-          </a:p>
-        </p:txBody>
-      </p:sp>
-      <p:sp>
-        <p:nvSpPr>
-          <p:cNvPr id="18" name="TextBox 17"/>
+              <a:t>Watch &amp; make</a:t>
+            </a:r>
+            <a:br/>
+            <a:r>
+              <a:t>clips</a:t>
+            </a:r>
+          </a:p>
+        </p:txBody>
+      </p:sp>
+      <p:sp>
+        <p:nvSpPr>
+          <p:cNvPr id="14" name="Rounded Rectangle 13"/>
+          <p:cNvSpPr/>
+          <p:nvPr/>
+        </p:nvSpPr>
+        <p:spPr>
+          <a:xfrm>
+            <a:off x="457200" y="4572000"/>
+            <a:ext cx="11274552" cy="1097280"/>
+          </a:xfrm>
+          <a:prstGeom prst="roundRect">
+            <a:avLst/>
+          </a:prstGeom>
+          <a:solidFill>
+            <a:srgbClr val="ADD8E6"/>
+          </a:solidFill>
+          <a:ln>
+            <a:noFill/>
+          </a:ln>
+        </p:spPr>
+        <p:style>
+          <a:lnRef idx="1">
+            <a:schemeClr val="accent1"/>
+          </a:lnRef>
+          <a:fillRef idx="3">
+            <a:schemeClr val="accent1"/>
+          </a:fillRef>
+          <a:effectRef idx="2">
+            <a:schemeClr val="accent1"/>
+          </a:effectRef>
+          <a:fontRef idx="minor">
+            <a:schemeClr val="lt1"/>
+          </a:fontRef>
+        </p:style>
+        <p:txBody>
+          <a:bodyPr rtlCol="0" anchor="ctr"/>
+          <a:lstStyle/>
+          <a:p>
+            <a:pPr algn="ctr"/>
+          </a:p>
+        </p:txBody>
+      </p:sp>
+      <p:sp>
+        <p:nvSpPr>
+          <p:cNvPr id="15" name="TextBox 14"/>
           <p:cNvSpPr txBox="1"/>
           <p:nvPr/>
         </p:nvSpPr>
         <p:spPr>
           <a:xfrm>
-            <a:off x="6217920" y="4572000"/>
-            <a:ext cx="5303520" cy="365760"/>
+            <a:off x="731520" y="4663440"/>
+            <a:ext cx="10698480" cy="365760"/>
           </a:xfrm>
           <a:prstGeom prst="rect">
             <a:avLst/>
@@ -11132,29 +11804,29 @@
           <a:lstStyle/>
           <a:p>
             <a:pPr algn="l">
-              <a:defRPr sz="1400" b="1">
-                <a:solidFill>
-                  <a:srgbClr val="4CAF50"/>
-                </a:solidFill>
-                <a:latin typeface="Segoe UI"/>
-              </a:defRPr>
-            </a:pPr>
-            <a:r>
-              <a:t>Great image prompt:</a:t>
-            </a:r>
-          </a:p>
-        </p:txBody>
-      </p:sp>
-      <p:sp>
-        <p:nvSpPr>
-          <p:cNvPr id="19" name="TextBox 18"/>
+              <a:defRPr sz="1600" b="1">
+                <a:solidFill>
+                  <a:srgbClr val="1E3A5F"/>
+                </a:solidFill>
+                <a:latin typeface="Segoe UI"/>
+              </a:defRPr>
+            </a:pPr>
+            <a:r>
+              <a:t>Examples You Can Try Today:</a:t>
+            </a:r>
+          </a:p>
+        </p:txBody>
+      </p:sp>
+      <p:sp>
+        <p:nvSpPr>
+          <p:cNvPr id="16" name="TextBox 15"/>
           <p:cNvSpPr txBox="1"/>
           <p:nvPr/>
         </p:nvSpPr>
         <p:spPr>
           <a:xfrm>
-            <a:off x="6217920" y="4892040"/>
-            <a:ext cx="5303520" cy="731520"/>
+            <a:off x="731520" y="5029200"/>
+            <a:ext cx="10698480" cy="548640"/>
           </a:xfrm>
           <a:prstGeom prst="rect">
             <a:avLst/>
@@ -11176,11 +11848,7 @@
               </a:defRPr>
             </a:pPr>
             <a:r>
-              <a:t>"A golden retriever puppy sitting in a field of sunflowers,</a:t>
-            </a:r>
-            <a:br/>
-            <a:r>
-              <a:t>watercolor painting style, warm sunset lighting, happy mood"</a:t>
+              <a:t>GPT-4o: Upload a photo and ask questions about it  |  Gemini: Describe an image and it explains what's in it  |  Claude: Analyze charts, screenshots, and documents</a:t>
             </a:r>
           </a:p>
         </p:txBody>
@@ -11277,7 +11945,7 @@
               </a:defRPr>
             </a:pPr>
             <a:r>
-              <a:t>Live Demo Time!</a:t>
+              <a:t>Prompting for Images vs. Text</a:t>
             </a:r>
           </a:p>
         </p:txBody>
@@ -11327,56 +11995,20 @@
       </p:sp>
       <p:sp>
         <p:nvSpPr>
-          <p:cNvPr id="5" name="TextBox 4"/>
-          <p:cNvSpPr txBox="1"/>
-          <p:nvPr/>
-        </p:nvSpPr>
-        <p:spPr>
-          <a:xfrm>
-            <a:off x="457200" y="1645920"/>
-            <a:ext cx="11274552" cy="548640"/>
-          </a:xfrm>
-          <a:prstGeom prst="rect">
-            <a:avLst/>
-          </a:prstGeom>
-          <a:noFill/>
-        </p:spPr>
-        <p:txBody>
-          <a:bodyPr wrap="square">
-            <a:spAutoFit/>
-          </a:bodyPr>
-          <a:lstStyle/>
-          <a:p>
-            <a:pPr algn="ctr">
-              <a:defRPr sz="2200" b="1">
-                <a:solidFill>
-                  <a:srgbClr val="424242"/>
-                </a:solidFill>
-                <a:latin typeface="Segoe UI"/>
-              </a:defRPr>
-            </a:pPr>
-            <a:r>
-              <a:t>Let's generate images together and see what happens!</a:t>
-            </a:r>
-          </a:p>
-        </p:txBody>
-      </p:sp>
-      <p:sp>
-        <p:nvSpPr>
-          <p:cNvPr id="6" name="Rounded Rectangle 5"/>
+          <p:cNvPr id="5" name="Rounded Rectangle 4"/>
           <p:cNvSpPr/>
           <p:nvPr/>
         </p:nvSpPr>
         <p:spPr>
           <a:xfrm>
-            <a:off x="914400" y="2377440"/>
-            <a:ext cx="2011680" cy="777240"/>
+            <a:off x="457200" y="1554480"/>
+            <a:ext cx="5486400" cy="548640"/>
           </a:xfrm>
           <a:prstGeom prst="roundRect">
             <a:avLst/>
           </a:prstGeom>
           <a:solidFill>
-            <a:srgbClr val="2196F3"/>
+            <a:srgbClr val="3467A6"/>
           </a:solidFill>
           <a:ln>
             <a:noFill/>
@@ -11404,7 +12036,7 @@
               <a:spcBef>
                 <a:spcPts val="800"/>
               </a:spcBef>
-              <a:defRPr sz="1600" b="1">
+              <a:defRPr sz="1500" b="1">
                 <a:solidFill>
                   <a:srgbClr val="FFFFFF"/>
                 </a:solidFill>
@@ -11412,67 +12044,27 @@
               </a:defRPr>
             </a:pPr>
             <a:r>
-              <a:t>Demo 1</a:t>
-            </a:r>
-          </a:p>
-        </p:txBody>
-      </p:sp>
-      <p:sp>
-        <p:nvSpPr>
-          <p:cNvPr id="7" name="TextBox 6"/>
-          <p:cNvSpPr txBox="1"/>
-          <p:nvPr/>
-        </p:nvSpPr>
-        <p:spPr>
-          <a:xfrm>
-            <a:off x="3200400" y="2468880"/>
-            <a:ext cx="8229600" cy="685800"/>
-          </a:xfrm>
-          <a:prstGeom prst="rect">
-            <a:avLst/>
-          </a:prstGeom>
-          <a:noFill/>
-        </p:spPr>
-        <p:txBody>
-          <a:bodyPr wrap="square">
-            <a:spAutoFit/>
-          </a:bodyPr>
-          <a:lstStyle/>
-          <a:p>
-            <a:pPr algn="l">
-              <a:defRPr sz="1500" b="0">
-                <a:solidFill>
-                  <a:srgbClr val="424242"/>
-                </a:solidFill>
-                <a:latin typeface="Segoe UI"/>
-              </a:defRPr>
-            </a:pPr>
-            <a:r>
-              <a:t>Same prompt, different tools</a:t>
-            </a:r>
-            <a:br/>
-            <a:r>
-              <a:t>(ChatGPT vs. Gemini)</a:t>
-            </a:r>
-          </a:p>
-        </p:txBody>
-      </p:sp>
-      <p:sp>
-        <p:nvSpPr>
-          <p:cNvPr id="8" name="Rounded Rectangle 7"/>
+              <a:t>Text Prompts (what you know)</a:t>
+            </a:r>
+          </a:p>
+        </p:txBody>
+      </p:sp>
+      <p:sp>
+        <p:nvSpPr>
+          <p:cNvPr id="6" name="Rounded Rectangle 5"/>
           <p:cNvSpPr/>
           <p:nvPr/>
         </p:nvSpPr>
         <p:spPr>
           <a:xfrm>
-            <a:off x="914400" y="3383280"/>
-            <a:ext cx="2011680" cy="777240"/>
+            <a:off x="6217920" y="1554480"/>
+            <a:ext cx="5486400" cy="548640"/>
           </a:xfrm>
           <a:prstGeom prst="roundRect">
             <a:avLst/>
           </a:prstGeom>
           <a:solidFill>
-            <a:srgbClr val="FFB300"/>
+            <a:srgbClr val="7E57C2"/>
           </a:solidFill>
           <a:ln>
             <a:noFill/>
@@ -11500,7 +12092,7 @@
               <a:spcBef>
                 <a:spcPts val="800"/>
               </a:spcBef>
-              <a:defRPr sz="1600" b="1">
+              <a:defRPr sz="1500" b="1">
                 <a:solidFill>
                   <a:srgbClr val="FFFFFF"/>
                 </a:solidFill>
@@ -11508,21 +12100,21 @@
               </a:defRPr>
             </a:pPr>
             <a:r>
-              <a:t>Demo 2</a:t>
-            </a:r>
-          </a:p>
-        </p:txBody>
-      </p:sp>
-      <p:sp>
-        <p:nvSpPr>
-          <p:cNvPr id="9" name="TextBox 8"/>
+              <a:t>Image Prompts (new today!)</a:t>
+            </a:r>
+          </a:p>
+        </p:txBody>
+      </p:sp>
+      <p:sp>
+        <p:nvSpPr>
+          <p:cNvPr id="7" name="TextBox 6"/>
           <p:cNvSpPr txBox="1"/>
           <p:nvPr/>
         </p:nvSpPr>
         <p:spPr>
           <a:xfrm>
-            <a:off x="3200400" y="3474720"/>
-            <a:ext cx="8229600" cy="685800"/>
+            <a:off x="640080" y="2286000"/>
+            <a:ext cx="5303520" cy="457200"/>
           </a:xfrm>
           <a:prstGeom prst="rect">
             <a:avLst/>
@@ -11536,7 +12128,7 @@
           <a:lstStyle/>
           <a:p>
             <a:pPr algn="l">
-              <a:defRPr sz="1500" b="0">
+              <a:defRPr sz="1400" b="0">
                 <a:solidFill>
                   <a:srgbClr val="424242"/>
                 </a:solidFill>
@@ -11544,34 +12136,284 @@
               </a:defRPr>
             </a:pPr>
             <a:r>
-              <a:t>Vague prompt vs. detailed prompt</a:t>
-            </a:r>
-            <a:br/>
-            <a:r>
-              <a:t>(see the quality difference!)</a:t>
-            </a:r>
-          </a:p>
-        </p:txBody>
-      </p:sp>
-      <p:sp>
-        <p:nvSpPr>
-          <p:cNvPr id="10" name="Rounded Rectangle 9"/>
+              <a:t>• Role, Task, Context, Format</a:t>
+            </a:r>
+          </a:p>
+        </p:txBody>
+      </p:sp>
+      <p:sp>
+        <p:nvSpPr>
+          <p:cNvPr id="8" name="TextBox 7"/>
+          <p:cNvSpPr txBox="1"/>
+          <p:nvPr/>
+        </p:nvSpPr>
+        <p:spPr>
+          <a:xfrm>
+            <a:off x="6400800" y="2286000"/>
+            <a:ext cx="5303520" cy="457200"/>
+          </a:xfrm>
+          <a:prstGeom prst="rect">
+            <a:avLst/>
+          </a:prstGeom>
+          <a:noFill/>
+        </p:spPr>
+        <p:txBody>
+          <a:bodyPr wrap="square">
+            <a:spAutoFit/>
+          </a:bodyPr>
+          <a:lstStyle/>
+          <a:p>
+            <a:pPr algn="l">
+              <a:defRPr sz="1400" b="0">
+                <a:solidFill>
+                  <a:srgbClr val="424242"/>
+                </a:solidFill>
+                <a:latin typeface="Segoe UI"/>
+              </a:defRPr>
+            </a:pPr>
+            <a:r>
+              <a:t>• Subject, Style, Lighting, Mood</a:t>
+            </a:r>
+          </a:p>
+        </p:txBody>
+      </p:sp>
+      <p:sp>
+        <p:nvSpPr>
+          <p:cNvPr id="9" name="TextBox 8"/>
+          <p:cNvSpPr txBox="1"/>
+          <p:nvPr/>
+        </p:nvSpPr>
+        <p:spPr>
+          <a:xfrm>
+            <a:off x="640080" y="2788920"/>
+            <a:ext cx="5303520" cy="457200"/>
+          </a:xfrm>
+          <a:prstGeom prst="rect">
+            <a:avLst/>
+          </a:prstGeom>
+          <a:noFill/>
+        </p:spPr>
+        <p:txBody>
+          <a:bodyPr wrap="square">
+            <a:spAutoFit/>
+          </a:bodyPr>
+          <a:lstStyle/>
+          <a:p>
+            <a:pPr algn="l">
+              <a:defRPr sz="1400" b="0">
+                <a:solidFill>
+                  <a:srgbClr val="424242"/>
+                </a:solidFill>
+                <a:latin typeface="Segoe UI"/>
+              </a:defRPr>
+            </a:pPr>
+            <a:r>
+              <a:t>• Be specific about what you want</a:t>
+            </a:r>
+          </a:p>
+        </p:txBody>
+      </p:sp>
+      <p:sp>
+        <p:nvSpPr>
+          <p:cNvPr id="10" name="TextBox 9"/>
+          <p:cNvSpPr txBox="1"/>
+          <p:nvPr/>
+        </p:nvSpPr>
+        <p:spPr>
+          <a:xfrm>
+            <a:off x="6400800" y="2788920"/>
+            <a:ext cx="5303520" cy="457200"/>
+          </a:xfrm>
+          <a:prstGeom prst="rect">
+            <a:avLst/>
+          </a:prstGeom>
+          <a:noFill/>
+        </p:spPr>
+        <p:txBody>
+          <a:bodyPr wrap="square">
+            <a:spAutoFit/>
+          </a:bodyPr>
+          <a:lstStyle/>
+          <a:p>
+            <a:pPr algn="l">
+              <a:defRPr sz="1400" b="0">
+                <a:solidFill>
+                  <a:srgbClr val="424242"/>
+                </a:solidFill>
+                <a:latin typeface="Segoe UI"/>
+              </a:defRPr>
+            </a:pPr>
+            <a:r>
+              <a:t>• Describe what the image LOOKS like</a:t>
+            </a:r>
+          </a:p>
+        </p:txBody>
+      </p:sp>
+      <p:sp>
+        <p:nvSpPr>
+          <p:cNvPr id="11" name="TextBox 10"/>
+          <p:cNvSpPr txBox="1"/>
+          <p:nvPr/>
+        </p:nvSpPr>
+        <p:spPr>
+          <a:xfrm>
+            <a:off x="640080" y="3291840"/>
+            <a:ext cx="5303520" cy="457200"/>
+          </a:xfrm>
+          <a:prstGeom prst="rect">
+            <a:avLst/>
+          </a:prstGeom>
+          <a:noFill/>
+        </p:spPr>
+        <p:txBody>
+          <a:bodyPr wrap="square">
+            <a:spAutoFit/>
+          </a:bodyPr>
+          <a:lstStyle/>
+          <a:p>
+            <a:pPr algn="l">
+              <a:defRPr sz="1400" b="0">
+                <a:solidFill>
+                  <a:srgbClr val="424242"/>
+                </a:solidFill>
+                <a:latin typeface="Segoe UI"/>
+              </a:defRPr>
+            </a:pPr>
+            <a:r>
+              <a:t>• Chain-of-thought for reasoning</a:t>
+            </a:r>
+          </a:p>
+        </p:txBody>
+      </p:sp>
+      <p:sp>
+        <p:nvSpPr>
+          <p:cNvPr id="12" name="TextBox 11"/>
+          <p:cNvSpPr txBox="1"/>
+          <p:nvPr/>
+        </p:nvSpPr>
+        <p:spPr>
+          <a:xfrm>
+            <a:off x="6400800" y="3291840"/>
+            <a:ext cx="5303520" cy="457200"/>
+          </a:xfrm>
+          <a:prstGeom prst="rect">
+            <a:avLst/>
+          </a:prstGeom>
+          <a:noFill/>
+        </p:spPr>
+        <p:txBody>
+          <a:bodyPr wrap="square">
+            <a:spAutoFit/>
+          </a:bodyPr>
+          <a:lstStyle/>
+          <a:p>
+            <a:pPr algn="l">
+              <a:defRPr sz="1400" b="0">
+                <a:solidFill>
+                  <a:srgbClr val="424242"/>
+                </a:solidFill>
+                <a:latin typeface="Segoe UI"/>
+              </a:defRPr>
+            </a:pPr>
+            <a:r>
+              <a:t>• Mention art style (cartoon, realistic, pixel art)</a:t>
+            </a:r>
+          </a:p>
+        </p:txBody>
+      </p:sp>
+      <p:sp>
+        <p:nvSpPr>
+          <p:cNvPr id="13" name="TextBox 12"/>
+          <p:cNvSpPr txBox="1"/>
+          <p:nvPr/>
+        </p:nvSpPr>
+        <p:spPr>
+          <a:xfrm>
+            <a:off x="640080" y="3794760"/>
+            <a:ext cx="5303520" cy="457200"/>
+          </a:xfrm>
+          <a:prstGeom prst="rect">
+            <a:avLst/>
+          </a:prstGeom>
+          <a:noFill/>
+        </p:spPr>
+        <p:txBody>
+          <a:bodyPr wrap="square">
+            <a:spAutoFit/>
+          </a:bodyPr>
+          <a:lstStyle/>
+          <a:p>
+            <a:pPr algn="l">
+              <a:defRPr sz="1400" b="0">
+                <a:solidFill>
+                  <a:srgbClr val="424242"/>
+                </a:solidFill>
+                <a:latin typeface="Segoe UI"/>
+              </a:defRPr>
+            </a:pPr>
+            <a:r>
+              <a:t>• More words = more detail</a:t>
+            </a:r>
+          </a:p>
+        </p:txBody>
+      </p:sp>
+      <p:sp>
+        <p:nvSpPr>
+          <p:cNvPr id="14" name="TextBox 13"/>
+          <p:cNvSpPr txBox="1"/>
+          <p:nvPr/>
+        </p:nvSpPr>
+        <p:spPr>
+          <a:xfrm>
+            <a:off x="6400800" y="3794760"/>
+            <a:ext cx="5303520" cy="457200"/>
+          </a:xfrm>
+          <a:prstGeom prst="rect">
+            <a:avLst/>
+          </a:prstGeom>
+          <a:noFill/>
+        </p:spPr>
+        <p:txBody>
+          <a:bodyPr wrap="square">
+            <a:spAutoFit/>
+          </a:bodyPr>
+          <a:lstStyle/>
+          <a:p>
+            <a:pPr algn="l">
+              <a:defRPr sz="1400" b="0">
+                <a:solidFill>
+                  <a:srgbClr val="424242"/>
+                </a:solidFill>
+                <a:latin typeface="Segoe UI"/>
+              </a:defRPr>
+            </a:pPr>
+            <a:r>
+              <a:t>• More descriptive = more detailed image</a:t>
+            </a:r>
+          </a:p>
+        </p:txBody>
+      </p:sp>
+      <p:sp>
+        <p:nvSpPr>
+          <p:cNvPr id="15" name="Rounded Rectangle 14"/>
           <p:cNvSpPr/>
           <p:nvPr/>
         </p:nvSpPr>
         <p:spPr>
           <a:xfrm>
-            <a:off x="914400" y="4389120"/>
-            <a:ext cx="2011680" cy="777240"/>
+            <a:off x="457200" y="4480560"/>
+            <a:ext cx="11274552" cy="1645920"/>
           </a:xfrm>
           <a:prstGeom prst="roundRect">
             <a:avLst/>
           </a:prstGeom>
           <a:solidFill>
-            <a:srgbClr val="009688"/>
+            <a:srgbClr val="F5F5F5"/>
           </a:solidFill>
-          <a:ln>
-            <a:noFill/>
+          <a:ln w="25400">
+            <a:solidFill>
+              <a:srgbClr val="3467A6"/>
+            </a:solidFill>
           </a:ln>
         </p:spPr>
         <p:style>
@@ -11589,36 +12431,23 @@
           </a:fontRef>
         </p:style>
         <p:txBody>
-          <a:bodyPr rtlCol="0" anchor="ctr" wrap="square"/>
-          <a:lstStyle/>
-          <a:p>
-            <a:pPr algn="ctr">
-              <a:spcBef>
-                <a:spcPts val="800"/>
-              </a:spcBef>
-              <a:defRPr sz="1600" b="1">
-                <a:solidFill>
-                  <a:srgbClr val="FFFFFF"/>
-                </a:solidFill>
-                <a:latin typeface="Segoe UI"/>
-              </a:defRPr>
-            </a:pPr>
-            <a:r>
-              <a:t>Demo 3</a:t>
-            </a:r>
-          </a:p>
-        </p:txBody>
-      </p:sp>
-      <p:sp>
-        <p:nvSpPr>
-          <p:cNvPr id="11" name="TextBox 10"/>
+          <a:bodyPr rtlCol="0" anchor="ctr"/>
+          <a:lstStyle/>
+          <a:p>
+            <a:pPr algn="ctr"/>
+          </a:p>
+        </p:txBody>
+      </p:sp>
+      <p:sp>
+        <p:nvSpPr>
+          <p:cNvPr id="16" name="TextBox 15"/>
           <p:cNvSpPr txBox="1"/>
           <p:nvPr/>
         </p:nvSpPr>
         <p:spPr>
           <a:xfrm>
-            <a:off x="3200400" y="4480560"/>
-            <a:ext cx="8229600" cy="685800"/>
+            <a:off x="731520" y="4572000"/>
+            <a:ext cx="5029200" cy="365760"/>
           </a:xfrm>
           <a:prstGeom prst="rect">
             <a:avLst/>
@@ -11632,89 +12461,29 @@
           <a:lstStyle/>
           <a:p>
             <a:pPr algn="l">
-              <a:defRPr sz="1500" b="0">
-                <a:solidFill>
-                  <a:srgbClr val="424242"/>
-                </a:solidFill>
-                <a:latin typeface="Segoe UI"/>
-              </a:defRPr>
-            </a:pPr>
-            <a:r>
-              <a:t>Upload a photo and ask AI about it</a:t>
-            </a:r>
-            <a:br/>
-            <a:r>
-              <a:t>(multimodal in action)</a:t>
-            </a:r>
-          </a:p>
-        </p:txBody>
-      </p:sp>
-      <p:sp>
-        <p:nvSpPr>
-          <p:cNvPr id="12" name="Rounded Rectangle 11"/>
-          <p:cNvSpPr/>
-          <p:nvPr/>
-        </p:nvSpPr>
-        <p:spPr>
-          <a:xfrm>
-            <a:off x="914400" y="5394960"/>
-            <a:ext cx="2011680" cy="777240"/>
-          </a:xfrm>
-          <a:prstGeom prst="roundRect">
-            <a:avLst/>
-          </a:prstGeom>
-          <a:solidFill>
-            <a:srgbClr val="EC407A"/>
-          </a:solidFill>
-          <a:ln>
-            <a:noFill/>
-          </a:ln>
-        </p:spPr>
-        <p:style>
-          <a:lnRef idx="1">
-            <a:schemeClr val="accent1"/>
-          </a:lnRef>
-          <a:fillRef idx="3">
-            <a:schemeClr val="accent1"/>
-          </a:fillRef>
-          <a:effectRef idx="2">
-            <a:schemeClr val="accent1"/>
-          </a:effectRef>
-          <a:fontRef idx="minor">
-            <a:schemeClr val="lt1"/>
-          </a:fontRef>
-        </p:style>
-        <p:txBody>
-          <a:bodyPr rtlCol="0" anchor="ctr" wrap="square"/>
-          <a:lstStyle/>
-          <a:p>
-            <a:pPr algn="ctr">
-              <a:spcBef>
-                <a:spcPts val="800"/>
-              </a:spcBef>
-              <a:defRPr sz="1600" b="1">
-                <a:solidFill>
-                  <a:srgbClr val="FFFFFF"/>
-                </a:solidFill>
-                <a:latin typeface="Segoe UI"/>
-              </a:defRPr>
-            </a:pPr>
-            <a:r>
-              <a:t>Demo 4</a:t>
-            </a:r>
-          </a:p>
-        </p:txBody>
-      </p:sp>
-      <p:sp>
-        <p:nvSpPr>
-          <p:cNvPr id="13" name="TextBox 12"/>
+              <a:defRPr sz="1400" b="1">
+                <a:solidFill>
+                  <a:srgbClr val="F44336"/>
+                </a:solidFill>
+                <a:latin typeface="Segoe UI"/>
+              </a:defRPr>
+            </a:pPr>
+            <a:r>
+              <a:t>Bad image prompt:</a:t>
+            </a:r>
+          </a:p>
+        </p:txBody>
+      </p:sp>
+      <p:sp>
+        <p:nvSpPr>
+          <p:cNvPr id="17" name="TextBox 16"/>
           <p:cNvSpPr txBox="1"/>
           <p:nvPr/>
         </p:nvSpPr>
         <p:spPr>
           <a:xfrm>
-            <a:off x="3200400" y="5486400"/>
-            <a:ext cx="8229600" cy="685800"/>
+            <a:off x="731520" y="4892040"/>
+            <a:ext cx="5029200" cy="365760"/>
           </a:xfrm>
           <a:prstGeom prst="rect">
             <a:avLst/>
@@ -11728,7 +12497,7 @@
           <a:lstStyle/>
           <a:p>
             <a:pPr algn="l">
-              <a:defRPr sz="1500" b="0">
+              <a:defRPr sz="1300" b="0">
                 <a:solidFill>
                   <a:srgbClr val="424242"/>
                 </a:solidFill>
@@ -11736,11 +12505,83 @@
               </a:defRPr>
             </a:pPr>
             <a:r>
-              <a:t>Try to make AI generate something</a:t>
+              <a:t>"Make me a dog picture"</a:t>
+            </a:r>
+          </a:p>
+        </p:txBody>
+      </p:sp>
+      <p:sp>
+        <p:nvSpPr>
+          <p:cNvPr id="18" name="TextBox 17"/>
+          <p:cNvSpPr txBox="1"/>
+          <p:nvPr/>
+        </p:nvSpPr>
+        <p:spPr>
+          <a:xfrm>
+            <a:off x="6217920" y="4572000"/>
+            <a:ext cx="5303520" cy="365760"/>
+          </a:xfrm>
+          <a:prstGeom prst="rect">
+            <a:avLst/>
+          </a:prstGeom>
+          <a:noFill/>
+        </p:spPr>
+        <p:txBody>
+          <a:bodyPr wrap="square">
+            <a:spAutoFit/>
+          </a:bodyPr>
+          <a:lstStyle/>
+          <a:p>
+            <a:pPr algn="l">
+              <a:defRPr sz="1400" b="1">
+                <a:solidFill>
+                  <a:srgbClr val="4CAF50"/>
+                </a:solidFill>
+                <a:latin typeface="Segoe UI"/>
+              </a:defRPr>
+            </a:pPr>
+            <a:r>
+              <a:t>Great image prompt:</a:t>
+            </a:r>
+          </a:p>
+        </p:txBody>
+      </p:sp>
+      <p:sp>
+        <p:nvSpPr>
+          <p:cNvPr id="19" name="TextBox 18"/>
+          <p:cNvSpPr txBox="1"/>
+          <p:nvPr/>
+        </p:nvSpPr>
+        <p:spPr>
+          <a:xfrm>
+            <a:off x="6217920" y="4892040"/>
+            <a:ext cx="5303520" cy="731520"/>
+          </a:xfrm>
+          <a:prstGeom prst="rect">
+            <a:avLst/>
+          </a:prstGeom>
+          <a:noFill/>
+        </p:spPr>
+        <p:txBody>
+          <a:bodyPr wrap="square">
+            <a:spAutoFit/>
+          </a:bodyPr>
+          <a:lstStyle/>
+          <a:p>
+            <a:pPr algn="l">
+              <a:defRPr sz="1300" b="0">
+                <a:solidFill>
+                  <a:srgbClr val="424242"/>
+                </a:solidFill>
+                <a:latin typeface="Segoe UI"/>
+              </a:defRPr>
+            </a:pPr>
+            <a:r>
+              <a:t>"A golden retriever puppy sitting in a field of sunflowers,</a:t>
             </a:r>
             <a:br/>
             <a:r>
-              <a:t>impossible or weird</a:t>
+              <a:t>watercolor painting style, warm sunset lighting, happy mood"</a:t>
             </a:r>
           </a:p>
         </p:txBody>
